--- a/PPT giga.pptx
+++ b/PPT giga.pptx
@@ -3891,7 +3891,7 @@
               <a:buNone/>
             </a:pPr>
             <a:r>
-              <a:rPr lang="en-US" sz="1710" b="1" kern="0" spc="-34" dirty="0">
+              <a:rPr lang="en-US" sz="1710" kern="0" spc="-34" dirty="0">
                 <a:solidFill>
                   <a:srgbClr val="000000">
                     <a:alpha val="99000"/>
@@ -4078,7 +4078,7 @@
       </p:sp>
       <p:pic>
         <p:nvPicPr>
-          <p:cNvPr id="4" name="Image 0" descr="preencoded.png"/>
+          <p:cNvPr id="8" name="Image 4" descr="preencoded.png"/>
           <p:cNvPicPr>
             <a:picLocks noChangeAspect="1"/>
           </p:cNvPicPr>
@@ -4086,106 +4086,6 @@
         </p:nvPicPr>
         <p:blipFill>
           <a:blip r:embed="rId3"/>
-          <a:srcRect r="50492" b="64906"/>
-          <a:stretch>
-            <a:fillRect/>
-          </a:stretch>
-        </p:blipFill>
-        <p:spPr>
-          <a:xfrm>
-            <a:off x="476250" y="1443410"/>
-            <a:ext cx="950214" cy="885825"/>
-          </a:xfrm>
-          <a:prstGeom prst="rect">
-            <a:avLst/>
-          </a:prstGeom>
-        </p:spPr>
-      </p:pic>
-      <p:pic>
-        <p:nvPicPr>
-          <p:cNvPr id="5" name="Image 1" descr="preencoded.png"/>
-          <p:cNvPicPr>
-            <a:picLocks noChangeAspect="1"/>
-          </p:cNvPicPr>
-          <p:nvPr/>
-        </p:nvPicPr>
-        <p:blipFill rotWithShape="1">
-          <a:blip r:embed="rId4"/>
-          <a:srcRect l="2162" t="3570" r="52723" b="64905"/>
-          <a:stretch>
-            <a:fillRect/>
-          </a:stretch>
-        </p:blipFill>
-        <p:spPr>
-          <a:xfrm>
-            <a:off x="2608480" y="1600200"/>
-            <a:ext cx="865881" cy="795718"/>
-          </a:xfrm>
-          <a:prstGeom prst="rect">
-            <a:avLst/>
-          </a:prstGeom>
-        </p:spPr>
-      </p:pic>
-      <p:pic>
-        <p:nvPicPr>
-          <p:cNvPr id="6" name="Image 2" descr="preencoded.png"/>
-          <p:cNvPicPr>
-            <a:picLocks noChangeAspect="1"/>
-          </p:cNvPicPr>
-          <p:nvPr/>
-        </p:nvPicPr>
-        <p:blipFill>
-          <a:blip r:embed="rId5"/>
-          <a:srcRect r="48725" b="64906"/>
-          <a:stretch>
-            <a:fillRect/>
-          </a:stretch>
-        </p:blipFill>
-        <p:spPr>
-          <a:xfrm>
-            <a:off x="4657725" y="1527239"/>
-            <a:ext cx="984123" cy="885825"/>
-          </a:xfrm>
-          <a:prstGeom prst="rect">
-            <a:avLst/>
-          </a:prstGeom>
-        </p:spPr>
-      </p:pic>
-      <p:pic>
-        <p:nvPicPr>
-          <p:cNvPr id="7" name="Image 3" descr="preencoded.png"/>
-          <p:cNvPicPr>
-            <a:picLocks noChangeAspect="1"/>
-          </p:cNvPicPr>
-          <p:nvPr/>
-        </p:nvPicPr>
-        <p:blipFill>
-          <a:blip r:embed="rId6"/>
-          <a:srcRect r="49032" b="64906"/>
-          <a:stretch>
-            <a:fillRect/>
-          </a:stretch>
-        </p:blipFill>
-        <p:spPr>
-          <a:xfrm>
-            <a:off x="6748463" y="1499616"/>
-            <a:ext cx="978217" cy="885825"/>
-          </a:xfrm>
-          <a:prstGeom prst="rect">
-            <a:avLst/>
-          </a:prstGeom>
-        </p:spPr>
-      </p:pic>
-      <p:pic>
-        <p:nvPicPr>
-          <p:cNvPr id="8" name="Image 4" descr="preencoded.png"/>
-          <p:cNvPicPr>
-            <a:picLocks noChangeAspect="1"/>
-          </p:cNvPicPr>
-          <p:nvPr/>
-        </p:nvPicPr>
-        <p:blipFill>
-          <a:blip r:embed="rId7"/>
           <a:srcRect/>
           <a:stretch/>
         </p:blipFill>
@@ -5090,11 +4990,167 @@
           </a:p>
         </p:txBody>
       </p:sp>
+      <p:pic>
+        <p:nvPicPr>
+          <p:cNvPr id="26" name="Graphic 25">
+            <a:extLst>
+              <a:ext uri="{FF2B5EF4-FFF2-40B4-BE49-F238E27FC236}">
+                <a16:creationId xmlns:a16="http://schemas.microsoft.com/office/drawing/2014/main" id="{7C155289-BB85-548D-302C-75C533B1CA58}"/>
+              </a:ext>
+            </a:extLst>
+          </p:cNvPr>
+          <p:cNvPicPr>
+            <a:picLocks noChangeAspect="1"/>
+          </p:cNvPicPr>
+          <p:nvPr/>
+        </p:nvPicPr>
+        <p:blipFill>
+          <a:blip r:embed="rId4">
+            <a:extLst>
+              <a:ext uri="{96DAC541-7B7A-43D3-8B79-37D633B846F1}">
+                <asvg:svgBlip xmlns:asvg="http://schemas.microsoft.com/office/drawing/2016/SVG/main" r:embed="rId5"/>
+              </a:ext>
+            </a:extLst>
+          </a:blip>
+          <a:stretch>
+            <a:fillRect/>
+          </a:stretch>
+        </p:blipFill>
+        <p:spPr>
+          <a:xfrm>
+            <a:off x="669750" y="1640260"/>
+            <a:ext cx="582978" cy="586839"/>
+          </a:xfrm>
+          <a:prstGeom prst="rect">
+            <a:avLst/>
+          </a:prstGeom>
+        </p:spPr>
+      </p:pic>
+      <p:pic>
+        <p:nvPicPr>
+          <p:cNvPr id="37" name="Graphic 36">
+            <a:extLst>
+              <a:ext uri="{FF2B5EF4-FFF2-40B4-BE49-F238E27FC236}">
+                <a16:creationId xmlns:a16="http://schemas.microsoft.com/office/drawing/2014/main" id="{132D71BF-906D-3314-E860-B86ADCECEC6B}"/>
+              </a:ext>
+            </a:extLst>
+          </p:cNvPr>
+          <p:cNvPicPr>
+            <a:picLocks noChangeAspect="1"/>
+          </p:cNvPicPr>
+          <p:nvPr/>
+        </p:nvPicPr>
+        <p:blipFill>
+          <a:blip r:embed="rId6">
+            <a:extLst>
+              <a:ext uri="{96DAC541-7B7A-43D3-8B79-37D633B846F1}">
+                <asvg:svgBlip xmlns:asvg="http://schemas.microsoft.com/office/drawing/2016/SVG/main" r:embed="rId7"/>
+              </a:ext>
+            </a:extLst>
+          </a:blip>
+          <a:stretch>
+            <a:fillRect/>
+          </a:stretch>
+        </p:blipFill>
+        <p:spPr>
+          <a:xfrm>
+            <a:off x="2762662" y="1704385"/>
+            <a:ext cx="581616" cy="581616"/>
+          </a:xfrm>
+          <a:prstGeom prst="rect">
+            <a:avLst/>
+          </a:prstGeom>
+        </p:spPr>
+      </p:pic>
+      <p:pic>
+        <p:nvPicPr>
+          <p:cNvPr id="40" name="Graphic 39">
+            <a:extLst>
+              <a:ext uri="{FF2B5EF4-FFF2-40B4-BE49-F238E27FC236}">
+                <a16:creationId xmlns:a16="http://schemas.microsoft.com/office/drawing/2014/main" id="{CE182398-52D7-A37A-2427-5FF82A0E60C0}"/>
+              </a:ext>
+            </a:extLst>
+          </p:cNvPr>
+          <p:cNvPicPr>
+            <a:picLocks noChangeAspect="1"/>
+          </p:cNvPicPr>
+          <p:nvPr/>
+        </p:nvPicPr>
+        <p:blipFill>
+          <a:blip r:embed="rId8">
+            <a:extLst>
+              <a:ext uri="{96DAC541-7B7A-43D3-8B79-37D633B846F1}">
+                <asvg:svgBlip xmlns:asvg="http://schemas.microsoft.com/office/drawing/2016/SVG/main" r:embed="rId9"/>
+              </a:ext>
+            </a:extLst>
+          </a:blip>
+          <a:stretch>
+            <a:fillRect/>
+          </a:stretch>
+        </p:blipFill>
+        <p:spPr>
+          <a:xfrm>
+            <a:off x="4863355" y="1741619"/>
+            <a:ext cx="570848" cy="574628"/>
+          </a:xfrm>
+          <a:prstGeom prst="rect">
+            <a:avLst/>
+          </a:prstGeom>
+        </p:spPr>
+      </p:pic>
+      <p:pic>
+        <p:nvPicPr>
+          <p:cNvPr id="43" name="Graphic 42">
+            <a:extLst>
+              <a:ext uri="{FF2B5EF4-FFF2-40B4-BE49-F238E27FC236}">
+                <a16:creationId xmlns:a16="http://schemas.microsoft.com/office/drawing/2014/main" id="{82E34B89-98C4-8E6F-0F4A-9B5F8C9C492F}"/>
+              </a:ext>
+            </a:extLst>
+          </p:cNvPr>
+          <p:cNvPicPr>
+            <a:picLocks noChangeAspect="1"/>
+          </p:cNvPicPr>
+          <p:nvPr/>
+        </p:nvPicPr>
+        <p:blipFill>
+          <a:blip r:embed="rId10">
+            <a:extLst>
+              <a:ext uri="{96DAC541-7B7A-43D3-8B79-37D633B846F1}">
+                <asvg:svgBlip xmlns:asvg="http://schemas.microsoft.com/office/drawing/2016/SVG/main" r:embed="rId11"/>
+              </a:ext>
+            </a:extLst>
+          </a:blip>
+          <a:stretch>
+            <a:fillRect/>
+          </a:stretch>
+        </p:blipFill>
+        <p:spPr>
+          <a:xfrm>
+            <a:off x="6939222" y="1700281"/>
+            <a:ext cx="585719" cy="585719"/>
+          </a:xfrm>
+          <a:prstGeom prst="rect">
+            <a:avLst/>
+          </a:prstGeom>
+        </p:spPr>
+      </p:pic>
     </p:spTree>
   </p:cSld>
   <p:clrMapOvr>
     <a:masterClrMapping/>
   </p:clrMapOvr>
+  <mc:AlternateContent xmlns:mc="http://schemas.openxmlformats.org/markup-compatibility/2006">
+    <mc:Choice xmlns:p14="http://schemas.microsoft.com/office/powerpoint/2010/main" Requires="p14">
+      <p:transition spd="med" p14:dur="700">
+        <p:fade/>
+      </p:transition>
+    </mc:Choice>
+    <mc:Fallback>
+      <p:transition spd="med">
+        <p:fade/>
+      </p:transition>
+    </mc:Fallback>
+  </mc:AlternateContent>
 </p:sld>
 </file>
 
@@ -5166,7 +5222,9 @@
           <a:ln/>
         </p:spPr>
         <p:txBody>
-          <a:bodyPr wrap="square" lIns="0" tIns="0" rIns="0" bIns="0" rtlCol="0" anchor="ctr"/>
+          <a:bodyPr wrap="square" lIns="0" tIns="0" rIns="0" bIns="0" rtlCol="0" anchor="t">
+            <a:normAutofit/>
+          </a:bodyPr>
           <a:lstStyle/>
           <a:p>
             <a:pPr marL="0" indent="0" algn="l">
@@ -5210,7 +5268,9 @@
           <a:ln/>
         </p:spPr>
         <p:txBody>
-          <a:bodyPr wrap="square" lIns="0" tIns="0" rIns="0" bIns="0" rtlCol="0" anchor="t"/>
+          <a:bodyPr wrap="square" lIns="0" tIns="0" rIns="0" bIns="0" rtlCol="0" anchor="t">
+            <a:normAutofit/>
+          </a:bodyPr>
           <a:lstStyle/>
           <a:p>
             <a:pPr marL="0" indent="0" algn="l">
@@ -5279,7 +5339,9 @@
           <a:ln/>
         </p:spPr>
         <p:txBody>
-          <a:bodyPr wrap="square" lIns="0" tIns="0" rIns="0" bIns="0" rtlCol="0" anchor="ctr"/>
+          <a:bodyPr wrap="square" lIns="0" tIns="0" rIns="0" bIns="0" rtlCol="0" anchor="t">
+            <a:normAutofit/>
+          </a:bodyPr>
           <a:lstStyle/>
           <a:p>
             <a:pPr marL="0" indent="0" algn="l">
@@ -5323,7 +5385,9 @@
           <a:ln/>
         </p:spPr>
         <p:txBody>
-          <a:bodyPr wrap="square" lIns="0" tIns="0" rIns="0" bIns="0" rtlCol="0" anchor="t"/>
+          <a:bodyPr wrap="square" lIns="0" tIns="0" rIns="0" bIns="0" rtlCol="0" anchor="t">
+            <a:normAutofit/>
+          </a:bodyPr>
           <a:lstStyle/>
           <a:p>
             <a:pPr marL="0" indent="0" algn="l">
@@ -5392,7 +5456,9 @@
           <a:ln/>
         </p:spPr>
         <p:txBody>
-          <a:bodyPr wrap="square" lIns="0" tIns="0" rIns="0" bIns="0" rtlCol="0" anchor="ctr"/>
+          <a:bodyPr wrap="square" lIns="0" tIns="0" rIns="0" bIns="0" rtlCol="0" anchor="t">
+            <a:normAutofit/>
+          </a:bodyPr>
           <a:lstStyle/>
           <a:p>
             <a:pPr marL="0" indent="0" algn="l">
@@ -5436,7 +5502,9 @@
           <a:ln/>
         </p:spPr>
         <p:txBody>
-          <a:bodyPr wrap="square" lIns="0" tIns="0" rIns="0" bIns="0" rtlCol="0" anchor="t"/>
+          <a:bodyPr wrap="square" lIns="0" tIns="0" rIns="0" bIns="0" rtlCol="0" anchor="t">
+            <a:normAutofit/>
+          </a:bodyPr>
           <a:lstStyle/>
           <a:p>
             <a:pPr marL="0" indent="0" algn="l">
@@ -5505,7 +5573,9 @@
           <a:ln/>
         </p:spPr>
         <p:txBody>
-          <a:bodyPr wrap="square" lIns="0" tIns="0" rIns="0" bIns="0" rtlCol="0" anchor="ctr"/>
+          <a:bodyPr wrap="square" lIns="0" tIns="0" rIns="0" bIns="0" rtlCol="0" anchor="t">
+            <a:normAutofit/>
+          </a:bodyPr>
           <a:lstStyle/>
           <a:p>
             <a:pPr marL="0" indent="0" algn="l">
@@ -5549,7 +5619,9 @@
           <a:ln/>
         </p:spPr>
         <p:txBody>
-          <a:bodyPr wrap="square" lIns="0" tIns="0" rIns="0" bIns="0" rtlCol="0" anchor="t"/>
+          <a:bodyPr wrap="square" lIns="0" tIns="0" rIns="0" bIns="0" rtlCol="0" anchor="t">
+            <a:normAutofit/>
+          </a:bodyPr>
           <a:lstStyle/>
           <a:p>
             <a:pPr marL="0" indent="0" algn="l">
@@ -5618,7 +5690,9 @@
           <a:ln/>
         </p:spPr>
         <p:txBody>
-          <a:bodyPr wrap="square" lIns="0" tIns="0" rIns="0" bIns="0" rtlCol="0" anchor="ctr"/>
+          <a:bodyPr wrap="square" lIns="0" tIns="0" rIns="0" bIns="0" rtlCol="0" anchor="t">
+            <a:normAutofit/>
+          </a:bodyPr>
           <a:lstStyle/>
           <a:p>
             <a:pPr marL="0" indent="0" algn="l">
@@ -5662,7 +5736,9 @@
           <a:ln/>
         </p:spPr>
         <p:txBody>
-          <a:bodyPr wrap="square" lIns="0" tIns="0" rIns="0" bIns="0" rtlCol="0" anchor="t"/>
+          <a:bodyPr wrap="square" lIns="0" tIns="0" rIns="0" bIns="0" rtlCol="0" anchor="t">
+            <a:normAutofit/>
+          </a:bodyPr>
           <a:lstStyle/>
           <a:p>
             <a:pPr marL="0" indent="0" algn="l">
@@ -5731,7 +5807,9 @@
           <a:ln/>
         </p:spPr>
         <p:txBody>
-          <a:bodyPr wrap="square" lIns="0" tIns="0" rIns="0" bIns="0" rtlCol="0" anchor="ctr"/>
+          <a:bodyPr wrap="square" lIns="0" tIns="0" rIns="0" bIns="0" rtlCol="0" anchor="t">
+            <a:normAutofit/>
+          </a:bodyPr>
           <a:lstStyle/>
           <a:p>
             <a:pPr marL="0" indent="0" algn="l">
@@ -5775,7 +5853,9 @@
           <a:ln/>
         </p:spPr>
         <p:txBody>
-          <a:bodyPr wrap="square" lIns="0" tIns="0" rIns="0" bIns="0" rtlCol="0" anchor="t"/>
+          <a:bodyPr wrap="square" lIns="0" tIns="0" rIns="0" bIns="0" rtlCol="0" anchor="t">
+            <a:normAutofit/>
+          </a:bodyPr>
           <a:lstStyle/>
           <a:p>
             <a:pPr marL="0" indent="0" algn="l">
@@ -5810,7 +5890,7 @@
         <p:spPr>
           <a:xfrm>
             <a:off x="476250" y="476250"/>
-            <a:ext cx="3404374" cy="1257300"/>
+            <a:ext cx="3404374" cy="3467100"/>
           </a:xfrm>
           <a:prstGeom prst="rect">
             <a:avLst/>
@@ -5819,7 +5899,7 @@
           <a:ln/>
         </p:spPr>
         <p:txBody>
-          <a:bodyPr wrap="square" lIns="0" tIns="0" rIns="0" bIns="0" rtlCol="0" anchor="ctr"/>
+          <a:bodyPr wrap="square" lIns="0" tIns="0" rIns="0" bIns="0" rtlCol="0" anchor="t"/>
           <a:lstStyle/>
           <a:p>
             <a:pPr marL="0" indent="0" algn="l">
@@ -5939,6 +6019,18 @@
   <p:clrMapOvr>
     <a:masterClrMapping/>
   </p:clrMapOvr>
+  <mc:AlternateContent xmlns:mc="http://schemas.openxmlformats.org/markup-compatibility/2006">
+    <mc:Choice xmlns:p14="http://schemas.microsoft.com/office/powerpoint/2010/main" Requires="p14">
+      <p:transition spd="med" p14:dur="700">
+        <p:fade/>
+      </p:transition>
+    </mc:Choice>
+    <mc:Fallback>
+      <p:transition spd="med">
+        <p:fade/>
+      </p:transition>
+    </mc:Fallback>
+  </mc:AlternateContent>
 </p:sld>
 </file>
 
@@ -5975,8 +6067,8 @@
         </p:nvSpPr>
         <p:spPr>
           <a:xfrm>
-            <a:off x="476250" y="476250"/>
-            <a:ext cx="3162300" cy="1257300"/>
+            <a:off x="476250" y="476249"/>
+            <a:ext cx="3162300" cy="2879271"/>
           </a:xfrm>
           <a:prstGeom prst="rect">
             <a:avLst/>
@@ -5985,7 +6077,7 @@
           <a:ln/>
         </p:spPr>
         <p:txBody>
-          <a:bodyPr wrap="square" lIns="0" tIns="0" rIns="0" bIns="0" rtlCol="0" anchor="ctr"/>
+          <a:bodyPr wrap="square" lIns="0" tIns="0" rIns="0" bIns="0" rtlCol="0" anchor="t"/>
           <a:lstStyle/>
           <a:p>
             <a:pPr marL="0" indent="0" algn="l">
@@ -6118,7 +6210,7 @@
           <a:ln/>
         </p:spPr>
         <p:txBody>
-          <a:bodyPr wrap="square" lIns="0" tIns="0" rIns="0" bIns="0" rtlCol="0" anchor="ctr"/>
+          <a:bodyPr wrap="square" lIns="0" tIns="0" rIns="0" bIns="0" rtlCol="0" anchor="t"/>
           <a:lstStyle/>
           <a:p>
             <a:pPr marL="0" indent="0" algn="l">
@@ -6162,7 +6254,7 @@
           <a:ln/>
         </p:spPr>
         <p:txBody>
-          <a:bodyPr wrap="square" lIns="0" tIns="0" rIns="0" bIns="0" rtlCol="0" anchor="ctr"/>
+          <a:bodyPr wrap="square" lIns="0" tIns="0" rIns="0" bIns="0" rtlCol="0" anchor="t"/>
           <a:lstStyle/>
           <a:p>
             <a:pPr marL="0" indent="0" algn="l">
@@ -6196,8 +6288,8 @@
         </p:nvSpPr>
         <p:spPr>
           <a:xfrm>
-            <a:off x="6096000" y="2090738"/>
-            <a:ext cx="2657475" cy="914400"/>
+            <a:off x="6096000" y="2090737"/>
+            <a:ext cx="2657475" cy="1705655"/>
           </a:xfrm>
           <a:prstGeom prst="rect">
             <a:avLst/>
@@ -6206,7 +6298,7 @@
           <a:ln/>
         </p:spPr>
         <p:txBody>
-          <a:bodyPr wrap="square" lIns="0" tIns="0" rIns="0" bIns="0" rtlCol="0" anchor="ctr"/>
+          <a:bodyPr wrap="square" lIns="0" tIns="0" rIns="0" bIns="0" rtlCol="0" anchor="t"/>
           <a:lstStyle/>
           <a:p>
             <a:pPr marL="0" indent="0" algn="l">
@@ -6240,8 +6332,8 @@
         </p:nvSpPr>
         <p:spPr>
           <a:xfrm>
-            <a:off x="6096000" y="476250"/>
-            <a:ext cx="2657475" cy="914400"/>
+            <a:off x="6096000" y="476249"/>
+            <a:ext cx="2657475" cy="1450521"/>
           </a:xfrm>
           <a:prstGeom prst="rect">
             <a:avLst/>
@@ -6250,7 +6342,7 @@
           <a:ln/>
         </p:spPr>
         <p:txBody>
-          <a:bodyPr wrap="square" lIns="0" tIns="0" rIns="0" bIns="0" rtlCol="0" anchor="ctr"/>
+          <a:bodyPr wrap="square" lIns="0" tIns="0" rIns="0" bIns="0" rtlCol="0" anchor="t"/>
           <a:lstStyle/>
           <a:p>
             <a:pPr marL="0" indent="0" algn="l">
@@ -6281,6 +6373,18 @@
   <p:clrMapOvr>
     <a:masterClrMapping/>
   </p:clrMapOvr>
+  <mc:AlternateContent xmlns:mc="http://schemas.openxmlformats.org/markup-compatibility/2006">
+    <mc:Choice xmlns:p14="http://schemas.microsoft.com/office/powerpoint/2010/main" Requires="p14">
+      <p:transition spd="med" p14:dur="700">
+        <p:fade/>
+      </p:transition>
+    </mc:Choice>
+    <mc:Fallback>
+      <p:transition spd="med">
+        <p:fade/>
+      </p:transition>
+    </mc:Fallback>
+  </mc:AlternateContent>
 </p:sld>
 </file>
 
@@ -6384,8 +6488,8 @@
         </p:nvSpPr>
         <p:spPr>
           <a:xfrm>
-            <a:off x="485775" y="476250"/>
-            <a:ext cx="4176712" cy="1727454"/>
+            <a:off x="485775" y="476249"/>
+            <a:ext cx="3057525" cy="3099707"/>
           </a:xfrm>
           <a:prstGeom prst="rect">
             <a:avLst/>
@@ -6453,6 +6557,18 @@
   <p:clrMapOvr>
     <a:masterClrMapping/>
   </p:clrMapOvr>
+  <mc:AlternateContent xmlns:mc="http://schemas.openxmlformats.org/markup-compatibility/2006">
+    <mc:Choice xmlns:p14="http://schemas.microsoft.com/office/powerpoint/2010/main" Requires="p14">
+      <p:transition spd="med" p14:dur="700">
+        <p:fade/>
+      </p:transition>
+    </mc:Choice>
+    <mc:Fallback>
+      <p:transition spd="med">
+        <p:fade/>
+      </p:transition>
+    </mc:Fallback>
+  </mc:AlternateContent>
 </p:sld>
 </file>
 
@@ -6557,7 +6673,7 @@
         <p:spPr>
           <a:xfrm>
             <a:off x="485775" y="476250"/>
-            <a:ext cx="4176712" cy="838200"/>
+            <a:ext cx="3147332" cy="2895600"/>
           </a:xfrm>
           <a:prstGeom prst="rect">
             <a:avLst/>
@@ -6566,7 +6682,7 @@
           <a:ln/>
         </p:spPr>
         <p:txBody>
-          <a:bodyPr wrap="square" lIns="0" tIns="0" rIns="0" bIns="0" rtlCol="0" anchor="ctr"/>
+          <a:bodyPr wrap="square" lIns="0" tIns="0" rIns="0" bIns="0" rtlCol="0" anchor="t"/>
           <a:lstStyle/>
           <a:p>
             <a:pPr marL="0" indent="0" algn="l">
@@ -6592,8 +6708,8 @@
           </a:p>
         </p:txBody>
       </p:sp>
-      <mc:AlternateContent xmlns:mc="http://schemas.openxmlformats.org/markup-compatibility/2006">
-        <mc:Choice xmlns:cx1="http://schemas.microsoft.com/office/drawing/2015/9/8/chartex" Requires="cx1">
+      <mc:AlternateContent xmlns:mc="http://schemas.openxmlformats.org/markup-compatibility/2006" xmlns:cx1="http://schemas.microsoft.com/office/drawing/2015/9/8/chartex">
+        <mc:Choice Requires="cx1">
           <p:graphicFrame>
             <p:nvGraphicFramePr>
               <p:cNvPr id="32" name="Chart 31">
@@ -6623,7 +6739,7 @@
             </a:graphic>
           </p:graphicFrame>
         </mc:Choice>
-        <mc:Fallback>
+        <mc:Fallback xmlns="">
           <p:pic>
             <p:nvPicPr>
               <p:cNvPr id="32" name="Chart 31">
@@ -6661,6 +6777,18 @@
   <p:clrMapOvr>
     <a:masterClrMapping/>
   </p:clrMapOvr>
+  <mc:AlternateContent xmlns:mc="http://schemas.openxmlformats.org/markup-compatibility/2006">
+    <mc:Choice xmlns:p14="http://schemas.microsoft.com/office/powerpoint/2010/main" Requires="p14">
+      <p:transition spd="med" p14:dur="700">
+        <p:fade/>
+      </p:transition>
+    </mc:Choice>
+    <mc:Fallback>
+      <p:transition spd="med">
+        <p:fade/>
+      </p:transition>
+    </mc:Fallback>
+  </mc:AlternateContent>
 </p:sld>
 </file>
 
@@ -6698,7 +6826,7 @@
         <p:spPr>
           <a:xfrm>
             <a:off x="476250" y="476250"/>
-            <a:ext cx="3171825" cy="419100"/>
+            <a:ext cx="3843337" cy="1333500"/>
           </a:xfrm>
           <a:prstGeom prst="rect">
             <a:avLst/>
@@ -6707,7 +6835,7 @@
           <a:ln/>
         </p:spPr>
         <p:txBody>
-          <a:bodyPr wrap="square" lIns="0" tIns="0" rIns="0" bIns="0" rtlCol="0" anchor="ctr"/>
+          <a:bodyPr wrap="square" lIns="0" tIns="0" rIns="0" bIns="0" rtlCol="0" anchor="t"/>
           <a:lstStyle/>
           <a:p>
             <a:pPr marL="0" indent="0" algn="l">
@@ -6808,8 +6936,8 @@
         </p:nvSpPr>
         <p:spPr>
           <a:xfrm>
-            <a:off x="504825" y="3068442"/>
-            <a:ext cx="681038" cy="247650"/>
+            <a:off x="504824" y="3011294"/>
+            <a:ext cx="1876425" cy="247650"/>
           </a:xfrm>
           <a:prstGeom prst="rect">
             <a:avLst/>
@@ -6852,8 +6980,8 @@
         </p:nvSpPr>
         <p:spPr>
           <a:xfrm>
-            <a:off x="495300" y="3276600"/>
-            <a:ext cx="1885950" cy="566738"/>
+            <a:off x="495300" y="3333751"/>
+            <a:ext cx="1885950" cy="657225"/>
           </a:xfrm>
           <a:prstGeom prst="rect">
             <a:avLst/>
@@ -6862,7 +6990,7 @@
           <a:ln/>
         </p:spPr>
         <p:txBody>
-          <a:bodyPr wrap="square" lIns="0" tIns="0" rIns="0" bIns="0" rtlCol="0" anchor="ctr"/>
+          <a:bodyPr wrap="square" lIns="0" tIns="0" rIns="0" bIns="0" rtlCol="0" anchor="t"/>
           <a:lstStyle/>
           <a:p>
             <a:pPr marL="0" indent="0" algn="l">
@@ -6896,8 +7024,8 @@
         </p:nvSpPr>
         <p:spPr>
           <a:xfrm>
-            <a:off x="2652713" y="3082730"/>
-            <a:ext cx="595313" cy="247650"/>
+            <a:off x="2652713" y="3025582"/>
+            <a:ext cx="1814513" cy="247650"/>
           </a:xfrm>
           <a:prstGeom prst="rect">
             <a:avLst/>
@@ -6940,8 +7068,8 @@
         </p:nvSpPr>
         <p:spPr>
           <a:xfrm>
-            <a:off x="2652713" y="3290888"/>
-            <a:ext cx="1814513" cy="566738"/>
+            <a:off x="2652713" y="3348039"/>
+            <a:ext cx="1814513" cy="657225"/>
           </a:xfrm>
           <a:prstGeom prst="rect">
             <a:avLst/>
@@ -6950,7 +7078,7 @@
           <a:ln/>
         </p:spPr>
         <p:txBody>
-          <a:bodyPr wrap="square" lIns="0" tIns="0" rIns="0" bIns="0" rtlCol="0" anchor="ctr"/>
+          <a:bodyPr wrap="square" lIns="0" tIns="0" rIns="0" bIns="0" rtlCol="0" anchor="t"/>
           <a:lstStyle/>
           <a:p>
             <a:pPr marL="0" indent="0" algn="l">
@@ -6984,8 +7112,8 @@
         </p:nvSpPr>
         <p:spPr>
           <a:xfrm>
-            <a:off x="4819650" y="1044379"/>
-            <a:ext cx="676275" cy="247650"/>
+            <a:off x="4819650" y="987231"/>
+            <a:ext cx="1666875" cy="247650"/>
           </a:xfrm>
           <a:prstGeom prst="rect">
             <a:avLst/>
@@ -7028,8 +7156,8 @@
         </p:nvSpPr>
         <p:spPr>
           <a:xfrm>
-            <a:off x="4819650" y="1252538"/>
-            <a:ext cx="1666875" cy="566738"/>
+            <a:off x="4819650" y="1309689"/>
+            <a:ext cx="1666875" cy="657225"/>
           </a:xfrm>
           <a:prstGeom prst="rect">
             <a:avLst/>
@@ -7038,7 +7166,7 @@
           <a:ln/>
         </p:spPr>
         <p:txBody>
-          <a:bodyPr wrap="square" lIns="0" tIns="0" rIns="0" bIns="0" rtlCol="0" anchor="ctr"/>
+          <a:bodyPr wrap="square" lIns="0" tIns="0" rIns="0" bIns="0" rtlCol="0" anchor="t"/>
           <a:lstStyle/>
           <a:p>
             <a:pPr marL="0" indent="0" algn="l">
@@ -7072,8 +7200,8 @@
         </p:nvSpPr>
         <p:spPr>
           <a:xfrm>
-            <a:off x="6986588" y="1044379"/>
-            <a:ext cx="666750" cy="247650"/>
+            <a:off x="6986588" y="987231"/>
+            <a:ext cx="1666874" cy="247650"/>
           </a:xfrm>
           <a:prstGeom prst="rect">
             <a:avLst/>
@@ -7116,8 +7244,8 @@
         </p:nvSpPr>
         <p:spPr>
           <a:xfrm>
-            <a:off x="6986588" y="1252538"/>
-            <a:ext cx="1704975" cy="566738"/>
+            <a:off x="6986588" y="1309689"/>
+            <a:ext cx="1704975" cy="657225"/>
           </a:xfrm>
           <a:prstGeom prst="rect">
             <a:avLst/>
@@ -7126,7 +7254,7 @@
           <a:ln/>
         </p:spPr>
         <p:txBody>
-          <a:bodyPr wrap="square" lIns="0" tIns="0" rIns="0" bIns="0" rtlCol="0" anchor="ctr"/>
+          <a:bodyPr wrap="square" lIns="0" tIns="0" rIns="0" bIns="0" rtlCol="0" anchor="t"/>
           <a:lstStyle/>
           <a:p>
             <a:pPr marL="0" indent="0" algn="l">
@@ -7296,6 +7424,18 @@
   <p:clrMapOvr>
     <a:masterClrMapping/>
   </p:clrMapOvr>
+  <mc:AlternateContent xmlns:mc="http://schemas.openxmlformats.org/markup-compatibility/2006">
+    <mc:Choice xmlns:p14="http://schemas.microsoft.com/office/powerpoint/2010/main" Requires="p14">
+      <p:transition spd="med" p14:dur="700">
+        <p:fade/>
+      </p:transition>
+    </mc:Choice>
+    <mc:Fallback>
+      <p:transition spd="med">
+        <p:fade/>
+      </p:transition>
+    </mc:Fallback>
+  </mc:AlternateContent>
 </p:sld>
 </file>
 
@@ -7611,8 +7751,8 @@
         </p:nvSpPr>
         <p:spPr>
           <a:xfrm>
-            <a:off x="514350" y="3067050"/>
-            <a:ext cx="681038" cy="247650"/>
+            <a:off x="514349" y="2993572"/>
+            <a:ext cx="1386057" cy="247650"/>
           </a:xfrm>
           <a:prstGeom prst="rect">
             <a:avLst/>
@@ -7655,8 +7795,8 @@
         </p:nvSpPr>
         <p:spPr>
           <a:xfrm>
-            <a:off x="504825" y="3371850"/>
-            <a:ext cx="1376363" cy="566738"/>
+            <a:off x="504825" y="3298372"/>
+            <a:ext cx="1376363" cy="736826"/>
           </a:xfrm>
           <a:prstGeom prst="rect">
             <a:avLst/>
@@ -7665,7 +7805,7 @@
           <a:ln/>
         </p:spPr>
         <p:txBody>
-          <a:bodyPr wrap="square" lIns="0" tIns="0" rIns="0" bIns="0" rtlCol="0" anchor="ctr"/>
+          <a:bodyPr wrap="square" lIns="0" tIns="0" rIns="0" bIns="0" rtlCol="0" anchor="t"/>
           <a:lstStyle/>
           <a:p>
             <a:pPr marL="0" indent="0" algn="l">
@@ -7699,8 +7839,8 @@
         </p:nvSpPr>
         <p:spPr>
           <a:xfrm>
-            <a:off x="2224088" y="3067050"/>
-            <a:ext cx="595313" cy="247650"/>
+            <a:off x="2224088" y="2993572"/>
+            <a:ext cx="1211588" cy="247650"/>
           </a:xfrm>
           <a:prstGeom prst="rect">
             <a:avLst/>
@@ -7743,8 +7883,8 @@
         </p:nvSpPr>
         <p:spPr>
           <a:xfrm>
-            <a:off x="2224088" y="3371850"/>
-            <a:ext cx="1376363" cy="566738"/>
+            <a:off x="2224088" y="3298372"/>
+            <a:ext cx="1376363" cy="736826"/>
           </a:xfrm>
           <a:prstGeom prst="rect">
             <a:avLst/>
@@ -7753,7 +7893,7 @@
           <a:ln/>
         </p:spPr>
         <p:txBody>
-          <a:bodyPr wrap="square" lIns="0" tIns="0" rIns="0" bIns="0" rtlCol="0" anchor="ctr"/>
+          <a:bodyPr wrap="square" lIns="0" tIns="0" rIns="0" bIns="0" rtlCol="0" anchor="t"/>
           <a:lstStyle/>
           <a:p>
             <a:pPr marL="0" indent="0" algn="l">
@@ -7787,8 +7927,8 @@
         </p:nvSpPr>
         <p:spPr>
           <a:xfrm>
-            <a:off x="3952875" y="966788"/>
-            <a:ext cx="676275" cy="247650"/>
+            <a:off x="3952875" y="893310"/>
+            <a:ext cx="1376363" cy="247650"/>
           </a:xfrm>
           <a:prstGeom prst="rect">
             <a:avLst/>
@@ -7831,8 +7971,8 @@
         </p:nvSpPr>
         <p:spPr>
           <a:xfrm>
-            <a:off x="3952875" y="1271588"/>
-            <a:ext cx="1376363" cy="566738"/>
+            <a:off x="3952875" y="1198110"/>
+            <a:ext cx="1376363" cy="736826"/>
           </a:xfrm>
           <a:prstGeom prst="rect">
             <a:avLst/>
@@ -7841,7 +7981,7 @@
           <a:ln/>
         </p:spPr>
         <p:txBody>
-          <a:bodyPr wrap="square" lIns="0" tIns="0" rIns="0" bIns="0" rtlCol="0" anchor="ctr"/>
+          <a:bodyPr wrap="square" lIns="0" tIns="0" rIns="0" bIns="0" rtlCol="0" anchor="t"/>
           <a:lstStyle/>
           <a:p>
             <a:pPr marL="0" indent="0" algn="l">
@@ -7875,8 +8015,8 @@
         </p:nvSpPr>
         <p:spPr>
           <a:xfrm>
-            <a:off x="5686425" y="966788"/>
-            <a:ext cx="666750" cy="247650"/>
+            <a:off x="5686425" y="893310"/>
+            <a:ext cx="1356978" cy="247650"/>
           </a:xfrm>
           <a:prstGeom prst="rect">
             <a:avLst/>
@@ -7919,8 +8059,8 @@
         </p:nvSpPr>
         <p:spPr>
           <a:xfrm>
-            <a:off x="5686425" y="1271588"/>
-            <a:ext cx="1376363" cy="566738"/>
+            <a:off x="5686425" y="1198110"/>
+            <a:ext cx="1376363" cy="736826"/>
           </a:xfrm>
           <a:prstGeom prst="rect">
             <a:avLst/>
@@ -7929,7 +8069,7 @@
           <a:ln/>
         </p:spPr>
         <p:txBody>
-          <a:bodyPr wrap="square" lIns="0" tIns="0" rIns="0" bIns="0" rtlCol="0" anchor="ctr"/>
+          <a:bodyPr wrap="square" lIns="0" tIns="0" rIns="0" bIns="0" rtlCol="0" anchor="t"/>
           <a:lstStyle/>
           <a:p>
             <a:pPr marL="0" indent="0" algn="l">
@@ -7963,8 +8103,8 @@
         </p:nvSpPr>
         <p:spPr>
           <a:xfrm>
-            <a:off x="7415213" y="966788"/>
-            <a:ext cx="666750" cy="247650"/>
+            <a:off x="7415213" y="893310"/>
+            <a:ext cx="1356978" cy="247650"/>
           </a:xfrm>
           <a:prstGeom prst="rect">
             <a:avLst/>
@@ -8007,8 +8147,8 @@
         </p:nvSpPr>
         <p:spPr>
           <a:xfrm>
-            <a:off x="7415213" y="1271588"/>
-            <a:ext cx="1376363" cy="566738"/>
+            <a:off x="7415213" y="1198110"/>
+            <a:ext cx="1376363" cy="736826"/>
           </a:xfrm>
           <a:prstGeom prst="rect">
             <a:avLst/>
@@ -8017,7 +8157,7 @@
           <a:ln/>
         </p:spPr>
         <p:txBody>
-          <a:bodyPr wrap="square" lIns="0" tIns="0" rIns="0" bIns="0" rtlCol="0" anchor="ctr"/>
+          <a:bodyPr wrap="square" lIns="0" tIns="0" rIns="0" bIns="0" rtlCol="0" anchor="t"/>
           <a:lstStyle/>
           <a:p>
             <a:pPr marL="0" indent="0" algn="l">
@@ -8048,6 +8188,18 @@
   <p:clrMapOvr>
     <a:masterClrMapping/>
   </p:clrMapOvr>
+  <mc:AlternateContent xmlns:mc="http://schemas.openxmlformats.org/markup-compatibility/2006">
+    <mc:Choice xmlns:p14="http://schemas.microsoft.com/office/powerpoint/2010/main" Requires="p14">
+      <p:transition spd="med" p14:dur="700">
+        <p:fade/>
+      </p:transition>
+    </mc:Choice>
+    <mc:Fallback>
+      <p:transition spd="med">
+        <p:fade/>
+      </p:transition>
+    </mc:Fallback>
+  </mc:AlternateContent>
 </p:sld>
 </file>
 
@@ -8161,7 +8313,7 @@
           <a:ln/>
         </p:spPr>
         <p:txBody>
-          <a:bodyPr wrap="square" lIns="0" tIns="0" rIns="0" bIns="0" rtlCol="0" anchor="ctr"/>
+          <a:bodyPr wrap="square" lIns="0" tIns="0" rIns="0" bIns="0" rtlCol="0" anchor="t"/>
           <a:lstStyle/>
           <a:p>
             <a:pPr marL="0" indent="0" algn="l">
@@ -8217,7 +8369,7 @@
         </p:nvSpPr>
         <p:spPr>
           <a:xfrm>
-            <a:off x="4381500" y="1471494"/>
+            <a:off x="4381500" y="1332701"/>
             <a:ext cx="4286250" cy="225346"/>
           </a:xfrm>
           <a:prstGeom prst="rect">
@@ -8227,7 +8379,7 @@
           <a:ln/>
         </p:spPr>
         <p:txBody>
-          <a:bodyPr wrap="square" lIns="0" tIns="0" rIns="0" bIns="0" rtlCol="0" anchor="ctr"/>
+          <a:bodyPr wrap="square" lIns="0" tIns="0" rIns="0" bIns="0" rtlCol="0" anchor="t"/>
           <a:lstStyle/>
           <a:p>
             <a:pPr marL="0" indent="0" algn="l">
@@ -8271,7 +8423,7 @@
           <a:ln/>
         </p:spPr>
         <p:txBody>
-          <a:bodyPr wrap="square" lIns="0" tIns="0" rIns="0" bIns="0" rtlCol="0" anchor="ctr"/>
+          <a:bodyPr wrap="square" lIns="0" tIns="0" rIns="0" bIns="0" rtlCol="0" anchor="t"/>
           <a:lstStyle/>
           <a:p>
             <a:pPr marL="0" indent="0" algn="l">
@@ -8305,7 +8457,7 @@
         </p:nvSpPr>
         <p:spPr>
           <a:xfrm>
-            <a:off x="4381500" y="2919294"/>
+            <a:off x="4381500" y="2780501"/>
             <a:ext cx="4286250" cy="226636"/>
           </a:xfrm>
           <a:prstGeom prst="rect">
@@ -8315,7 +8467,7 @@
           <a:ln/>
         </p:spPr>
         <p:txBody>
-          <a:bodyPr wrap="square" lIns="0" tIns="0" rIns="0" bIns="0" rtlCol="0" anchor="ctr"/>
+          <a:bodyPr wrap="square" lIns="0" tIns="0" rIns="0" bIns="0" rtlCol="0" anchor="t"/>
           <a:lstStyle/>
           <a:p>
             <a:pPr marL="0" indent="0" algn="l">
@@ -8359,7 +8511,7 @@
           <a:ln/>
         </p:spPr>
         <p:txBody>
-          <a:bodyPr wrap="square" lIns="0" tIns="0" rIns="0" bIns="0" rtlCol="0" anchor="ctr"/>
+          <a:bodyPr wrap="square" lIns="0" tIns="0" rIns="0" bIns="0" rtlCol="0" anchor="t"/>
           <a:lstStyle/>
           <a:p>
             <a:pPr marL="0" indent="0" algn="l">
@@ -8457,6 +8609,18 @@
   <p:clrMapOvr>
     <a:masterClrMapping/>
   </p:clrMapOvr>
+  <mc:AlternateContent xmlns:mc="http://schemas.openxmlformats.org/markup-compatibility/2006">
+    <mc:Choice xmlns:p14="http://schemas.microsoft.com/office/powerpoint/2010/main" Requires="p14">
+      <p:transition spd="med" p14:dur="700">
+        <p:fade/>
+      </p:transition>
+    </mc:Choice>
+    <mc:Fallback>
+      <p:transition spd="med">
+        <p:fade/>
+      </p:transition>
+    </mc:Fallback>
+  </mc:AlternateContent>
 </p:sld>
 </file>
 
@@ -8570,7 +8734,7 @@
           <a:ln/>
         </p:spPr>
         <p:txBody>
-          <a:bodyPr wrap="square" lIns="0" tIns="0" rIns="0" bIns="0" rtlCol="0" anchor="ctr"/>
+          <a:bodyPr wrap="square" lIns="0" tIns="0" rIns="0" bIns="0" rtlCol="0" anchor="t"/>
           <a:lstStyle/>
           <a:p>
             <a:pPr marL="0" indent="0" algn="l">
@@ -8636,7 +8800,7 @@
           <a:ln/>
         </p:spPr>
         <p:txBody>
-          <a:bodyPr wrap="square" lIns="0" tIns="0" rIns="0" bIns="0" rtlCol="0" anchor="ctr"/>
+          <a:bodyPr wrap="square" lIns="0" tIns="0" rIns="0" bIns="0" rtlCol="0" anchor="t"/>
           <a:lstStyle/>
           <a:p>
             <a:pPr marL="0" indent="0" algn="l">
@@ -8670,8 +8834,8 @@
         </p:nvSpPr>
         <p:spPr>
           <a:xfrm>
-            <a:off x="485775" y="1635406"/>
-            <a:ext cx="4286250" cy="974444"/>
+            <a:off x="485775" y="1719966"/>
+            <a:ext cx="4286250" cy="805325"/>
           </a:xfrm>
           <a:prstGeom prst="rect">
             <a:avLst/>
@@ -8680,7 +8844,7 @@
           <a:ln/>
         </p:spPr>
         <p:txBody>
-          <a:bodyPr wrap="square" lIns="0" tIns="0" rIns="0" bIns="0" rtlCol="0" anchor="ctr"/>
+          <a:bodyPr wrap="square" lIns="0" tIns="0" rIns="0" bIns="0" rtlCol="0" anchor="t"/>
           <a:lstStyle/>
           <a:p>
             <a:pPr marL="0" indent="0" algn="l">
@@ -8724,7 +8888,7 @@
           <a:ln/>
         </p:spPr>
         <p:txBody>
-          <a:bodyPr wrap="square" lIns="0" tIns="0" rIns="0" bIns="0" rtlCol="0" anchor="ctr"/>
+          <a:bodyPr wrap="square" lIns="0" tIns="0" rIns="0" bIns="0" rtlCol="0" anchor="t"/>
           <a:lstStyle/>
           <a:p>
             <a:pPr marL="0" indent="0" algn="l">
@@ -8758,8 +8922,8 @@
         </p:nvSpPr>
         <p:spPr>
           <a:xfrm>
-            <a:off x="485775" y="3082465"/>
-            <a:ext cx="4286250" cy="975185"/>
+            <a:off x="485775" y="3167088"/>
+            <a:ext cx="4286250" cy="805938"/>
           </a:xfrm>
           <a:prstGeom prst="rect">
             <a:avLst/>
@@ -8768,7 +8932,7 @@
           <a:ln/>
         </p:spPr>
         <p:txBody>
-          <a:bodyPr wrap="square" lIns="0" tIns="0" rIns="0" bIns="0" rtlCol="0" anchor="ctr"/>
+          <a:bodyPr wrap="square" lIns="0" tIns="0" rIns="0" bIns="0" rtlCol="0" anchor="t"/>
           <a:lstStyle/>
           <a:p>
             <a:pPr marL="0" indent="0" algn="l">
@@ -8866,6 +9030,18 @@
   <p:clrMapOvr>
     <a:masterClrMapping/>
   </p:clrMapOvr>
+  <mc:AlternateContent xmlns:mc="http://schemas.openxmlformats.org/markup-compatibility/2006">
+    <mc:Choice xmlns:p14="http://schemas.microsoft.com/office/powerpoint/2010/main" Requires="p14">
+      <p:transition spd="med" p14:dur="700">
+        <p:fade/>
+      </p:transition>
+    </mc:Choice>
+    <mc:Fallback>
+      <p:transition spd="med">
+        <p:fade/>
+      </p:transition>
+    </mc:Fallback>
+  </mc:AlternateContent>
 </p:sld>
 </file>
 
@@ -21105,7 +21281,7 @@
           <a:ln/>
         </p:spPr>
         <p:txBody>
-          <a:bodyPr wrap="square" lIns="0" tIns="0" rIns="0" bIns="0" rtlCol="0" anchor="ctr"/>
+          <a:bodyPr wrap="square" lIns="0" tIns="0" rIns="0" bIns="0" rtlCol="0" anchor="t"/>
           <a:lstStyle/>
           <a:p>
             <a:pPr marL="0" indent="0" algn="l">
@@ -21158,6 +21334,18 @@
   <p:clrMapOvr>
     <a:masterClrMapping/>
   </p:clrMapOvr>
+  <mc:AlternateContent xmlns:mc="http://schemas.openxmlformats.org/markup-compatibility/2006">
+    <mc:Choice xmlns:p14="http://schemas.microsoft.com/office/powerpoint/2010/main" Requires="p14">
+      <p:transition spd="med" p14:dur="700">
+        <p:fade/>
+      </p:transition>
+    </mc:Choice>
+    <mc:Fallback>
+      <p:transition spd="med">
+        <p:fade/>
+      </p:transition>
+    </mc:Fallback>
+  </mc:AlternateContent>
 </p:sld>
 </file>
 
@@ -21716,6 +21904,18 @@
   <p:clrMapOvr>
     <a:masterClrMapping/>
   </p:clrMapOvr>
+  <mc:AlternateContent xmlns:mc="http://schemas.openxmlformats.org/markup-compatibility/2006">
+    <mc:Choice xmlns:p14="http://schemas.microsoft.com/office/powerpoint/2010/main" Requires="p14">
+      <p:transition spd="med" p14:dur="700">
+        <p:fade/>
+      </p:transition>
+    </mc:Choice>
+    <mc:Fallback>
+      <p:transition spd="med">
+        <p:fade/>
+      </p:transition>
+    </mc:Fallback>
+  </mc:AlternateContent>
 </p:sld>
 </file>
 
@@ -22117,7 +22317,7 @@
           <a:ln/>
         </p:spPr>
         <p:txBody>
-          <a:bodyPr wrap="square" lIns="0" tIns="0" rIns="0" bIns="0" rtlCol="0" anchor="ctr"/>
+          <a:bodyPr wrap="square" lIns="0" tIns="0" rIns="0" bIns="0" rtlCol="0" anchor="t"/>
           <a:lstStyle/>
           <a:p>
             <a:pPr marL="0" indent="0" algn="l">
@@ -22161,7 +22361,7 @@
           <a:ln/>
         </p:spPr>
         <p:txBody>
-          <a:bodyPr wrap="square" lIns="0" tIns="0" rIns="0" bIns="0" rtlCol="0" anchor="ctr"/>
+          <a:bodyPr wrap="square" lIns="0" tIns="0" rIns="0" bIns="0" rtlCol="0" anchor="t"/>
           <a:lstStyle/>
           <a:p>
             <a:pPr marL="0" indent="0" algn="l">
@@ -22269,7 +22469,7 @@
           <a:ln/>
         </p:spPr>
         <p:txBody>
-          <a:bodyPr wrap="square" lIns="0" tIns="0" rIns="0" bIns="0" rtlCol="0" anchor="ctr"/>
+          <a:bodyPr wrap="square" lIns="0" tIns="0" rIns="0" bIns="0" rtlCol="0" anchor="t"/>
           <a:lstStyle/>
           <a:p>
             <a:pPr marL="0" indent="0" algn="l">
@@ -22377,7 +22577,7 @@
           <a:ln/>
         </p:spPr>
         <p:txBody>
-          <a:bodyPr wrap="square" lIns="0" tIns="0" rIns="0" bIns="0" rtlCol="0" anchor="ctr"/>
+          <a:bodyPr wrap="square" lIns="0" tIns="0" rIns="0" bIns="0" rtlCol="0" anchor="t"/>
           <a:lstStyle/>
           <a:p>
             <a:pPr marL="0" indent="0" algn="l">
@@ -22387,19 +22587,21 @@
               <a:buNone/>
             </a:pPr>
             <a:r>
-              <a:rPr lang="en-US" sz="1710" b="1" kern="0" spc="-34" dirty="0">
+              <a:rPr lang="en-US" sz="1710" kern="0" spc="-34" dirty="0">
                 <a:solidFill>
                   <a:srgbClr val="FFFFFF">
                     <a:alpha val="99000"/>
                   </a:srgbClr>
                 </a:solidFill>
-                <a:latin typeface="Manrope" pitchFamily="34" charset="0"/>
+                <a:latin typeface="Manrope" pitchFamily="2" charset="0"/>
                 <a:ea typeface="Manrope" pitchFamily="34" charset="-122"/>
                 <a:cs typeface="Manrope" pitchFamily="34" charset="-120"/>
               </a:rPr>
               <a:t>Christopher Fabian  </a:t>
             </a:r>
-            <a:endParaRPr lang="en-US" sz="1710" dirty="0"/>
+            <a:endParaRPr lang="en-US" sz="1710" dirty="0">
+              <a:latin typeface="Manrope" pitchFamily="2" charset="0"/>
+            </a:endParaRPr>
           </a:p>
         </p:txBody>
       </p:sp>
@@ -22421,7 +22623,7 @@
           <a:ln/>
         </p:spPr>
         <p:txBody>
-          <a:bodyPr wrap="square" lIns="0" tIns="0" rIns="0" bIns="0" rtlCol="0" anchor="ctr"/>
+          <a:bodyPr wrap="square" lIns="0" tIns="0" rIns="0" bIns="0" rtlCol="0" anchor="t"/>
           <a:lstStyle/>
           <a:p>
             <a:pPr marL="0" indent="0" algn="l">
@@ -22431,19 +22633,21 @@
               <a:buNone/>
             </a:pPr>
             <a:r>
-              <a:rPr lang="en-US" sz="1710" b="1" kern="0" spc="-34" dirty="0">
+              <a:rPr lang="en-US" sz="1710" kern="0" spc="-34" dirty="0">
                 <a:solidFill>
                   <a:srgbClr val="FFFFFF">
                     <a:alpha val="99000"/>
                   </a:srgbClr>
                 </a:solidFill>
-                <a:latin typeface="Manrope" pitchFamily="34" charset="0"/>
+                <a:latin typeface="Manrope" pitchFamily="2" charset="0"/>
                 <a:ea typeface="Manrope" pitchFamily="34" charset="-122"/>
                 <a:cs typeface="Manrope" pitchFamily="34" charset="-120"/>
               </a:rPr>
               <a:t>Name Surname</a:t>
             </a:r>
-            <a:endParaRPr lang="en-US" sz="1710" dirty="0"/>
+            <a:endParaRPr lang="en-US" sz="1710" dirty="0">
+              <a:latin typeface="Manrope" pitchFamily="2" charset="0"/>
+            </a:endParaRPr>
           </a:p>
         </p:txBody>
       </p:sp>
@@ -22452,6 +22656,18 @@
   <p:clrMapOvr>
     <a:masterClrMapping/>
   </p:clrMapOvr>
+  <mc:AlternateContent xmlns:mc="http://schemas.openxmlformats.org/markup-compatibility/2006">
+    <mc:Choice xmlns:p14="http://schemas.microsoft.com/office/powerpoint/2010/main" Requires="p14">
+      <p:transition spd="med" p14:dur="700">
+        <p:fade/>
+      </p:transition>
+    </mc:Choice>
+    <mc:Fallback>
+      <p:transition spd="med">
+        <p:fade/>
+      </p:transition>
+    </mc:Fallback>
+  </mc:AlternateContent>
 </p:sld>
 </file>
 
@@ -22521,7 +22737,7 @@
           <a:ln/>
         </p:spPr>
         <p:txBody>
-          <a:bodyPr wrap="square" lIns="0" tIns="0" rIns="0" bIns="0" rtlCol="0" anchor="ctr"/>
+          <a:bodyPr wrap="square" lIns="0" tIns="0" rIns="0" bIns="0" rtlCol="0" anchor="t"/>
           <a:lstStyle/>
           <a:p>
             <a:pPr marL="0" indent="0" algn="l">
@@ -22587,7 +22803,7 @@
           <a:ln/>
         </p:spPr>
         <p:txBody>
-          <a:bodyPr wrap="square" lIns="0" tIns="0" rIns="0" bIns="0" rtlCol="0" anchor="ctr"/>
+          <a:bodyPr wrap="square" lIns="0" tIns="0" rIns="0" bIns="0" rtlCol="0" anchor="t"/>
           <a:lstStyle/>
           <a:p>
             <a:pPr marL="0" indent="0" algn="l">
@@ -22631,7 +22847,7 @@
           <a:ln/>
         </p:spPr>
         <p:txBody>
-          <a:bodyPr wrap="square" lIns="0" tIns="0" rIns="0" bIns="0" rtlCol="0" anchor="ctr"/>
+          <a:bodyPr wrap="square" lIns="0" tIns="0" rIns="0" bIns="0" rtlCol="0" anchor="t"/>
           <a:lstStyle/>
           <a:p>
             <a:pPr marL="0" indent="0" algn="l">
@@ -22675,7 +22891,7 @@
           <a:ln/>
         </p:spPr>
         <p:txBody>
-          <a:bodyPr wrap="square" lIns="0" tIns="0" rIns="0" bIns="0" rtlCol="0" anchor="ctr"/>
+          <a:bodyPr wrap="square" lIns="0" tIns="0" rIns="0" bIns="0" rtlCol="0" anchor="t"/>
           <a:lstStyle/>
           <a:p>
             <a:pPr marL="0" indent="0" algn="l">
@@ -22719,7 +22935,7 @@
           <a:ln/>
         </p:spPr>
         <p:txBody>
-          <a:bodyPr wrap="square" lIns="0" tIns="0" rIns="0" bIns="0" rtlCol="0" anchor="ctr"/>
+          <a:bodyPr wrap="none" lIns="0" tIns="0" rIns="0" bIns="0" rtlCol="0" anchor="t"/>
           <a:lstStyle/>
           <a:p>
             <a:pPr marL="0" indent="0" algn="l">
@@ -22741,7 +22957,6 @@
               </a:rPr>
               <a:t>One sentence on what the partner provides</a:t>
             </a:r>
-            <a:endParaRPr lang="en-US" sz="1069" dirty="0"/>
           </a:p>
         </p:txBody>
       </p:sp>
@@ -22763,7 +22978,7 @@
           <a:ln/>
         </p:spPr>
         <p:txBody>
-          <a:bodyPr wrap="square" lIns="0" tIns="0" rIns="0" bIns="0" rtlCol="0" anchor="ctr"/>
+          <a:bodyPr wrap="square" lIns="0" tIns="0" rIns="0" bIns="0" rtlCol="0" anchor="t"/>
           <a:lstStyle/>
           <a:p>
             <a:pPr marL="0" indent="0" algn="l">
@@ -22807,7 +23022,7 @@
           <a:ln/>
         </p:spPr>
         <p:txBody>
-          <a:bodyPr wrap="square" lIns="0" tIns="0" rIns="0" bIns="0" rtlCol="0" anchor="ctr"/>
+          <a:bodyPr wrap="square" lIns="0" tIns="0" rIns="0" bIns="0" rtlCol="0" anchor="t"/>
           <a:lstStyle/>
           <a:p>
             <a:pPr marL="0" indent="0" algn="l">
@@ -22851,7 +23066,7 @@
           <a:ln/>
         </p:spPr>
         <p:txBody>
-          <a:bodyPr wrap="square" lIns="0" tIns="0" rIns="0" bIns="0" rtlCol="0" anchor="ctr"/>
+          <a:bodyPr wrap="square" lIns="0" tIns="0" rIns="0" bIns="0" rtlCol="0" anchor="t"/>
           <a:lstStyle/>
           <a:p>
             <a:pPr marL="0" indent="0" algn="l">
@@ -22895,7 +23110,7 @@
           <a:ln/>
         </p:spPr>
         <p:txBody>
-          <a:bodyPr wrap="square" lIns="0" tIns="0" rIns="0" bIns="0" rtlCol="0" anchor="ctr"/>
+          <a:bodyPr wrap="square" lIns="0" tIns="0" rIns="0" bIns="0" rtlCol="0" anchor="t"/>
           <a:lstStyle/>
           <a:p>
             <a:pPr marL="0" indent="0" algn="l">
@@ -22939,7 +23154,7 @@
           <a:ln/>
         </p:spPr>
         <p:txBody>
-          <a:bodyPr wrap="square" lIns="0" tIns="0" rIns="0" bIns="0" rtlCol="0" anchor="ctr"/>
+          <a:bodyPr wrap="square" lIns="0" tIns="0" rIns="0" bIns="0" rtlCol="0" anchor="t"/>
           <a:lstStyle/>
           <a:p>
             <a:pPr marL="0" indent="0" algn="l">
@@ -22974,7 +23189,7 @@
         <p:spPr>
           <a:xfrm>
             <a:off x="476250" y="4086168"/>
-            <a:ext cx="4286250" cy="390525"/>
+            <a:ext cx="4286250" cy="357816"/>
           </a:xfrm>
           <a:prstGeom prst="rect">
             <a:avLst/>
@@ -22983,7 +23198,9 @@
           <a:ln/>
         </p:spPr>
         <p:txBody>
-          <a:bodyPr wrap="square" lIns="0" tIns="0" rIns="0" bIns="0" rtlCol="0" anchor="t"/>
+          <a:bodyPr wrap="none" lIns="0" tIns="0" rIns="0" bIns="0" rtlCol="0" anchor="t">
+            <a:noAutofit/>
+          </a:bodyPr>
           <a:lstStyle/>
           <a:p>
             <a:pPr marL="0" indent="0" algn="l">
@@ -23005,7 +23222,6 @@
               </a:rPr>
               <a:t>Maximum two sentences of additional context if absolutely needed</a:t>
             </a:r>
-            <a:endParaRPr lang="en-US" sz="1069" dirty="0"/>
           </a:p>
         </p:txBody>
       </p:sp>
@@ -23037,6 +23253,18 @@
   <p:clrMapOvr>
     <a:masterClrMapping/>
   </p:clrMapOvr>
+  <mc:AlternateContent xmlns:mc="http://schemas.openxmlformats.org/markup-compatibility/2006">
+    <mc:Choice xmlns:p14="http://schemas.microsoft.com/office/powerpoint/2010/main" Requires="p14">
+      <p:transition spd="med" p14:dur="700">
+        <p:fade/>
+      </p:transition>
+    </mc:Choice>
+    <mc:Fallback>
+      <p:transition spd="med">
+        <p:fade/>
+      </p:transition>
+    </mc:Fallback>
+  </mc:AlternateContent>
 </p:sld>
 </file>
 
@@ -23106,7 +23334,7 @@
           <a:ln/>
         </p:spPr>
         <p:txBody>
-          <a:bodyPr wrap="square" lIns="0" tIns="0" rIns="0" bIns="0" rtlCol="0" anchor="ctr"/>
+          <a:bodyPr wrap="square" lIns="0" tIns="0" rIns="0" bIns="0" rtlCol="0" anchor="t"/>
           <a:lstStyle/>
           <a:p>
             <a:pPr marL="0" indent="0" algn="l">
@@ -23222,7 +23450,7 @@
           <a:ln/>
         </p:spPr>
         <p:txBody>
-          <a:bodyPr wrap="square" lIns="0" tIns="0" rIns="0" bIns="0" rtlCol="0" anchor="ctr"/>
+          <a:bodyPr wrap="square" lIns="0" tIns="0" rIns="0" bIns="0" rtlCol="0" anchor="t"/>
           <a:lstStyle/>
           <a:p>
             <a:pPr marL="0" indent="0" algn="l">
@@ -23272,7 +23500,7 @@
           <a:ln/>
         </p:spPr>
         <p:txBody>
-          <a:bodyPr wrap="square" lIns="0" tIns="0" rIns="0" bIns="0" rtlCol="0" anchor="ctr"/>
+          <a:bodyPr wrap="square" lIns="0" tIns="0" rIns="0" bIns="0" rtlCol="0" anchor="t"/>
           <a:lstStyle/>
           <a:p>
             <a:pPr marL="0" indent="0" algn="l">
@@ -23322,7 +23550,7 @@
           <a:ln/>
         </p:spPr>
         <p:txBody>
-          <a:bodyPr wrap="square" lIns="0" tIns="0" rIns="0" bIns="0" rtlCol="0" anchor="ctr"/>
+          <a:bodyPr wrap="square" lIns="0" tIns="0" rIns="0" bIns="0" rtlCol="0" anchor="t"/>
           <a:lstStyle/>
           <a:p>
             <a:pPr marL="0" indent="0" algn="l">
@@ -23372,7 +23600,7 @@
           <a:ln/>
         </p:spPr>
         <p:txBody>
-          <a:bodyPr wrap="square" lIns="0" tIns="0" rIns="0" bIns="0" rtlCol="0" anchor="ctr"/>
+          <a:bodyPr wrap="square" lIns="0" tIns="0" rIns="0" bIns="0" rtlCol="0" anchor="t"/>
           <a:lstStyle/>
           <a:p>
             <a:pPr marL="0" indent="0" algn="l">
@@ -23422,7 +23650,7 @@
           <a:ln/>
         </p:spPr>
         <p:txBody>
-          <a:bodyPr wrap="square" lIns="0" tIns="0" rIns="0" bIns="0" rtlCol="0" anchor="ctr"/>
+          <a:bodyPr wrap="square" lIns="0" tIns="0" rIns="0" bIns="0" rtlCol="0" anchor="t"/>
           <a:lstStyle/>
           <a:p>
             <a:pPr marL="0" indent="0" algn="l">
@@ -23472,7 +23700,7 @@
           <a:ln/>
         </p:spPr>
         <p:txBody>
-          <a:bodyPr wrap="square" lIns="0" tIns="0" rIns="0" bIns="0" rtlCol="0" anchor="ctr"/>
+          <a:bodyPr wrap="square" lIns="0" tIns="0" rIns="0" bIns="0" rtlCol="0" anchor="t"/>
           <a:lstStyle/>
           <a:p>
             <a:pPr marL="0" indent="0" algn="l">
@@ -23522,7 +23750,7 @@
           <a:ln/>
         </p:spPr>
         <p:txBody>
-          <a:bodyPr wrap="square" lIns="0" tIns="0" rIns="0" bIns="0" rtlCol="0" anchor="ctr"/>
+          <a:bodyPr wrap="square" lIns="0" tIns="0" rIns="0" bIns="0" rtlCol="0" anchor="t"/>
           <a:lstStyle/>
           <a:p>
             <a:pPr marL="0" indent="0" algn="l">
@@ -23572,7 +23800,7 @@
           <a:ln/>
         </p:spPr>
         <p:txBody>
-          <a:bodyPr wrap="square" lIns="0" tIns="0" rIns="0" bIns="0" rtlCol="0" anchor="ctr"/>
+          <a:bodyPr wrap="square" lIns="0" tIns="0" rIns="0" bIns="0" rtlCol="0" anchor="t"/>
           <a:lstStyle/>
           <a:p>
             <a:pPr marL="0" indent="0" algn="l">
@@ -23622,7 +23850,7 @@
           <a:ln/>
         </p:spPr>
         <p:txBody>
-          <a:bodyPr wrap="square" lIns="0" tIns="0" rIns="0" bIns="0" rtlCol="0" anchor="ctr"/>
+          <a:bodyPr wrap="square" lIns="0" tIns="0" rIns="0" bIns="0" rtlCol="0" anchor="t"/>
           <a:lstStyle/>
           <a:p>
             <a:pPr marL="0" indent="0" algn="l">
@@ -23703,6 +23931,18 @@
   <p:clrMapOvr>
     <a:masterClrMapping/>
   </p:clrMapOvr>
+  <mc:AlternateContent xmlns:mc="http://schemas.openxmlformats.org/markup-compatibility/2006">
+    <mc:Choice xmlns:p14="http://schemas.microsoft.com/office/powerpoint/2010/main" Requires="p14">
+      <p:transition spd="med" p14:dur="700">
+        <p:fade/>
+      </p:transition>
+    </mc:Choice>
+    <mc:Fallback>
+      <p:transition spd="med">
+        <p:fade/>
+      </p:transition>
+    </mc:Fallback>
+  </mc:AlternateContent>
 </p:sld>
 </file>
 
@@ -23847,6 +24087,18 @@
   <p:clrMapOvr>
     <a:masterClrMapping/>
   </p:clrMapOvr>
+  <mc:AlternateContent xmlns:mc="http://schemas.openxmlformats.org/markup-compatibility/2006">
+    <mc:Choice xmlns:p14="http://schemas.microsoft.com/office/powerpoint/2010/main" Requires="p14">
+      <p:transition spd="med" p14:dur="700">
+        <p:fade/>
+      </p:transition>
+    </mc:Choice>
+    <mc:Fallback>
+      <p:transition spd="med">
+        <p:fade/>
+      </p:transition>
+    </mc:Fallback>
+  </mc:AlternateContent>
 </p:sld>
 </file>
 
@@ -23937,7 +24189,7 @@
           <a:ln/>
         </p:spPr>
         <p:txBody>
-          <a:bodyPr wrap="square" lIns="0" tIns="0" rIns="0" bIns="0" rtlCol="0" anchor="ctr"/>
+          <a:bodyPr wrap="square" lIns="0" tIns="0" rIns="0" bIns="0" rtlCol="0" anchor="t"/>
           <a:lstStyle/>
           <a:p>
             <a:pPr marL="0" indent="0" algn="l">
@@ -24130,7 +24382,7 @@
           <a:ln/>
         </p:spPr>
         <p:txBody>
-          <a:bodyPr wrap="square" lIns="0" tIns="0" rIns="0" bIns="0" rtlCol="0" anchor="ctr"/>
+          <a:bodyPr wrap="square" lIns="0" tIns="0" rIns="0" bIns="0" rtlCol="0" anchor="t"/>
           <a:lstStyle/>
           <a:p>
             <a:r>
@@ -24297,7 +24549,7 @@
           <a:ln/>
         </p:spPr>
         <p:txBody>
-          <a:bodyPr wrap="square" lIns="0" tIns="0" rIns="0" bIns="0" rtlCol="0" anchor="ctr"/>
+          <a:bodyPr wrap="square" lIns="0" tIns="0" rIns="0" bIns="0" rtlCol="0" anchor="t"/>
           <a:lstStyle/>
           <a:p>
             <a:r>
@@ -24464,7 +24716,7 @@
           <a:ln/>
         </p:spPr>
         <p:txBody>
-          <a:bodyPr wrap="square" lIns="0" tIns="0" rIns="0" bIns="0" rtlCol="0" anchor="ctr"/>
+          <a:bodyPr wrap="square" lIns="0" tIns="0" rIns="0" bIns="0" rtlCol="0" anchor="t"/>
           <a:lstStyle/>
           <a:p>
             <a:r>
@@ -24631,7 +24883,7 @@
           <a:ln/>
         </p:spPr>
         <p:txBody>
-          <a:bodyPr wrap="square" lIns="0" tIns="0" rIns="0" bIns="0" rtlCol="0" anchor="ctr"/>
+          <a:bodyPr wrap="square" lIns="0" tIns="0" rIns="0" bIns="0" rtlCol="0" anchor="t"/>
           <a:lstStyle/>
           <a:p>
             <a:r>
@@ -24703,6 +24955,18 @@
   <p:clrMapOvr>
     <a:masterClrMapping/>
   </p:clrMapOvr>
+  <mc:AlternateContent xmlns:mc="http://schemas.openxmlformats.org/markup-compatibility/2006">
+    <mc:Choice xmlns:p14="http://schemas.microsoft.com/office/powerpoint/2010/main" Requires="p14">
+      <p:transition spd="med" p14:dur="700">
+        <p:fade/>
+      </p:transition>
+    </mc:Choice>
+    <mc:Fallback>
+      <p:transition spd="med">
+        <p:fade/>
+      </p:transition>
+    </mc:Fallback>
+  </mc:AlternateContent>
 </p:sld>
 </file>
 
@@ -25323,7 +25587,7 @@
           <a:ln/>
         </p:spPr>
         <p:txBody>
-          <a:bodyPr wrap="square" lIns="0" tIns="0" rIns="0" bIns="0" rtlCol="0" anchor="ctr"/>
+          <a:bodyPr wrap="square" lIns="0" tIns="0" rIns="0" bIns="0" rtlCol="0" anchor="t"/>
           <a:lstStyle/>
           <a:p>
             <a:r>
@@ -25365,7 +25629,7 @@
           <a:ln/>
         </p:spPr>
         <p:txBody>
-          <a:bodyPr wrap="square" lIns="0" tIns="0" rIns="0" bIns="0" rtlCol="0" anchor="ctr"/>
+          <a:bodyPr wrap="square" lIns="0" tIns="0" rIns="0" bIns="0" rtlCol="0" anchor="t"/>
           <a:lstStyle/>
           <a:p>
             <a:r>
@@ -25407,7 +25671,7 @@
           <a:ln/>
         </p:spPr>
         <p:txBody>
-          <a:bodyPr wrap="square" lIns="0" tIns="0" rIns="0" bIns="0" rtlCol="0" anchor="ctr"/>
+          <a:bodyPr wrap="square" lIns="0" tIns="0" rIns="0" bIns="0" rtlCol="0" anchor="t"/>
           <a:lstStyle/>
           <a:p>
             <a:r>
@@ -25449,7 +25713,7 @@
           <a:ln/>
         </p:spPr>
         <p:txBody>
-          <a:bodyPr wrap="square" lIns="0" tIns="0" rIns="0" bIns="0" rtlCol="0" anchor="ctr"/>
+          <a:bodyPr wrap="square" lIns="0" tIns="0" rIns="0" bIns="0" rtlCol="0" anchor="t"/>
           <a:lstStyle/>
           <a:p>
             <a:r>
@@ -25872,6 +26136,18 @@
   <p:clrMapOvr>
     <a:masterClrMapping/>
   </p:clrMapOvr>
+  <mc:AlternateContent xmlns:mc="http://schemas.openxmlformats.org/markup-compatibility/2006">
+    <mc:Choice xmlns:p14="http://schemas.microsoft.com/office/powerpoint/2010/main" Requires="p14">
+      <p:transition spd="med" p14:dur="700">
+        <p:fade/>
+      </p:transition>
+    </mc:Choice>
+    <mc:Fallback>
+      <p:transition spd="med">
+        <p:fade/>
+      </p:transition>
+    </mc:Fallback>
+  </mc:AlternateContent>
 </p:sld>
 </file>
 
@@ -26201,7 +26477,7 @@
           <a:ln/>
         </p:spPr>
         <p:txBody>
-          <a:bodyPr wrap="square" lIns="0" tIns="0" rIns="0" bIns="0" rtlCol="0" anchor="ctr"/>
+          <a:bodyPr wrap="square" lIns="0" tIns="0" rIns="0" bIns="0" rtlCol="0" anchor="t"/>
           <a:lstStyle/>
           <a:p>
             <a:r>
@@ -26440,7 +26716,7 @@
           <a:ln/>
         </p:spPr>
         <p:txBody>
-          <a:bodyPr wrap="square" lIns="0" tIns="0" rIns="0" bIns="0" rtlCol="0" anchor="ctr"/>
+          <a:bodyPr wrap="square" lIns="0" tIns="0" rIns="0" bIns="0" rtlCol="0" anchor="t"/>
           <a:lstStyle/>
           <a:p>
             <a:r>
@@ -26677,7 +26953,7 @@
           <a:ln/>
         </p:spPr>
         <p:txBody>
-          <a:bodyPr wrap="square" lIns="0" tIns="0" rIns="0" bIns="0" rtlCol="0" anchor="ctr"/>
+          <a:bodyPr wrap="square" lIns="0" tIns="0" rIns="0" bIns="0" rtlCol="0" anchor="t"/>
           <a:lstStyle/>
           <a:p>
             <a:r>
@@ -26798,6 +27074,18 @@
   <p:clrMapOvr>
     <a:masterClrMapping/>
   </p:clrMapOvr>
+  <mc:AlternateContent xmlns:mc="http://schemas.openxmlformats.org/markup-compatibility/2006">
+    <mc:Choice xmlns:p14="http://schemas.microsoft.com/office/powerpoint/2010/main" Requires="p14">
+      <p:transition spd="med" p14:dur="700">
+        <p:fade/>
+      </p:transition>
+    </mc:Choice>
+    <mc:Fallback>
+      <p:transition spd="med">
+        <p:fade/>
+      </p:transition>
+    </mc:Fallback>
+  </mc:AlternateContent>
 </p:sld>
 </file>
 
@@ -27009,6 +27297,18 @@
   <p:clrMapOvr>
     <a:masterClrMapping/>
   </p:clrMapOvr>
+  <mc:AlternateContent xmlns:mc="http://schemas.openxmlformats.org/markup-compatibility/2006">
+    <mc:Choice xmlns:p14="http://schemas.microsoft.com/office/powerpoint/2010/main" Requires="p14">
+      <p:transition spd="med" p14:dur="700">
+        <p:fade/>
+      </p:transition>
+    </mc:Choice>
+    <mc:Fallback>
+      <p:transition spd="med">
+        <p:fade/>
+      </p:transition>
+    </mc:Fallback>
+  </mc:AlternateContent>
 </p:sld>
 </file>
 
@@ -27301,7 +27601,7 @@
   <a:extraClrSchemeLst/>
   <a:extLst>
     <a:ext uri="{05A4C25C-085E-4340-85A3-A5531E510DB2}">
-      <thm15:themeFamily xmlns:thm15="http://schemas.microsoft.com/office/thememl/2012/main" name="Office Theme" id="{62F939B6-93AF-4DB8-9C6B-D6C7DFDC589F}" vid="{4A3C46E8-61CC-4603-A589-7422A47A8E4A}"/>
+      <thm15:themeFamily xmlns:thm15="http://schemas.microsoft.com/office/thememl/2012/main" name="PPT giga" id="{D101DC1C-5471-0049-9B18-2A5725709A10}" vid="{DE5324F7-5D70-144F-BDBD-79020F46847D}"/>
     </a:ext>
   </a:extLst>
 </a:theme>

--- a/PPT giga.pptx
+++ b/PPT giga.pptx
@@ -3815,7 +3815,7 @@
           <a:ln/>
         </p:spPr>
         <p:txBody>
-          <a:bodyPr wrap="square" lIns="0" tIns="0" rIns="0" bIns="0" rtlCol="0" anchor="ctr"/>
+          <a:bodyPr wrap="square" lIns="0" tIns="0" rIns="0" bIns="0" rtlCol="0" anchor="t"/>
           <a:lstStyle/>
           <a:p>
             <a:pPr marL="0" indent="0" algn="l">
@@ -3872,7 +3872,7 @@
         <p:spPr>
           <a:xfrm>
             <a:off x="476250" y="2019300"/>
-            <a:ext cx="8372475" cy="252413"/>
+            <a:ext cx="8372475" cy="1711779"/>
           </a:xfrm>
           <a:prstGeom prst="rect">
             <a:avLst/>
@@ -3881,7 +3881,7 @@
           <a:ln/>
         </p:spPr>
         <p:txBody>
-          <a:bodyPr wrap="square" lIns="0" tIns="0" rIns="0" bIns="0" rtlCol="0" anchor="ctr"/>
+          <a:bodyPr wrap="square" lIns="0" tIns="0" rIns="0" bIns="0" rtlCol="0" anchor="t"/>
           <a:lstStyle/>
           <a:p>
             <a:pPr marL="0" indent="0" algn="l">
@@ -21392,7 +21392,7 @@
           <a:ln/>
         </p:spPr>
         <p:txBody>
-          <a:bodyPr/>
+          <a:bodyPr anchor="ctr"/>
           <a:lstStyle/>
           <a:p>
             <a:endParaRPr lang="en-IT"/>
@@ -21407,8 +21407,8 @@
         </p:nvSpPr>
         <p:spPr>
           <a:xfrm>
-            <a:off x="4429125" y="523875"/>
-            <a:ext cx="1728788" cy="252413"/>
+            <a:off x="4429124" y="523875"/>
+            <a:ext cx="4238625" cy="252413"/>
           </a:xfrm>
           <a:prstGeom prst="rect">
             <a:avLst/>
@@ -21461,7 +21461,7 @@
           <a:ln/>
         </p:spPr>
         <p:txBody>
-          <a:bodyPr/>
+          <a:bodyPr anchor="ctr"/>
           <a:lstStyle/>
           <a:p>
             <a:endParaRPr lang="en-IT"/>
@@ -21476,8 +21476,8 @@
         </p:nvSpPr>
         <p:spPr>
           <a:xfrm>
-            <a:off x="4429125" y="909638"/>
-            <a:ext cx="2185988" cy="252413"/>
+            <a:off x="4429124" y="911934"/>
+            <a:ext cx="4238626" cy="252413"/>
           </a:xfrm>
           <a:prstGeom prst="rect">
             <a:avLst/>
@@ -21530,7 +21530,7 @@
           <a:ln/>
         </p:spPr>
         <p:txBody>
-          <a:bodyPr/>
+          <a:bodyPr anchor="ctr"/>
           <a:lstStyle/>
           <a:p>
             <a:endParaRPr lang="en-IT"/>
@@ -21545,8 +21545,8 @@
         </p:nvSpPr>
         <p:spPr>
           <a:xfrm>
-            <a:off x="4429125" y="1295400"/>
-            <a:ext cx="1433513" cy="252413"/>
+            <a:off x="4429125" y="1299993"/>
+            <a:ext cx="4258146" cy="252413"/>
           </a:xfrm>
           <a:prstGeom prst="rect">
             <a:avLst/>
@@ -21599,7 +21599,7 @@
           <a:ln/>
         </p:spPr>
         <p:txBody>
-          <a:bodyPr/>
+          <a:bodyPr anchor="ctr"/>
           <a:lstStyle/>
           <a:p>
             <a:endParaRPr lang="en-IT"/>
@@ -21614,8 +21614,8 @@
         </p:nvSpPr>
         <p:spPr>
           <a:xfrm>
-            <a:off x="4429125" y="1681163"/>
-            <a:ext cx="2919413" cy="252413"/>
+            <a:off x="4429125" y="1688052"/>
+            <a:ext cx="4258146" cy="252413"/>
           </a:xfrm>
           <a:prstGeom prst="rect">
             <a:avLst/>
@@ -21668,7 +21668,7 @@
           <a:ln/>
         </p:spPr>
         <p:txBody>
-          <a:bodyPr/>
+          <a:bodyPr anchor="ctr"/>
           <a:lstStyle/>
           <a:p>
             <a:endParaRPr lang="en-IT"/>
@@ -21683,8 +21683,8 @@
         </p:nvSpPr>
         <p:spPr>
           <a:xfrm>
-            <a:off x="4429125" y="2066925"/>
-            <a:ext cx="3590925" cy="252413"/>
+            <a:off x="4429125" y="2076111"/>
+            <a:ext cx="4258146" cy="252413"/>
           </a:xfrm>
           <a:prstGeom prst="rect">
             <a:avLst/>
@@ -21737,7 +21737,7 @@
           <a:ln/>
         </p:spPr>
         <p:txBody>
-          <a:bodyPr/>
+          <a:bodyPr anchor="ctr"/>
           <a:lstStyle/>
           <a:p>
             <a:endParaRPr lang="en-IT"/>
@@ -21752,8 +21752,8 @@
         </p:nvSpPr>
         <p:spPr>
           <a:xfrm>
-            <a:off x="4429125" y="2452688"/>
-            <a:ext cx="1162050" cy="252413"/>
+            <a:off x="4429125" y="2464170"/>
+            <a:ext cx="4258146" cy="252413"/>
           </a:xfrm>
           <a:prstGeom prst="rect">
             <a:avLst/>
@@ -21863,8 +21863,8 @@
         </p:nvSpPr>
         <p:spPr>
           <a:xfrm>
-            <a:off x="476250" y="476250"/>
-            <a:ext cx="3048000" cy="685800"/>
+            <a:off x="476250" y="476249"/>
+            <a:ext cx="3524250" cy="3404509"/>
           </a:xfrm>
           <a:prstGeom prst="rect">
             <a:avLst/>
@@ -21873,7 +21873,7 @@
           <a:ln/>
         </p:spPr>
         <p:txBody>
-          <a:bodyPr wrap="square" lIns="0" tIns="0" rIns="0" bIns="0" rtlCol="0" anchor="ctr"/>
+          <a:bodyPr wrap="square" lIns="0" tIns="0" rIns="0" bIns="0" rtlCol="0" anchor="t"/>
           <a:lstStyle/>
           <a:p>
             <a:pPr marL="0" indent="0" algn="l">
@@ -21896,6 +21896,156 @@
               <a:t>Agenda</a:t>
             </a:r>
             <a:endParaRPr lang="en-US" sz="5130" dirty="0"/>
+          </a:p>
+        </p:txBody>
+      </p:sp>
+      <p:sp>
+        <p:nvSpPr>
+          <p:cNvPr id="17" name="Text 11">
+            <a:extLst>
+              <a:ext uri="{FF2B5EF4-FFF2-40B4-BE49-F238E27FC236}">
+                <a16:creationId xmlns:a16="http://schemas.microsoft.com/office/drawing/2014/main" id="{2F5452C2-A789-C886-78FF-D1609D7B0F6B}"/>
+              </a:ext>
+            </a:extLst>
+          </p:cNvPr>
+          <p:cNvSpPr/>
+          <p:nvPr/>
+        </p:nvSpPr>
+        <p:spPr>
+          <a:xfrm>
+            <a:off x="4429125" y="2852229"/>
+            <a:ext cx="4258146" cy="252413"/>
+          </a:xfrm>
+          <a:prstGeom prst="rect">
+            <a:avLst/>
+          </a:prstGeom>
+          <a:noFill/>
+          <a:ln/>
+        </p:spPr>
+        <p:txBody>
+          <a:bodyPr wrap="square" lIns="0" tIns="0" rIns="0" bIns="0" rtlCol="0" anchor="ctr"/>
+          <a:lstStyle/>
+          <a:p>
+            <a:pPr marL="0" indent="0" algn="l">
+              <a:lnSpc>
+                <a:spcPts val="1881"/>
+              </a:lnSpc>
+              <a:buNone/>
+            </a:pPr>
+            <a:r>
+              <a:rPr lang="en-US" sz="1710" kern="0" spc="-34" dirty="0">
+                <a:solidFill>
+                  <a:srgbClr val="FFFFFF">
+                    <a:alpha val="99000"/>
+                  </a:srgbClr>
+                </a:solidFill>
+                <a:latin typeface="Manrope" pitchFamily="34" charset="0"/>
+                <a:ea typeface="Manrope" pitchFamily="34" charset="-122"/>
+                <a:cs typeface="Manrope" pitchFamily="34" charset="-120"/>
+              </a:rPr>
+              <a:t>06 | Impact</a:t>
+            </a:r>
+            <a:endParaRPr lang="en-US" sz="1710" dirty="0"/>
+          </a:p>
+        </p:txBody>
+      </p:sp>
+      <p:sp>
+        <p:nvSpPr>
+          <p:cNvPr id="19" name="Text 11">
+            <a:extLst>
+              <a:ext uri="{FF2B5EF4-FFF2-40B4-BE49-F238E27FC236}">
+                <a16:creationId xmlns:a16="http://schemas.microsoft.com/office/drawing/2014/main" id="{D289FF99-B15E-3C50-20EB-F1B8200091D2}"/>
+              </a:ext>
+            </a:extLst>
+          </p:cNvPr>
+          <p:cNvSpPr/>
+          <p:nvPr/>
+        </p:nvSpPr>
+        <p:spPr>
+          <a:xfrm>
+            <a:off x="4429125" y="3240288"/>
+            <a:ext cx="4258146" cy="252413"/>
+          </a:xfrm>
+          <a:prstGeom prst="rect">
+            <a:avLst/>
+          </a:prstGeom>
+          <a:noFill/>
+          <a:ln/>
+        </p:spPr>
+        <p:txBody>
+          <a:bodyPr wrap="square" lIns="0" tIns="0" rIns="0" bIns="0" rtlCol="0" anchor="ctr"/>
+          <a:lstStyle/>
+          <a:p>
+            <a:pPr marL="0" indent="0" algn="l">
+              <a:lnSpc>
+                <a:spcPts val="1881"/>
+              </a:lnSpc>
+              <a:buNone/>
+            </a:pPr>
+            <a:r>
+              <a:rPr lang="en-US" sz="1710" kern="0" spc="-34" dirty="0">
+                <a:solidFill>
+                  <a:srgbClr val="FFFFFF">
+                    <a:alpha val="99000"/>
+                  </a:srgbClr>
+                </a:solidFill>
+                <a:latin typeface="Manrope" pitchFamily="34" charset="0"/>
+                <a:ea typeface="Manrope" pitchFamily="34" charset="-122"/>
+                <a:cs typeface="Manrope" pitchFamily="34" charset="-120"/>
+              </a:rPr>
+              <a:t>06 | Impact</a:t>
+            </a:r>
+            <a:endParaRPr lang="en-US" sz="1710" dirty="0"/>
+          </a:p>
+        </p:txBody>
+      </p:sp>
+      <p:sp>
+        <p:nvSpPr>
+          <p:cNvPr id="20" name="Text 11">
+            <a:extLst>
+              <a:ext uri="{FF2B5EF4-FFF2-40B4-BE49-F238E27FC236}">
+                <a16:creationId xmlns:a16="http://schemas.microsoft.com/office/drawing/2014/main" id="{C717FFDB-31C5-E530-EA06-5F2D494B8C1A}"/>
+              </a:ext>
+            </a:extLst>
+          </p:cNvPr>
+          <p:cNvSpPr/>
+          <p:nvPr/>
+        </p:nvSpPr>
+        <p:spPr>
+          <a:xfrm>
+            <a:off x="4429125" y="3628346"/>
+            <a:ext cx="4258146" cy="252413"/>
+          </a:xfrm>
+          <a:prstGeom prst="rect">
+            <a:avLst/>
+          </a:prstGeom>
+          <a:noFill/>
+          <a:ln/>
+        </p:spPr>
+        <p:txBody>
+          <a:bodyPr wrap="square" lIns="0" tIns="0" rIns="0" bIns="0" rtlCol="0" anchor="ctr"/>
+          <a:lstStyle/>
+          <a:p>
+            <a:pPr marL="0" indent="0" algn="l">
+              <a:lnSpc>
+                <a:spcPts val="1881"/>
+              </a:lnSpc>
+              <a:buNone/>
+            </a:pPr>
+            <a:r>
+              <a:rPr lang="en-US" sz="1710" kern="0" spc="-34" dirty="0">
+                <a:solidFill>
+                  <a:srgbClr val="FFFFFF">
+                    <a:alpha val="99000"/>
+                  </a:srgbClr>
+                </a:solidFill>
+                <a:latin typeface="Manrope" pitchFamily="34" charset="0"/>
+                <a:ea typeface="Manrope" pitchFamily="34" charset="-122"/>
+                <a:cs typeface="Manrope" pitchFamily="34" charset="-120"/>
+              </a:rPr>
+              <a:t>06 | Impact</a:t>
+            </a:r>
+            <a:endParaRPr lang="en-US" sz="1710" dirty="0"/>
           </a:p>
         </p:txBody>
       </p:sp>

--- a/PPT giga.pptx
+++ b/PPT giga.pptx
@@ -6385,6 +6385,131 @@
       </p:transition>
     </mc:Fallback>
   </mc:AlternateContent>
+  <p:timing>
+    <p:tnLst>
+      <p:par>
+        <p:cTn id="1" dur="indefinite" restart="never" nodeType="tmRoot">
+          <p:childTnLst>
+            <p:seq concurrent="1" nextAc="seek">
+              <p:cTn id="2" dur="indefinite" nodeType="mainSeq">
+                <p:childTnLst>
+                  <p:par>
+                    <p:cTn id="3" fill="hold">
+                      <p:stCondLst>
+                        <p:cond delay="indefinite"/>
+                        <p:cond evt="onBegin" delay="0">
+                          <p:tn val="2"/>
+                        </p:cond>
+                      </p:stCondLst>
+                      <p:childTnLst>
+                        <p:par>
+                          <p:cTn id="4" fill="hold">
+                            <p:stCondLst>
+                              <p:cond delay="0"/>
+                            </p:stCondLst>
+                            <p:childTnLst>
+                              <p:par>
+                                <p:cTn id="5" presetID="10" presetClass="entr" presetSubtype="0" fill="hold" grpId="0" nodeType="withEffect">
+                                  <p:stCondLst>
+                                    <p:cond delay="0"/>
+                                  </p:stCondLst>
+                                  <p:childTnLst>
+                                    <p:set>
+                                      <p:cBhvr>
+                                        <p:cTn id="6" dur="1" fill="hold">
+                                          <p:stCondLst>
+                                            <p:cond delay="0"/>
+                                          </p:stCondLst>
+                                        </p:cTn>
+                                        <p:tgtEl>
+                                          <p:spTgt spid="7"/>
+                                        </p:tgtEl>
+                                        <p:attrNameLst>
+                                          <p:attrName>style.visibility</p:attrName>
+                                        </p:attrNameLst>
+                                      </p:cBhvr>
+                                      <p:to>
+                                        <p:strVal val="visible"/>
+                                      </p:to>
+                                    </p:set>
+                                    <p:animEffect transition="in" filter="fade">
+                                      <p:cBhvr>
+                                        <p:cTn id="7" dur="500"/>
+                                        <p:tgtEl>
+                                          <p:spTgt spid="7"/>
+                                        </p:tgtEl>
+                                      </p:cBhvr>
+                                    </p:animEffect>
+                                  </p:childTnLst>
+                                </p:cTn>
+                              </p:par>
+                              <p:par>
+                                <p:cTn id="8" presetID="10" presetClass="entr" presetSubtype="0" fill="hold" grpId="0" nodeType="withEffect">
+                                  <p:stCondLst>
+                                    <p:cond delay="0"/>
+                                  </p:stCondLst>
+                                  <p:childTnLst>
+                                    <p:set>
+                                      <p:cBhvr>
+                                        <p:cTn id="9" dur="1" fill="hold">
+                                          <p:stCondLst>
+                                            <p:cond delay="0"/>
+                                          </p:stCondLst>
+                                        </p:cTn>
+                                        <p:tgtEl>
+                                          <p:spTgt spid="8"/>
+                                        </p:tgtEl>
+                                        <p:attrNameLst>
+                                          <p:attrName>style.visibility</p:attrName>
+                                        </p:attrNameLst>
+                                      </p:cBhvr>
+                                      <p:to>
+                                        <p:strVal val="visible"/>
+                                      </p:to>
+                                    </p:set>
+                                    <p:animEffect transition="in" filter="fade">
+                                      <p:cBhvr>
+                                        <p:cTn id="10" dur="500"/>
+                                        <p:tgtEl>
+                                          <p:spTgt spid="8"/>
+                                        </p:tgtEl>
+                                      </p:cBhvr>
+                                    </p:animEffect>
+                                  </p:childTnLst>
+                                </p:cTn>
+                              </p:par>
+                            </p:childTnLst>
+                          </p:cTn>
+                        </p:par>
+                      </p:childTnLst>
+                    </p:cTn>
+                  </p:par>
+                </p:childTnLst>
+              </p:cTn>
+              <p:prevCondLst>
+                <p:cond evt="onPrev" delay="0">
+                  <p:tgtEl>
+                    <p:sldTgt/>
+                  </p:tgtEl>
+                </p:cond>
+              </p:prevCondLst>
+              <p:nextCondLst>
+                <p:cond evt="onNext" delay="0">
+                  <p:tgtEl>
+                    <p:sldTgt/>
+                  </p:tgtEl>
+                </p:cond>
+              </p:nextCondLst>
+            </p:seq>
+          </p:childTnLst>
+        </p:cTn>
+      </p:par>
+    </p:tnLst>
+    <p:bldLst>
+      <p:bldP spid="7" grpId="0" animBg="1"/>
+      <p:bldP spid="8" grpId="0" animBg="1"/>
+    </p:bldLst>
+  </p:timing>
 </p:sld>
 </file>
 
@@ -7436,6 +7561,347 @@
       </p:transition>
     </mc:Fallback>
   </mc:AlternateContent>
+  <p:timing>
+    <p:tnLst>
+      <p:par>
+        <p:cTn id="1" dur="indefinite" restart="never" nodeType="tmRoot">
+          <p:childTnLst>
+            <p:seq concurrent="1" nextAc="seek">
+              <p:cTn id="2" dur="indefinite" nodeType="mainSeq">
+                <p:childTnLst>
+                  <p:par>
+                    <p:cTn id="3" fill="hold">
+                      <p:stCondLst>
+                        <p:cond delay="indefinite"/>
+                        <p:cond evt="onBegin" delay="0">
+                          <p:tn val="2"/>
+                        </p:cond>
+                      </p:stCondLst>
+                      <p:childTnLst>
+                        <p:par>
+                          <p:cTn id="4" fill="hold">
+                            <p:stCondLst>
+                              <p:cond delay="0"/>
+                            </p:stCondLst>
+                            <p:childTnLst>
+                              <p:par>
+                                <p:cTn id="5" presetID="10" presetClass="entr" presetSubtype="0" fill="hold" grpId="0" nodeType="withEffect">
+                                  <p:stCondLst>
+                                    <p:cond delay="0"/>
+                                  </p:stCondLst>
+                                  <p:childTnLst>
+                                    <p:set>
+                                      <p:cBhvr>
+                                        <p:cTn id="6" dur="1" fill="hold">
+                                          <p:stCondLst>
+                                            <p:cond delay="0"/>
+                                          </p:stCondLst>
+                                        </p:cTn>
+                                        <p:tgtEl>
+                                          <p:spTgt spid="9"/>
+                                        </p:tgtEl>
+                                        <p:attrNameLst>
+                                          <p:attrName>style.visibility</p:attrName>
+                                        </p:attrNameLst>
+                                      </p:cBhvr>
+                                      <p:to>
+                                        <p:strVal val="visible"/>
+                                      </p:to>
+                                    </p:set>
+                                    <p:animEffect transition="in" filter="fade">
+                                      <p:cBhvr>
+                                        <p:cTn id="7" dur="500"/>
+                                        <p:tgtEl>
+                                          <p:spTgt spid="9"/>
+                                        </p:tgtEl>
+                                      </p:cBhvr>
+                                    </p:animEffect>
+                                  </p:childTnLst>
+                                </p:cTn>
+                              </p:par>
+                              <p:par>
+                                <p:cTn id="8" presetID="10" presetClass="entr" presetSubtype="0" fill="hold" grpId="0" nodeType="withEffect">
+                                  <p:stCondLst>
+                                    <p:cond delay="0"/>
+                                  </p:stCondLst>
+                                  <p:childTnLst>
+                                    <p:set>
+                                      <p:cBhvr>
+                                        <p:cTn id="9" dur="1" fill="hold">
+                                          <p:stCondLst>
+                                            <p:cond delay="0"/>
+                                          </p:stCondLst>
+                                        </p:cTn>
+                                        <p:tgtEl>
+                                          <p:spTgt spid="10"/>
+                                        </p:tgtEl>
+                                        <p:attrNameLst>
+                                          <p:attrName>style.visibility</p:attrName>
+                                        </p:attrNameLst>
+                                      </p:cBhvr>
+                                      <p:to>
+                                        <p:strVal val="visible"/>
+                                      </p:to>
+                                    </p:set>
+                                    <p:animEffect transition="in" filter="fade">
+                                      <p:cBhvr>
+                                        <p:cTn id="10" dur="500"/>
+                                        <p:tgtEl>
+                                          <p:spTgt spid="10"/>
+                                        </p:tgtEl>
+                                      </p:cBhvr>
+                                    </p:animEffect>
+                                  </p:childTnLst>
+                                </p:cTn>
+                              </p:par>
+                              <p:par>
+                                <p:cTn id="11" presetID="10" presetClass="entr" presetSubtype="0" fill="hold" grpId="0" nodeType="withEffect">
+                                  <p:stCondLst>
+                                    <p:cond delay="0"/>
+                                  </p:stCondLst>
+                                  <p:childTnLst>
+                                    <p:set>
+                                      <p:cBhvr>
+                                        <p:cTn id="12" dur="1" fill="hold">
+                                          <p:stCondLst>
+                                            <p:cond delay="0"/>
+                                          </p:stCondLst>
+                                        </p:cTn>
+                                        <p:tgtEl>
+                                          <p:spTgt spid="12"/>
+                                        </p:tgtEl>
+                                        <p:attrNameLst>
+                                          <p:attrName>style.visibility</p:attrName>
+                                        </p:attrNameLst>
+                                      </p:cBhvr>
+                                      <p:to>
+                                        <p:strVal val="visible"/>
+                                      </p:to>
+                                    </p:set>
+                                    <p:animEffect transition="in" filter="fade">
+                                      <p:cBhvr>
+                                        <p:cTn id="13" dur="500"/>
+                                        <p:tgtEl>
+                                          <p:spTgt spid="12"/>
+                                        </p:tgtEl>
+                                      </p:cBhvr>
+                                    </p:animEffect>
+                                  </p:childTnLst>
+                                </p:cTn>
+                              </p:par>
+                              <p:par>
+                                <p:cTn id="14" presetID="10" presetClass="entr" presetSubtype="0" fill="hold" grpId="0" nodeType="withEffect">
+                                  <p:stCondLst>
+                                    <p:cond delay="0"/>
+                                  </p:stCondLst>
+                                  <p:childTnLst>
+                                    <p:set>
+                                      <p:cBhvr>
+                                        <p:cTn id="15" dur="1" fill="hold">
+                                          <p:stCondLst>
+                                            <p:cond delay="0"/>
+                                          </p:stCondLst>
+                                        </p:cTn>
+                                        <p:tgtEl>
+                                          <p:spTgt spid="11"/>
+                                        </p:tgtEl>
+                                        <p:attrNameLst>
+                                          <p:attrName>style.visibility</p:attrName>
+                                        </p:attrNameLst>
+                                      </p:cBhvr>
+                                      <p:to>
+                                        <p:strVal val="visible"/>
+                                      </p:to>
+                                    </p:set>
+                                    <p:animEffect transition="in" filter="fade">
+                                      <p:cBhvr>
+                                        <p:cTn id="16" dur="500"/>
+                                        <p:tgtEl>
+                                          <p:spTgt spid="11"/>
+                                        </p:tgtEl>
+                                      </p:cBhvr>
+                                    </p:animEffect>
+                                  </p:childTnLst>
+                                </p:cTn>
+                              </p:par>
+                              <p:par>
+                                <p:cTn id="17" presetID="10" presetClass="entr" presetSubtype="0" fill="hold" grpId="0" nodeType="withEffect">
+                                  <p:stCondLst>
+                                    <p:cond delay="0"/>
+                                  </p:stCondLst>
+                                  <p:childTnLst>
+                                    <p:set>
+                                      <p:cBhvr>
+                                        <p:cTn id="18" dur="1" fill="hold">
+                                          <p:stCondLst>
+                                            <p:cond delay="0"/>
+                                          </p:stCondLst>
+                                        </p:cTn>
+                                        <p:tgtEl>
+                                          <p:spTgt spid="7"/>
+                                        </p:tgtEl>
+                                        <p:attrNameLst>
+                                          <p:attrName>style.visibility</p:attrName>
+                                        </p:attrNameLst>
+                                      </p:cBhvr>
+                                      <p:to>
+                                        <p:strVal val="visible"/>
+                                      </p:to>
+                                    </p:set>
+                                    <p:animEffect transition="in" filter="fade">
+                                      <p:cBhvr>
+                                        <p:cTn id="19" dur="500"/>
+                                        <p:tgtEl>
+                                          <p:spTgt spid="7"/>
+                                        </p:tgtEl>
+                                      </p:cBhvr>
+                                    </p:animEffect>
+                                  </p:childTnLst>
+                                </p:cTn>
+                              </p:par>
+                              <p:par>
+                                <p:cTn id="20" presetID="10" presetClass="entr" presetSubtype="0" fill="hold" grpId="0" nodeType="withEffect">
+                                  <p:stCondLst>
+                                    <p:cond delay="0"/>
+                                  </p:stCondLst>
+                                  <p:childTnLst>
+                                    <p:set>
+                                      <p:cBhvr>
+                                        <p:cTn id="21" dur="1" fill="hold">
+                                          <p:stCondLst>
+                                            <p:cond delay="0"/>
+                                          </p:stCondLst>
+                                        </p:cTn>
+                                        <p:tgtEl>
+                                          <p:spTgt spid="8"/>
+                                        </p:tgtEl>
+                                        <p:attrNameLst>
+                                          <p:attrName>style.visibility</p:attrName>
+                                        </p:attrNameLst>
+                                      </p:cBhvr>
+                                      <p:to>
+                                        <p:strVal val="visible"/>
+                                      </p:to>
+                                    </p:set>
+                                    <p:animEffect transition="in" filter="fade">
+                                      <p:cBhvr>
+                                        <p:cTn id="22" dur="500"/>
+                                        <p:tgtEl>
+                                          <p:spTgt spid="8"/>
+                                        </p:tgtEl>
+                                      </p:cBhvr>
+                                    </p:animEffect>
+                                  </p:childTnLst>
+                                </p:cTn>
+                              </p:par>
+                              <p:par>
+                                <p:cTn id="23" presetID="10" presetClass="entr" presetSubtype="0" fill="hold" grpId="0" nodeType="withEffect">
+                                  <p:stCondLst>
+                                    <p:cond delay="0"/>
+                                  </p:stCondLst>
+                                  <p:childTnLst>
+                                    <p:set>
+                                      <p:cBhvr>
+                                        <p:cTn id="24" dur="1" fill="hold">
+                                          <p:stCondLst>
+                                            <p:cond delay="0"/>
+                                          </p:stCondLst>
+                                        </p:cTn>
+                                        <p:tgtEl>
+                                          <p:spTgt spid="6"/>
+                                        </p:tgtEl>
+                                        <p:attrNameLst>
+                                          <p:attrName>style.visibility</p:attrName>
+                                        </p:attrNameLst>
+                                      </p:cBhvr>
+                                      <p:to>
+                                        <p:strVal val="visible"/>
+                                      </p:to>
+                                    </p:set>
+                                    <p:animEffect transition="in" filter="fade">
+                                      <p:cBhvr>
+                                        <p:cTn id="25" dur="500"/>
+                                        <p:tgtEl>
+                                          <p:spTgt spid="6"/>
+                                        </p:tgtEl>
+                                      </p:cBhvr>
+                                    </p:animEffect>
+                                  </p:childTnLst>
+                                </p:cTn>
+                              </p:par>
+                              <p:par>
+                                <p:cTn id="26" presetID="10" presetClass="entr" presetSubtype="0" fill="hold" grpId="0" nodeType="withEffect">
+                                  <p:stCondLst>
+                                    <p:cond delay="0"/>
+                                  </p:stCondLst>
+                                  <p:childTnLst>
+                                    <p:set>
+                                      <p:cBhvr>
+                                        <p:cTn id="27" dur="1" fill="hold">
+                                          <p:stCondLst>
+                                            <p:cond delay="0"/>
+                                          </p:stCondLst>
+                                        </p:cTn>
+                                        <p:tgtEl>
+                                          <p:spTgt spid="5"/>
+                                        </p:tgtEl>
+                                        <p:attrNameLst>
+                                          <p:attrName>style.visibility</p:attrName>
+                                        </p:attrNameLst>
+                                      </p:cBhvr>
+                                      <p:to>
+                                        <p:strVal val="visible"/>
+                                      </p:to>
+                                    </p:set>
+                                    <p:animEffect transition="in" filter="fade">
+                                      <p:cBhvr>
+                                        <p:cTn id="28" dur="500"/>
+                                        <p:tgtEl>
+                                          <p:spTgt spid="5"/>
+                                        </p:tgtEl>
+                                      </p:cBhvr>
+                                    </p:animEffect>
+                                  </p:childTnLst>
+                                </p:cTn>
+                              </p:par>
+                            </p:childTnLst>
+                          </p:cTn>
+                        </p:par>
+                      </p:childTnLst>
+                    </p:cTn>
+                  </p:par>
+                </p:childTnLst>
+              </p:cTn>
+              <p:prevCondLst>
+                <p:cond evt="onPrev" delay="0">
+                  <p:tgtEl>
+                    <p:sldTgt/>
+                  </p:tgtEl>
+                </p:cond>
+              </p:prevCondLst>
+              <p:nextCondLst>
+                <p:cond evt="onNext" delay="0">
+                  <p:tgtEl>
+                    <p:sldTgt/>
+                  </p:tgtEl>
+                </p:cond>
+              </p:nextCondLst>
+            </p:seq>
+          </p:childTnLst>
+        </p:cTn>
+      </p:par>
+    </p:tnLst>
+    <p:bldLst>
+      <p:bldP spid="5" grpId="0" animBg="1"/>
+      <p:bldP spid="6" grpId="0" animBg="1"/>
+      <p:bldP spid="7" grpId="0" animBg="1"/>
+      <p:bldP spid="8" grpId="0" animBg="1"/>
+      <p:bldP spid="9" grpId="0" animBg="1"/>
+      <p:bldP spid="10" grpId="0" animBg="1"/>
+      <p:bldP spid="11" grpId="0" animBg="1"/>
+      <p:bldP spid="12" grpId="0" animBg="1"/>
+    </p:bldLst>
+  </p:timing>
 </p:sld>
 </file>
 
@@ -8200,6 +8666,419 @@
       </p:transition>
     </mc:Fallback>
   </mc:AlternateContent>
+  <p:timing>
+    <p:tnLst>
+      <p:par>
+        <p:cTn id="1" dur="indefinite" restart="never" nodeType="tmRoot">
+          <p:childTnLst>
+            <p:seq concurrent="1" nextAc="seek">
+              <p:cTn id="2" dur="indefinite" nodeType="mainSeq">
+                <p:childTnLst>
+                  <p:par>
+                    <p:cTn id="3" fill="hold">
+                      <p:stCondLst>
+                        <p:cond delay="indefinite"/>
+                        <p:cond evt="onBegin" delay="0">
+                          <p:tn val="2"/>
+                        </p:cond>
+                      </p:stCondLst>
+                      <p:childTnLst>
+                        <p:par>
+                          <p:cTn id="4" fill="hold">
+                            <p:stCondLst>
+                              <p:cond delay="0"/>
+                            </p:stCondLst>
+                            <p:childTnLst>
+                              <p:par>
+                                <p:cTn id="5" presetID="10" presetClass="entr" presetSubtype="0" fill="hold" grpId="0" nodeType="withEffect">
+                                  <p:stCondLst>
+                                    <p:cond delay="0"/>
+                                  </p:stCondLst>
+                                  <p:childTnLst>
+                                    <p:set>
+                                      <p:cBhvr>
+                                        <p:cTn id="6" dur="1" fill="hold">
+                                          <p:stCondLst>
+                                            <p:cond delay="0"/>
+                                          </p:stCondLst>
+                                        </p:cTn>
+                                        <p:tgtEl>
+                                          <p:spTgt spid="15"/>
+                                        </p:tgtEl>
+                                        <p:attrNameLst>
+                                          <p:attrName>style.visibility</p:attrName>
+                                        </p:attrNameLst>
+                                      </p:cBhvr>
+                                      <p:to>
+                                        <p:strVal val="visible"/>
+                                      </p:to>
+                                    </p:set>
+                                    <p:animEffect transition="in" filter="fade">
+                                      <p:cBhvr>
+                                        <p:cTn id="7" dur="500"/>
+                                        <p:tgtEl>
+                                          <p:spTgt spid="15"/>
+                                        </p:tgtEl>
+                                      </p:cBhvr>
+                                    </p:animEffect>
+                                  </p:childTnLst>
+                                </p:cTn>
+                              </p:par>
+                              <p:par>
+                                <p:cTn id="8" presetID="10" presetClass="entr" presetSubtype="0" fill="hold" grpId="0" nodeType="withEffect">
+                                  <p:stCondLst>
+                                    <p:cond delay="0"/>
+                                  </p:stCondLst>
+                                  <p:childTnLst>
+                                    <p:set>
+                                      <p:cBhvr>
+                                        <p:cTn id="9" dur="1" fill="hold">
+                                          <p:stCondLst>
+                                            <p:cond delay="0"/>
+                                          </p:stCondLst>
+                                        </p:cTn>
+                                        <p:tgtEl>
+                                          <p:spTgt spid="17"/>
+                                        </p:tgtEl>
+                                        <p:attrNameLst>
+                                          <p:attrName>style.visibility</p:attrName>
+                                        </p:attrNameLst>
+                                      </p:cBhvr>
+                                      <p:to>
+                                        <p:strVal val="visible"/>
+                                      </p:to>
+                                    </p:set>
+                                    <p:animEffect transition="in" filter="fade">
+                                      <p:cBhvr>
+                                        <p:cTn id="10" dur="500"/>
+                                        <p:tgtEl>
+                                          <p:spTgt spid="17"/>
+                                        </p:tgtEl>
+                                      </p:cBhvr>
+                                    </p:animEffect>
+                                  </p:childTnLst>
+                                </p:cTn>
+                              </p:par>
+                              <p:par>
+                                <p:cTn id="11" presetID="10" presetClass="entr" presetSubtype="0" fill="hold" grpId="0" nodeType="withEffect">
+                                  <p:stCondLst>
+                                    <p:cond delay="0"/>
+                                  </p:stCondLst>
+                                  <p:childTnLst>
+                                    <p:set>
+                                      <p:cBhvr>
+                                        <p:cTn id="12" dur="1" fill="hold">
+                                          <p:stCondLst>
+                                            <p:cond delay="0"/>
+                                          </p:stCondLst>
+                                        </p:cTn>
+                                        <p:tgtEl>
+                                          <p:spTgt spid="20"/>
+                                        </p:tgtEl>
+                                        <p:attrNameLst>
+                                          <p:attrName>style.visibility</p:attrName>
+                                        </p:attrNameLst>
+                                      </p:cBhvr>
+                                      <p:to>
+                                        <p:strVal val="visible"/>
+                                      </p:to>
+                                    </p:set>
+                                    <p:animEffect transition="in" filter="fade">
+                                      <p:cBhvr>
+                                        <p:cTn id="13" dur="500"/>
+                                        <p:tgtEl>
+                                          <p:spTgt spid="20"/>
+                                        </p:tgtEl>
+                                      </p:cBhvr>
+                                    </p:animEffect>
+                                  </p:childTnLst>
+                                </p:cTn>
+                              </p:par>
+                              <p:par>
+                                <p:cTn id="14" presetID="10" presetClass="entr" presetSubtype="0" fill="hold" grpId="0" nodeType="withEffect">
+                                  <p:stCondLst>
+                                    <p:cond delay="0"/>
+                                  </p:stCondLst>
+                                  <p:childTnLst>
+                                    <p:set>
+                                      <p:cBhvr>
+                                        <p:cTn id="15" dur="1" fill="hold">
+                                          <p:stCondLst>
+                                            <p:cond delay="0"/>
+                                          </p:stCondLst>
+                                        </p:cTn>
+                                        <p:tgtEl>
+                                          <p:spTgt spid="19"/>
+                                        </p:tgtEl>
+                                        <p:attrNameLst>
+                                          <p:attrName>style.visibility</p:attrName>
+                                        </p:attrNameLst>
+                                      </p:cBhvr>
+                                      <p:to>
+                                        <p:strVal val="visible"/>
+                                      </p:to>
+                                    </p:set>
+                                    <p:animEffect transition="in" filter="fade">
+                                      <p:cBhvr>
+                                        <p:cTn id="16" dur="500"/>
+                                        <p:tgtEl>
+                                          <p:spTgt spid="19"/>
+                                        </p:tgtEl>
+                                      </p:cBhvr>
+                                    </p:animEffect>
+                                  </p:childTnLst>
+                                </p:cTn>
+                              </p:par>
+                              <p:par>
+                                <p:cTn id="17" presetID="10" presetClass="entr" presetSubtype="0" fill="hold" grpId="0" nodeType="withEffect">
+                                  <p:stCondLst>
+                                    <p:cond delay="0"/>
+                                  </p:stCondLst>
+                                  <p:childTnLst>
+                                    <p:set>
+                                      <p:cBhvr>
+                                        <p:cTn id="18" dur="1" fill="hold">
+                                          <p:stCondLst>
+                                            <p:cond delay="0"/>
+                                          </p:stCondLst>
+                                        </p:cTn>
+                                        <p:tgtEl>
+                                          <p:spTgt spid="18"/>
+                                        </p:tgtEl>
+                                        <p:attrNameLst>
+                                          <p:attrName>style.visibility</p:attrName>
+                                        </p:attrNameLst>
+                                      </p:cBhvr>
+                                      <p:to>
+                                        <p:strVal val="visible"/>
+                                      </p:to>
+                                    </p:set>
+                                    <p:animEffect transition="in" filter="fade">
+                                      <p:cBhvr>
+                                        <p:cTn id="19" dur="500"/>
+                                        <p:tgtEl>
+                                          <p:spTgt spid="18"/>
+                                        </p:tgtEl>
+                                      </p:cBhvr>
+                                    </p:animEffect>
+                                  </p:childTnLst>
+                                </p:cTn>
+                              </p:par>
+                              <p:par>
+                                <p:cTn id="20" presetID="10" presetClass="entr" presetSubtype="0" fill="hold" grpId="0" nodeType="withEffect">
+                                  <p:stCondLst>
+                                    <p:cond delay="0"/>
+                                  </p:stCondLst>
+                                  <p:childTnLst>
+                                    <p:set>
+                                      <p:cBhvr>
+                                        <p:cTn id="21" dur="1" fill="hold">
+                                          <p:stCondLst>
+                                            <p:cond delay="0"/>
+                                          </p:stCondLst>
+                                        </p:cTn>
+                                        <p:tgtEl>
+                                          <p:spTgt spid="16"/>
+                                        </p:tgtEl>
+                                        <p:attrNameLst>
+                                          <p:attrName>style.visibility</p:attrName>
+                                        </p:attrNameLst>
+                                      </p:cBhvr>
+                                      <p:to>
+                                        <p:strVal val="visible"/>
+                                      </p:to>
+                                    </p:set>
+                                    <p:animEffect transition="in" filter="fade">
+                                      <p:cBhvr>
+                                        <p:cTn id="22" dur="500"/>
+                                        <p:tgtEl>
+                                          <p:spTgt spid="16"/>
+                                        </p:tgtEl>
+                                      </p:cBhvr>
+                                    </p:animEffect>
+                                  </p:childTnLst>
+                                </p:cTn>
+                              </p:par>
+                              <p:par>
+                                <p:cTn id="23" presetID="10" presetClass="entr" presetSubtype="0" fill="hold" grpId="0" nodeType="withEffect">
+                                  <p:stCondLst>
+                                    <p:cond delay="0"/>
+                                  </p:stCondLst>
+                                  <p:childTnLst>
+                                    <p:set>
+                                      <p:cBhvr>
+                                        <p:cTn id="24" dur="1" fill="hold">
+                                          <p:stCondLst>
+                                            <p:cond delay="0"/>
+                                          </p:stCondLst>
+                                        </p:cTn>
+                                        <p:tgtEl>
+                                          <p:spTgt spid="11"/>
+                                        </p:tgtEl>
+                                        <p:attrNameLst>
+                                          <p:attrName>style.visibility</p:attrName>
+                                        </p:attrNameLst>
+                                      </p:cBhvr>
+                                      <p:to>
+                                        <p:strVal val="visible"/>
+                                      </p:to>
+                                    </p:set>
+                                    <p:animEffect transition="in" filter="fade">
+                                      <p:cBhvr>
+                                        <p:cTn id="25" dur="500"/>
+                                        <p:tgtEl>
+                                          <p:spTgt spid="11"/>
+                                        </p:tgtEl>
+                                      </p:cBhvr>
+                                    </p:animEffect>
+                                  </p:childTnLst>
+                                </p:cTn>
+                              </p:par>
+                              <p:par>
+                                <p:cTn id="26" presetID="10" presetClass="entr" presetSubtype="0" fill="hold" grpId="0" nodeType="withEffect">
+                                  <p:stCondLst>
+                                    <p:cond delay="0"/>
+                                  </p:stCondLst>
+                                  <p:childTnLst>
+                                    <p:set>
+                                      <p:cBhvr>
+                                        <p:cTn id="27" dur="1" fill="hold">
+                                          <p:stCondLst>
+                                            <p:cond delay="0"/>
+                                          </p:stCondLst>
+                                        </p:cTn>
+                                        <p:tgtEl>
+                                          <p:spTgt spid="12"/>
+                                        </p:tgtEl>
+                                        <p:attrNameLst>
+                                          <p:attrName>style.visibility</p:attrName>
+                                        </p:attrNameLst>
+                                      </p:cBhvr>
+                                      <p:to>
+                                        <p:strVal val="visible"/>
+                                      </p:to>
+                                    </p:set>
+                                    <p:animEffect transition="in" filter="fade">
+                                      <p:cBhvr>
+                                        <p:cTn id="28" dur="500"/>
+                                        <p:tgtEl>
+                                          <p:spTgt spid="12"/>
+                                        </p:tgtEl>
+                                      </p:cBhvr>
+                                    </p:animEffect>
+                                  </p:childTnLst>
+                                </p:cTn>
+                              </p:par>
+                              <p:par>
+                                <p:cTn id="29" presetID="10" presetClass="entr" presetSubtype="0" fill="hold" grpId="0" nodeType="withEffect">
+                                  <p:stCondLst>
+                                    <p:cond delay="0"/>
+                                  </p:stCondLst>
+                                  <p:childTnLst>
+                                    <p:set>
+                                      <p:cBhvr>
+                                        <p:cTn id="30" dur="1" fill="hold">
+                                          <p:stCondLst>
+                                            <p:cond delay="0"/>
+                                          </p:stCondLst>
+                                        </p:cTn>
+                                        <p:tgtEl>
+                                          <p:spTgt spid="13"/>
+                                        </p:tgtEl>
+                                        <p:attrNameLst>
+                                          <p:attrName>style.visibility</p:attrName>
+                                        </p:attrNameLst>
+                                      </p:cBhvr>
+                                      <p:to>
+                                        <p:strVal val="visible"/>
+                                      </p:to>
+                                    </p:set>
+                                    <p:animEffect transition="in" filter="fade">
+                                      <p:cBhvr>
+                                        <p:cTn id="31" dur="500"/>
+                                        <p:tgtEl>
+                                          <p:spTgt spid="13"/>
+                                        </p:tgtEl>
+                                      </p:cBhvr>
+                                    </p:animEffect>
+                                  </p:childTnLst>
+                                </p:cTn>
+                              </p:par>
+                              <p:par>
+                                <p:cTn id="32" presetID="10" presetClass="entr" presetSubtype="0" fill="hold" grpId="0" nodeType="withEffect">
+                                  <p:stCondLst>
+                                    <p:cond delay="0"/>
+                                  </p:stCondLst>
+                                  <p:childTnLst>
+                                    <p:set>
+                                      <p:cBhvr>
+                                        <p:cTn id="33" dur="1" fill="hold">
+                                          <p:stCondLst>
+                                            <p:cond delay="0"/>
+                                          </p:stCondLst>
+                                        </p:cTn>
+                                        <p:tgtEl>
+                                          <p:spTgt spid="14"/>
+                                        </p:tgtEl>
+                                        <p:attrNameLst>
+                                          <p:attrName>style.visibility</p:attrName>
+                                        </p:attrNameLst>
+                                      </p:cBhvr>
+                                      <p:to>
+                                        <p:strVal val="visible"/>
+                                      </p:to>
+                                    </p:set>
+                                    <p:animEffect transition="in" filter="fade">
+                                      <p:cBhvr>
+                                        <p:cTn id="34" dur="500"/>
+                                        <p:tgtEl>
+                                          <p:spTgt spid="14"/>
+                                        </p:tgtEl>
+                                      </p:cBhvr>
+                                    </p:animEffect>
+                                  </p:childTnLst>
+                                </p:cTn>
+                              </p:par>
+                            </p:childTnLst>
+                          </p:cTn>
+                        </p:par>
+                      </p:childTnLst>
+                    </p:cTn>
+                  </p:par>
+                </p:childTnLst>
+              </p:cTn>
+              <p:prevCondLst>
+                <p:cond evt="onPrev" delay="0">
+                  <p:tgtEl>
+                    <p:sldTgt/>
+                  </p:tgtEl>
+                </p:cond>
+              </p:prevCondLst>
+              <p:nextCondLst>
+                <p:cond evt="onNext" delay="0">
+                  <p:tgtEl>
+                    <p:sldTgt/>
+                  </p:tgtEl>
+                </p:cond>
+              </p:nextCondLst>
+            </p:seq>
+          </p:childTnLst>
+        </p:cTn>
+      </p:par>
+    </p:tnLst>
+    <p:bldLst>
+      <p:bldP spid="11" grpId="0" animBg="1"/>
+      <p:bldP spid="12" grpId="0" animBg="1"/>
+      <p:bldP spid="13" grpId="0" animBg="1"/>
+      <p:bldP spid="14" grpId="0" animBg="1"/>
+      <p:bldP spid="15" grpId="0" animBg="1"/>
+      <p:bldP spid="16" grpId="0" animBg="1"/>
+      <p:bldP spid="17" grpId="0" animBg="1"/>
+      <p:bldP spid="18" grpId="0" animBg="1"/>
+      <p:bldP spid="19" grpId="0" animBg="1"/>
+      <p:bldP spid="20" grpId="0" animBg="1"/>
+    </p:bldLst>
+  </p:timing>
 </p:sld>
 </file>
 
@@ -8621,6 +9500,203 @@
       </p:transition>
     </mc:Fallback>
   </mc:AlternateContent>
+  <p:timing>
+    <p:tnLst>
+      <p:par>
+        <p:cTn id="1" dur="indefinite" restart="never" nodeType="tmRoot">
+          <p:childTnLst>
+            <p:seq concurrent="1" nextAc="seek">
+              <p:cTn id="2" dur="indefinite" nodeType="mainSeq">
+                <p:childTnLst>
+                  <p:par>
+                    <p:cTn id="3" fill="hold">
+                      <p:stCondLst>
+                        <p:cond delay="indefinite"/>
+                        <p:cond evt="onBegin" delay="0">
+                          <p:tn val="2"/>
+                        </p:cond>
+                      </p:stCondLst>
+                      <p:childTnLst>
+                        <p:par>
+                          <p:cTn id="4" fill="hold">
+                            <p:stCondLst>
+                              <p:cond delay="0"/>
+                            </p:stCondLst>
+                            <p:childTnLst>
+                              <p:par>
+                                <p:cTn id="5" presetID="10" presetClass="entr" presetSubtype="0" fill="hold" grpId="0" nodeType="withEffect">
+                                  <p:stCondLst>
+                                    <p:cond delay="0"/>
+                                  </p:stCondLst>
+                                  <p:childTnLst>
+                                    <p:set>
+                                      <p:cBhvr>
+                                        <p:cTn id="6" dur="1" fill="hold">
+                                          <p:stCondLst>
+                                            <p:cond delay="0"/>
+                                          </p:stCondLst>
+                                        </p:cTn>
+                                        <p:tgtEl>
+                                          <p:spTgt spid="6"/>
+                                        </p:tgtEl>
+                                        <p:attrNameLst>
+                                          <p:attrName>style.visibility</p:attrName>
+                                        </p:attrNameLst>
+                                      </p:cBhvr>
+                                      <p:to>
+                                        <p:strVal val="visible"/>
+                                      </p:to>
+                                    </p:set>
+                                    <p:animEffect transition="in" filter="fade">
+                                      <p:cBhvr>
+                                        <p:cTn id="7" dur="500"/>
+                                        <p:tgtEl>
+                                          <p:spTgt spid="6"/>
+                                        </p:tgtEl>
+                                      </p:cBhvr>
+                                    </p:animEffect>
+                                  </p:childTnLst>
+                                </p:cTn>
+                              </p:par>
+                              <p:par>
+                                <p:cTn id="8" presetID="10" presetClass="entr" presetSubtype="0" fill="hold" grpId="0" nodeType="withEffect">
+                                  <p:stCondLst>
+                                    <p:cond delay="0"/>
+                                  </p:stCondLst>
+                                  <p:childTnLst>
+                                    <p:set>
+                                      <p:cBhvr>
+                                        <p:cTn id="9" dur="1" fill="hold">
+                                          <p:stCondLst>
+                                            <p:cond delay="0"/>
+                                          </p:stCondLst>
+                                        </p:cTn>
+                                        <p:tgtEl>
+                                          <p:spTgt spid="5"/>
+                                        </p:tgtEl>
+                                        <p:attrNameLst>
+                                          <p:attrName>style.visibility</p:attrName>
+                                        </p:attrNameLst>
+                                      </p:cBhvr>
+                                      <p:to>
+                                        <p:strVal val="visible"/>
+                                      </p:to>
+                                    </p:set>
+                                    <p:animEffect transition="in" filter="fade">
+                                      <p:cBhvr>
+                                        <p:cTn id="10" dur="500"/>
+                                        <p:tgtEl>
+                                          <p:spTgt spid="5"/>
+                                        </p:tgtEl>
+                                      </p:cBhvr>
+                                    </p:animEffect>
+                                  </p:childTnLst>
+                                </p:cTn>
+                              </p:par>
+                              <p:par>
+                                <p:cTn id="11" presetID="10" presetClass="entr" presetSubtype="0" fill="hold" grpId="0" nodeType="withEffect">
+                                  <p:stCondLst>
+                                    <p:cond delay="200"/>
+                                  </p:stCondLst>
+                                  <p:childTnLst>
+                                    <p:set>
+                                      <p:cBhvr>
+                                        <p:cTn id="12" dur="1" fill="hold">
+                                          <p:stCondLst>
+                                            <p:cond delay="0"/>
+                                          </p:stCondLst>
+                                        </p:cTn>
+                                        <p:tgtEl>
+                                          <p:spTgt spid="8"/>
+                                        </p:tgtEl>
+                                        <p:attrNameLst>
+                                          <p:attrName>style.visibility</p:attrName>
+                                        </p:attrNameLst>
+                                      </p:cBhvr>
+                                      <p:to>
+                                        <p:strVal val="visible"/>
+                                      </p:to>
+                                    </p:set>
+                                    <p:animEffect transition="in" filter="fade">
+                                      <p:cBhvr>
+                                        <p:cTn id="13" dur="500"/>
+                                        <p:tgtEl>
+                                          <p:spTgt spid="8"/>
+                                        </p:tgtEl>
+                                      </p:cBhvr>
+                                    </p:animEffect>
+                                  </p:childTnLst>
+                                </p:cTn>
+                              </p:par>
+                              <p:par>
+                                <p:cTn id="14" presetID="10" presetClass="entr" presetSubtype="0" fill="hold" grpId="0" nodeType="withEffect">
+                                  <p:stCondLst>
+                                    <p:cond delay="200"/>
+                                  </p:stCondLst>
+                                  <p:childTnLst>
+                                    <p:set>
+                                      <p:cBhvr>
+                                        <p:cTn id="15" dur="1" fill="hold">
+                                          <p:stCondLst>
+                                            <p:cond delay="0"/>
+                                          </p:stCondLst>
+                                        </p:cTn>
+                                        <p:tgtEl>
+                                          <p:spTgt spid="7"/>
+                                        </p:tgtEl>
+                                        <p:attrNameLst>
+                                          <p:attrName>style.visibility</p:attrName>
+                                        </p:attrNameLst>
+                                      </p:cBhvr>
+                                      <p:to>
+                                        <p:strVal val="visible"/>
+                                      </p:to>
+                                    </p:set>
+                                    <p:animEffect transition="in" filter="fade">
+                                      <p:cBhvr>
+                                        <p:cTn id="16" dur="500"/>
+                                        <p:tgtEl>
+                                          <p:spTgt spid="7"/>
+                                        </p:tgtEl>
+                                      </p:cBhvr>
+                                    </p:animEffect>
+                                  </p:childTnLst>
+                                </p:cTn>
+                              </p:par>
+                            </p:childTnLst>
+                          </p:cTn>
+                        </p:par>
+                      </p:childTnLst>
+                    </p:cTn>
+                  </p:par>
+                </p:childTnLst>
+              </p:cTn>
+              <p:prevCondLst>
+                <p:cond evt="onPrev" delay="0">
+                  <p:tgtEl>
+                    <p:sldTgt/>
+                  </p:tgtEl>
+                </p:cond>
+              </p:prevCondLst>
+              <p:nextCondLst>
+                <p:cond evt="onNext" delay="0">
+                  <p:tgtEl>
+                    <p:sldTgt/>
+                  </p:tgtEl>
+                </p:cond>
+              </p:nextCondLst>
+            </p:seq>
+          </p:childTnLst>
+        </p:cTn>
+      </p:par>
+    </p:tnLst>
+    <p:bldLst>
+      <p:bldP spid="5" grpId="0" animBg="1"/>
+      <p:bldP spid="6" grpId="0" animBg="1"/>
+      <p:bldP spid="7" grpId="0" animBg="1"/>
+      <p:bldP spid="8" grpId="0" animBg="1"/>
+    </p:bldLst>
+  </p:timing>
 </p:sld>
 </file>
 
@@ -9042,6 +10118,203 @@
       </p:transition>
     </mc:Fallback>
   </mc:AlternateContent>
+  <p:timing>
+    <p:tnLst>
+      <p:par>
+        <p:cTn id="1" dur="indefinite" restart="never" nodeType="tmRoot">
+          <p:childTnLst>
+            <p:seq concurrent="1" nextAc="seek">
+              <p:cTn id="2" dur="indefinite" nodeType="mainSeq">
+                <p:childTnLst>
+                  <p:par>
+                    <p:cTn id="3" fill="hold">
+                      <p:stCondLst>
+                        <p:cond delay="indefinite"/>
+                        <p:cond evt="onBegin" delay="0">
+                          <p:tn val="2"/>
+                        </p:cond>
+                      </p:stCondLst>
+                      <p:childTnLst>
+                        <p:par>
+                          <p:cTn id="4" fill="hold">
+                            <p:stCondLst>
+                              <p:cond delay="0"/>
+                            </p:stCondLst>
+                            <p:childTnLst>
+                              <p:par>
+                                <p:cTn id="5" presetID="10" presetClass="entr" presetSubtype="0" fill="hold" grpId="0" nodeType="withEffect">
+                                  <p:stCondLst>
+                                    <p:cond delay="0"/>
+                                  </p:stCondLst>
+                                  <p:childTnLst>
+                                    <p:set>
+                                      <p:cBhvr>
+                                        <p:cTn id="6" dur="1" fill="hold">
+                                          <p:stCondLst>
+                                            <p:cond delay="0"/>
+                                          </p:stCondLst>
+                                        </p:cTn>
+                                        <p:tgtEl>
+                                          <p:spTgt spid="6"/>
+                                        </p:tgtEl>
+                                        <p:attrNameLst>
+                                          <p:attrName>style.visibility</p:attrName>
+                                        </p:attrNameLst>
+                                      </p:cBhvr>
+                                      <p:to>
+                                        <p:strVal val="visible"/>
+                                      </p:to>
+                                    </p:set>
+                                    <p:animEffect transition="in" filter="fade">
+                                      <p:cBhvr>
+                                        <p:cTn id="7" dur="500"/>
+                                        <p:tgtEl>
+                                          <p:spTgt spid="6"/>
+                                        </p:tgtEl>
+                                      </p:cBhvr>
+                                    </p:animEffect>
+                                  </p:childTnLst>
+                                </p:cTn>
+                              </p:par>
+                              <p:par>
+                                <p:cTn id="8" presetID="10" presetClass="entr" presetSubtype="0" fill="hold" grpId="0" nodeType="withEffect">
+                                  <p:stCondLst>
+                                    <p:cond delay="0"/>
+                                  </p:stCondLst>
+                                  <p:childTnLst>
+                                    <p:set>
+                                      <p:cBhvr>
+                                        <p:cTn id="9" dur="1" fill="hold">
+                                          <p:stCondLst>
+                                            <p:cond delay="0"/>
+                                          </p:stCondLst>
+                                        </p:cTn>
+                                        <p:tgtEl>
+                                          <p:spTgt spid="5"/>
+                                        </p:tgtEl>
+                                        <p:attrNameLst>
+                                          <p:attrName>style.visibility</p:attrName>
+                                        </p:attrNameLst>
+                                      </p:cBhvr>
+                                      <p:to>
+                                        <p:strVal val="visible"/>
+                                      </p:to>
+                                    </p:set>
+                                    <p:animEffect transition="in" filter="fade">
+                                      <p:cBhvr>
+                                        <p:cTn id="10" dur="500"/>
+                                        <p:tgtEl>
+                                          <p:spTgt spid="5"/>
+                                        </p:tgtEl>
+                                      </p:cBhvr>
+                                    </p:animEffect>
+                                  </p:childTnLst>
+                                </p:cTn>
+                              </p:par>
+                              <p:par>
+                                <p:cTn id="11" presetID="10" presetClass="entr" presetSubtype="0" fill="hold" grpId="0" nodeType="withEffect">
+                                  <p:stCondLst>
+                                    <p:cond delay="200"/>
+                                  </p:stCondLst>
+                                  <p:childTnLst>
+                                    <p:set>
+                                      <p:cBhvr>
+                                        <p:cTn id="12" dur="1" fill="hold">
+                                          <p:stCondLst>
+                                            <p:cond delay="0"/>
+                                          </p:stCondLst>
+                                        </p:cTn>
+                                        <p:tgtEl>
+                                          <p:spTgt spid="8"/>
+                                        </p:tgtEl>
+                                        <p:attrNameLst>
+                                          <p:attrName>style.visibility</p:attrName>
+                                        </p:attrNameLst>
+                                      </p:cBhvr>
+                                      <p:to>
+                                        <p:strVal val="visible"/>
+                                      </p:to>
+                                    </p:set>
+                                    <p:animEffect transition="in" filter="fade">
+                                      <p:cBhvr>
+                                        <p:cTn id="13" dur="500"/>
+                                        <p:tgtEl>
+                                          <p:spTgt spid="8"/>
+                                        </p:tgtEl>
+                                      </p:cBhvr>
+                                    </p:animEffect>
+                                  </p:childTnLst>
+                                </p:cTn>
+                              </p:par>
+                              <p:par>
+                                <p:cTn id="14" presetID="10" presetClass="entr" presetSubtype="0" fill="hold" grpId="0" nodeType="withEffect">
+                                  <p:stCondLst>
+                                    <p:cond delay="200"/>
+                                  </p:stCondLst>
+                                  <p:childTnLst>
+                                    <p:set>
+                                      <p:cBhvr>
+                                        <p:cTn id="15" dur="1" fill="hold">
+                                          <p:stCondLst>
+                                            <p:cond delay="0"/>
+                                          </p:stCondLst>
+                                        </p:cTn>
+                                        <p:tgtEl>
+                                          <p:spTgt spid="7"/>
+                                        </p:tgtEl>
+                                        <p:attrNameLst>
+                                          <p:attrName>style.visibility</p:attrName>
+                                        </p:attrNameLst>
+                                      </p:cBhvr>
+                                      <p:to>
+                                        <p:strVal val="visible"/>
+                                      </p:to>
+                                    </p:set>
+                                    <p:animEffect transition="in" filter="fade">
+                                      <p:cBhvr>
+                                        <p:cTn id="16" dur="500"/>
+                                        <p:tgtEl>
+                                          <p:spTgt spid="7"/>
+                                        </p:tgtEl>
+                                      </p:cBhvr>
+                                    </p:animEffect>
+                                  </p:childTnLst>
+                                </p:cTn>
+                              </p:par>
+                            </p:childTnLst>
+                          </p:cTn>
+                        </p:par>
+                      </p:childTnLst>
+                    </p:cTn>
+                  </p:par>
+                </p:childTnLst>
+              </p:cTn>
+              <p:prevCondLst>
+                <p:cond evt="onPrev" delay="0">
+                  <p:tgtEl>
+                    <p:sldTgt/>
+                  </p:tgtEl>
+                </p:cond>
+              </p:prevCondLst>
+              <p:nextCondLst>
+                <p:cond evt="onNext" delay="0">
+                  <p:tgtEl>
+                    <p:sldTgt/>
+                  </p:tgtEl>
+                </p:cond>
+              </p:nextCondLst>
+            </p:seq>
+          </p:childTnLst>
+        </p:cTn>
+      </p:par>
+    </p:tnLst>
+    <p:bldLst>
+      <p:bldP spid="5" grpId="0" animBg="1"/>
+      <p:bldP spid="6" grpId="0" animBg="1"/>
+      <p:bldP spid="7" grpId="0" animBg="1"/>
+      <p:bldP spid="8" grpId="0" animBg="1"/>
+    </p:bldLst>
+  </p:timing>
 </p:sld>
 </file>
 
@@ -21346,6 +22619,95 @@
       </p:transition>
     </mc:Fallback>
   </mc:AlternateContent>
+  <p:timing>
+    <p:tnLst>
+      <p:par>
+        <p:cTn id="1" dur="indefinite" restart="never" nodeType="tmRoot">
+          <p:childTnLst>
+            <p:seq concurrent="1" nextAc="seek">
+              <p:cTn id="2" dur="indefinite" nodeType="mainSeq">
+                <p:childTnLst>
+                  <p:par>
+                    <p:cTn id="3" fill="hold">
+                      <p:stCondLst>
+                        <p:cond delay="indefinite"/>
+                        <p:cond evt="onBegin" delay="0">
+                          <p:tn val="2"/>
+                        </p:cond>
+                      </p:stCondLst>
+                      <p:childTnLst>
+                        <p:par>
+                          <p:cTn id="4" fill="hold">
+                            <p:stCondLst>
+                              <p:cond delay="0"/>
+                            </p:stCondLst>
+                            <p:childTnLst>
+                              <p:par>
+                                <p:cTn id="5" presetID="10" presetClass="entr" presetSubtype="0" fill="hold" grpId="0" nodeType="withEffect">
+                                  <p:stCondLst>
+                                    <p:cond delay="0"/>
+                                  </p:stCondLst>
+                                  <p:childTnLst>
+                                    <p:set>
+                                      <p:cBhvr>
+                                        <p:cTn id="6" dur="1" fill="hold">
+                                          <p:stCondLst>
+                                            <p:cond delay="0"/>
+                                          </p:stCondLst>
+                                        </p:cTn>
+                                        <p:tgtEl>
+                                          <p:spTgt spid="531"/>
+                                        </p:tgtEl>
+                                        <p:attrNameLst>
+                                          <p:attrName>style.visibility</p:attrName>
+                                        </p:attrNameLst>
+                                      </p:cBhvr>
+                                      <p:to>
+                                        <p:strVal val="visible"/>
+                                      </p:to>
+                                    </p:set>
+                                    <p:animEffect transition="in" filter="fade">
+                                      <p:cBhvr>
+                                        <p:cTn id="7" dur="500"/>
+                                        <p:tgtEl>
+                                          <p:spTgt spid="531"/>
+                                        </p:tgtEl>
+                                      </p:cBhvr>
+                                    </p:animEffect>
+                                  </p:childTnLst>
+                                </p:cTn>
+                              </p:par>
+                            </p:childTnLst>
+                          </p:cTn>
+                        </p:par>
+                      </p:childTnLst>
+                    </p:cTn>
+                  </p:par>
+                </p:childTnLst>
+              </p:cTn>
+              <p:prevCondLst>
+                <p:cond evt="onPrev" delay="0">
+                  <p:tgtEl>
+                    <p:sldTgt/>
+                  </p:tgtEl>
+                </p:cond>
+              </p:prevCondLst>
+              <p:nextCondLst>
+                <p:cond evt="onNext" delay="0">
+                  <p:tgtEl>
+                    <p:sldTgt/>
+                  </p:tgtEl>
+                </p:cond>
+              </p:nextCondLst>
+            </p:seq>
+          </p:childTnLst>
+        </p:cTn>
+      </p:par>
+    </p:tnLst>
+    <p:bldLst>
+      <p:bldP spid="531" grpId="0" animBg="1"/>
+    </p:bldLst>
+  </p:timing>
 </p:sld>
 </file>
 
@@ -21376,31 +22738,6 @@
       </p:grpSpPr>
       <p:sp>
         <p:nvSpPr>
-          <p:cNvPr id="2" name="Shape 0"/>
-          <p:cNvSpPr/>
-          <p:nvPr/>
-        </p:nvSpPr>
-        <p:spPr>
-          <a:xfrm>
-            <a:off x="4381500" y="476250"/>
-            <a:ext cx="4405313" cy="347663"/>
-          </a:xfrm>
-          <a:prstGeom prst="rect">
-            <a:avLst/>
-          </a:prstGeom>
-          <a:noFill/>
-          <a:ln/>
-        </p:spPr>
-        <p:txBody>
-          <a:bodyPr anchor="ctr"/>
-          <a:lstStyle/>
-          <a:p>
-            <a:endParaRPr lang="en-IT"/>
-          </a:p>
-        </p:txBody>
-      </p:sp>
-      <p:sp>
-        <p:nvSpPr>
           <p:cNvPr id="3" name="Text 1"/>
           <p:cNvSpPr/>
           <p:nvPr/>
@@ -21445,31 +22782,6 @@
       </p:sp>
       <p:sp>
         <p:nvSpPr>
-          <p:cNvPr id="4" name="Shape 2"/>
-          <p:cNvSpPr/>
-          <p:nvPr/>
-        </p:nvSpPr>
-        <p:spPr>
-          <a:xfrm>
-            <a:off x="4381500" y="862013"/>
-            <a:ext cx="4405313" cy="347663"/>
-          </a:xfrm>
-          <a:prstGeom prst="rect">
-            <a:avLst/>
-          </a:prstGeom>
-          <a:noFill/>
-          <a:ln/>
-        </p:spPr>
-        <p:txBody>
-          <a:bodyPr anchor="ctr"/>
-          <a:lstStyle/>
-          <a:p>
-            <a:endParaRPr lang="en-IT"/>
-          </a:p>
-        </p:txBody>
-      </p:sp>
-      <p:sp>
-        <p:nvSpPr>
           <p:cNvPr id="5" name="Text 3"/>
           <p:cNvSpPr/>
           <p:nvPr/>
@@ -21514,31 +22826,6 @@
       </p:sp>
       <p:sp>
         <p:nvSpPr>
-          <p:cNvPr id="6" name="Shape 4"/>
-          <p:cNvSpPr/>
-          <p:nvPr/>
-        </p:nvSpPr>
-        <p:spPr>
-          <a:xfrm>
-            <a:off x="4381500" y="1247775"/>
-            <a:ext cx="4405313" cy="347663"/>
-          </a:xfrm>
-          <a:prstGeom prst="rect">
-            <a:avLst/>
-          </a:prstGeom>
-          <a:noFill/>
-          <a:ln/>
-        </p:spPr>
-        <p:txBody>
-          <a:bodyPr anchor="ctr"/>
-          <a:lstStyle/>
-          <a:p>
-            <a:endParaRPr lang="en-IT"/>
-          </a:p>
-        </p:txBody>
-      </p:sp>
-      <p:sp>
-        <p:nvSpPr>
           <p:cNvPr id="7" name="Text 5"/>
           <p:cNvSpPr/>
           <p:nvPr/>
@@ -21583,31 +22870,6 @@
       </p:sp>
       <p:sp>
         <p:nvSpPr>
-          <p:cNvPr id="8" name="Shape 6"/>
-          <p:cNvSpPr/>
-          <p:nvPr/>
-        </p:nvSpPr>
-        <p:spPr>
-          <a:xfrm>
-            <a:off x="4381500" y="1633538"/>
-            <a:ext cx="4405313" cy="347663"/>
-          </a:xfrm>
-          <a:prstGeom prst="rect">
-            <a:avLst/>
-          </a:prstGeom>
-          <a:noFill/>
-          <a:ln/>
-        </p:spPr>
-        <p:txBody>
-          <a:bodyPr anchor="ctr"/>
-          <a:lstStyle/>
-          <a:p>
-            <a:endParaRPr lang="en-IT"/>
-          </a:p>
-        </p:txBody>
-      </p:sp>
-      <p:sp>
-        <p:nvSpPr>
           <p:cNvPr id="9" name="Text 7"/>
           <p:cNvSpPr/>
           <p:nvPr/>
@@ -21652,31 +22914,6 @@
       </p:sp>
       <p:sp>
         <p:nvSpPr>
-          <p:cNvPr id="10" name="Shape 8"/>
-          <p:cNvSpPr/>
-          <p:nvPr/>
-        </p:nvSpPr>
-        <p:spPr>
-          <a:xfrm>
-            <a:off x="4381500" y="2019300"/>
-            <a:ext cx="4405313" cy="347663"/>
-          </a:xfrm>
-          <a:prstGeom prst="rect">
-            <a:avLst/>
-          </a:prstGeom>
-          <a:noFill/>
-          <a:ln/>
-        </p:spPr>
-        <p:txBody>
-          <a:bodyPr anchor="ctr"/>
-          <a:lstStyle/>
-          <a:p>
-            <a:endParaRPr lang="en-IT"/>
-          </a:p>
-        </p:txBody>
-      </p:sp>
-      <p:sp>
-        <p:nvSpPr>
           <p:cNvPr id="11" name="Text 9"/>
           <p:cNvSpPr/>
           <p:nvPr/>
@@ -21716,31 +22953,6 @@
               <a:t>05 | What we can achieve together</a:t>
             </a:r>
             <a:endParaRPr lang="en-US" sz="1710" dirty="0"/>
-          </a:p>
-        </p:txBody>
-      </p:sp>
-      <p:sp>
-        <p:nvSpPr>
-          <p:cNvPr id="12" name="Shape 10"/>
-          <p:cNvSpPr/>
-          <p:nvPr/>
-        </p:nvSpPr>
-        <p:spPr>
-          <a:xfrm>
-            <a:off x="4381500" y="2405063"/>
-            <a:ext cx="4405313" cy="347663"/>
-          </a:xfrm>
-          <a:prstGeom prst="rect">
-            <a:avLst/>
-          </a:prstGeom>
-          <a:noFill/>
-          <a:ln/>
-        </p:spPr>
-        <p:txBody>
-          <a:bodyPr anchor="ctr"/>
-          <a:lstStyle/>
-          <a:p>
-            <a:endParaRPr lang="en-IT"/>
           </a:p>
         </p:txBody>
       </p:sp>
@@ -21816,7 +23028,7 @@
               <a:buNone/>
             </a:pPr>
             <a:r>
-              <a:rPr lang="en-US" sz="1069" b="1" kern="0" spc="-11" dirty="0">
+              <a:rPr lang="en-US" sz="1069" kern="0" spc="-11" dirty="0">
                 <a:solidFill>
                   <a:srgbClr val="FFFFFF">
                     <a:alpha val="99000"/>
@@ -22066,6 +23278,383 @@
       </p:transition>
     </mc:Fallback>
   </mc:AlternateContent>
+  <p:timing>
+    <p:tnLst>
+      <p:par>
+        <p:cTn id="1" dur="indefinite" restart="never" nodeType="tmRoot">
+          <p:childTnLst>
+            <p:seq concurrent="1" nextAc="seek">
+              <p:cTn id="2" dur="indefinite" nodeType="mainSeq">
+                <p:childTnLst>
+                  <p:par>
+                    <p:cTn id="3" fill="hold">
+                      <p:stCondLst>
+                        <p:cond delay="indefinite"/>
+                        <p:cond evt="onBegin" delay="0">
+                          <p:tn val="2"/>
+                        </p:cond>
+                      </p:stCondLst>
+                      <p:childTnLst>
+                        <p:par>
+                          <p:cTn id="4" fill="hold">
+                            <p:stCondLst>
+                              <p:cond delay="0"/>
+                            </p:stCondLst>
+                            <p:childTnLst>
+                              <p:par>
+                                <p:cTn id="5" presetID="10" presetClass="entr" presetSubtype="0" repeatCount="0" fill="hold" grpId="0" nodeType="withEffect">
+                                  <p:stCondLst>
+                                    <p:cond delay="0"/>
+                                  </p:stCondLst>
+                                  <p:childTnLst>
+                                    <p:set>
+                                      <p:cBhvr>
+                                        <p:cTn id="6" dur="1" fill="hold">
+                                          <p:stCondLst>
+                                            <p:cond delay="0"/>
+                                          </p:stCondLst>
+                                        </p:cTn>
+                                        <p:tgtEl>
+                                          <p:spTgt spid="3"/>
+                                        </p:tgtEl>
+                                        <p:attrNameLst>
+                                          <p:attrName>style.visibility</p:attrName>
+                                        </p:attrNameLst>
+                                      </p:cBhvr>
+                                      <p:to>
+                                        <p:strVal val="visible"/>
+                                      </p:to>
+                                    </p:set>
+                                    <p:animEffect transition="in" filter="fade">
+                                      <p:cBhvr>
+                                        <p:cTn id="7" dur="500"/>
+                                        <p:tgtEl>
+                                          <p:spTgt spid="3"/>
+                                        </p:tgtEl>
+                                      </p:cBhvr>
+                                    </p:animEffect>
+                                  </p:childTnLst>
+                                </p:cTn>
+                              </p:par>
+                              <p:par>
+                                <p:cTn id="8" presetID="10" presetClass="entr" presetSubtype="0" repeatCount="0" fill="hold" grpId="0" nodeType="withEffect">
+                                  <p:stCondLst>
+                                    <p:cond delay="200"/>
+                                  </p:stCondLst>
+                                  <p:childTnLst>
+                                    <p:set>
+                                      <p:cBhvr>
+                                        <p:cTn id="9" dur="1" fill="hold">
+                                          <p:stCondLst>
+                                            <p:cond delay="0"/>
+                                          </p:stCondLst>
+                                        </p:cTn>
+                                        <p:tgtEl>
+                                          <p:spTgt spid="5"/>
+                                        </p:tgtEl>
+                                        <p:attrNameLst>
+                                          <p:attrName>style.visibility</p:attrName>
+                                        </p:attrNameLst>
+                                      </p:cBhvr>
+                                      <p:to>
+                                        <p:strVal val="visible"/>
+                                      </p:to>
+                                    </p:set>
+                                    <p:animEffect transition="in" filter="fade">
+                                      <p:cBhvr>
+                                        <p:cTn id="10" dur="500"/>
+                                        <p:tgtEl>
+                                          <p:spTgt spid="5"/>
+                                        </p:tgtEl>
+                                      </p:cBhvr>
+                                    </p:animEffect>
+                                  </p:childTnLst>
+                                </p:cTn>
+                              </p:par>
+                              <p:par>
+                                <p:cTn id="11" presetID="10" presetClass="entr" presetSubtype="0" repeatCount="0" fill="hold" grpId="0" nodeType="withEffect">
+                                  <p:stCondLst>
+                                    <p:cond delay="400"/>
+                                  </p:stCondLst>
+                                  <p:childTnLst>
+                                    <p:set>
+                                      <p:cBhvr>
+                                        <p:cTn id="12" dur="1" fill="hold">
+                                          <p:stCondLst>
+                                            <p:cond delay="0"/>
+                                          </p:stCondLst>
+                                        </p:cTn>
+                                        <p:tgtEl>
+                                          <p:spTgt spid="7"/>
+                                        </p:tgtEl>
+                                        <p:attrNameLst>
+                                          <p:attrName>style.visibility</p:attrName>
+                                        </p:attrNameLst>
+                                      </p:cBhvr>
+                                      <p:to>
+                                        <p:strVal val="visible"/>
+                                      </p:to>
+                                    </p:set>
+                                    <p:animEffect transition="in" filter="fade">
+                                      <p:cBhvr>
+                                        <p:cTn id="13" dur="500"/>
+                                        <p:tgtEl>
+                                          <p:spTgt spid="7"/>
+                                        </p:tgtEl>
+                                      </p:cBhvr>
+                                    </p:animEffect>
+                                  </p:childTnLst>
+                                </p:cTn>
+                              </p:par>
+                              <p:par>
+                                <p:cTn id="14" presetID="10" presetClass="entr" presetSubtype="0" repeatCount="0" fill="hold" grpId="0" nodeType="withEffect">
+                                  <p:stCondLst>
+                                    <p:cond delay="600"/>
+                                  </p:stCondLst>
+                                  <p:childTnLst>
+                                    <p:set>
+                                      <p:cBhvr>
+                                        <p:cTn id="15" dur="1" fill="hold">
+                                          <p:stCondLst>
+                                            <p:cond delay="0"/>
+                                          </p:stCondLst>
+                                        </p:cTn>
+                                        <p:tgtEl>
+                                          <p:spTgt spid="9"/>
+                                        </p:tgtEl>
+                                        <p:attrNameLst>
+                                          <p:attrName>style.visibility</p:attrName>
+                                        </p:attrNameLst>
+                                      </p:cBhvr>
+                                      <p:to>
+                                        <p:strVal val="visible"/>
+                                      </p:to>
+                                    </p:set>
+                                    <p:animEffect transition="in" filter="fade">
+                                      <p:cBhvr>
+                                        <p:cTn id="16" dur="500"/>
+                                        <p:tgtEl>
+                                          <p:spTgt spid="9"/>
+                                        </p:tgtEl>
+                                      </p:cBhvr>
+                                    </p:animEffect>
+                                  </p:childTnLst>
+                                </p:cTn>
+                              </p:par>
+                              <p:par>
+                                <p:cTn id="17" presetID="10" presetClass="entr" presetSubtype="0" repeatCount="0" fill="hold" grpId="0" nodeType="withEffect">
+                                  <p:stCondLst>
+                                    <p:cond delay="800"/>
+                                  </p:stCondLst>
+                                  <p:childTnLst>
+                                    <p:set>
+                                      <p:cBhvr>
+                                        <p:cTn id="18" dur="1" fill="hold">
+                                          <p:stCondLst>
+                                            <p:cond delay="0"/>
+                                          </p:stCondLst>
+                                        </p:cTn>
+                                        <p:tgtEl>
+                                          <p:spTgt spid="11"/>
+                                        </p:tgtEl>
+                                        <p:attrNameLst>
+                                          <p:attrName>style.visibility</p:attrName>
+                                        </p:attrNameLst>
+                                      </p:cBhvr>
+                                      <p:to>
+                                        <p:strVal val="visible"/>
+                                      </p:to>
+                                    </p:set>
+                                    <p:animEffect transition="in" filter="fade">
+                                      <p:cBhvr>
+                                        <p:cTn id="19" dur="500"/>
+                                        <p:tgtEl>
+                                          <p:spTgt spid="11"/>
+                                        </p:tgtEl>
+                                      </p:cBhvr>
+                                    </p:animEffect>
+                                  </p:childTnLst>
+                                </p:cTn>
+                              </p:par>
+                              <p:par>
+                                <p:cTn id="20" presetID="10" presetClass="entr" presetSubtype="0" repeatCount="0" fill="hold" grpId="0" nodeType="withEffect">
+                                  <p:stCondLst>
+                                    <p:cond delay="1000"/>
+                                  </p:stCondLst>
+                                  <p:childTnLst>
+                                    <p:set>
+                                      <p:cBhvr>
+                                        <p:cTn id="21" dur="1" fill="hold">
+                                          <p:stCondLst>
+                                            <p:cond delay="0"/>
+                                          </p:stCondLst>
+                                        </p:cTn>
+                                        <p:tgtEl>
+                                          <p:spTgt spid="13"/>
+                                        </p:tgtEl>
+                                        <p:attrNameLst>
+                                          <p:attrName>style.visibility</p:attrName>
+                                        </p:attrNameLst>
+                                      </p:cBhvr>
+                                      <p:to>
+                                        <p:strVal val="visible"/>
+                                      </p:to>
+                                    </p:set>
+                                    <p:animEffect transition="in" filter="fade">
+                                      <p:cBhvr>
+                                        <p:cTn id="22" dur="500"/>
+                                        <p:tgtEl>
+                                          <p:spTgt spid="13"/>
+                                        </p:tgtEl>
+                                      </p:cBhvr>
+                                    </p:animEffect>
+                                  </p:childTnLst>
+                                </p:cTn>
+                              </p:par>
+                              <p:par>
+                                <p:cTn id="23" presetID="10" presetClass="entr" presetSubtype="0" repeatCount="0" fill="hold" grpId="0" nodeType="withEffect">
+                                  <p:stCondLst>
+                                    <p:cond delay="1200"/>
+                                  </p:stCondLst>
+                                  <p:childTnLst>
+                                    <p:set>
+                                      <p:cBhvr>
+                                        <p:cTn id="24" dur="1" fill="hold">
+                                          <p:stCondLst>
+                                            <p:cond delay="0"/>
+                                          </p:stCondLst>
+                                        </p:cTn>
+                                        <p:tgtEl>
+                                          <p:spTgt spid="17"/>
+                                        </p:tgtEl>
+                                        <p:attrNameLst>
+                                          <p:attrName>style.visibility</p:attrName>
+                                        </p:attrNameLst>
+                                      </p:cBhvr>
+                                      <p:to>
+                                        <p:strVal val="visible"/>
+                                      </p:to>
+                                    </p:set>
+                                    <p:animEffect transition="in" filter="fade">
+                                      <p:cBhvr>
+                                        <p:cTn id="25" dur="500"/>
+                                        <p:tgtEl>
+                                          <p:spTgt spid="17"/>
+                                        </p:tgtEl>
+                                      </p:cBhvr>
+                                    </p:animEffect>
+                                  </p:childTnLst>
+                                </p:cTn>
+                              </p:par>
+                              <p:par>
+                                <p:cTn id="26" presetID="10" presetClass="entr" presetSubtype="0" repeatCount="0" fill="hold" grpId="0" nodeType="withEffect">
+                                  <p:stCondLst>
+                                    <p:cond delay="1400"/>
+                                  </p:stCondLst>
+                                  <p:childTnLst>
+                                    <p:set>
+                                      <p:cBhvr>
+                                        <p:cTn id="27" dur="1" fill="hold">
+                                          <p:stCondLst>
+                                            <p:cond delay="0"/>
+                                          </p:stCondLst>
+                                        </p:cTn>
+                                        <p:tgtEl>
+                                          <p:spTgt spid="19"/>
+                                        </p:tgtEl>
+                                        <p:attrNameLst>
+                                          <p:attrName>style.visibility</p:attrName>
+                                        </p:attrNameLst>
+                                      </p:cBhvr>
+                                      <p:to>
+                                        <p:strVal val="visible"/>
+                                      </p:to>
+                                    </p:set>
+                                    <p:animEffect transition="in" filter="fade">
+                                      <p:cBhvr>
+                                        <p:cTn id="28" dur="500"/>
+                                        <p:tgtEl>
+                                          <p:spTgt spid="19"/>
+                                        </p:tgtEl>
+                                      </p:cBhvr>
+                                    </p:animEffect>
+                                  </p:childTnLst>
+                                </p:cTn>
+                              </p:par>
+                              <p:par>
+                                <p:cTn id="29" presetID="10" presetClass="entr" presetSubtype="0" repeatCount="0" fill="hold" grpId="0" nodeType="withEffect">
+                                  <p:stCondLst>
+                                    <p:cond delay="1600"/>
+                                  </p:stCondLst>
+                                  <p:childTnLst>
+                                    <p:set>
+                                      <p:cBhvr>
+                                        <p:cTn id="30" dur="1" fill="hold">
+                                          <p:stCondLst>
+                                            <p:cond delay="0"/>
+                                          </p:stCondLst>
+                                        </p:cTn>
+                                        <p:tgtEl>
+                                          <p:spTgt spid="20"/>
+                                        </p:tgtEl>
+                                        <p:attrNameLst>
+                                          <p:attrName>style.visibility</p:attrName>
+                                        </p:attrNameLst>
+                                      </p:cBhvr>
+                                      <p:to>
+                                        <p:strVal val="visible"/>
+                                      </p:to>
+                                    </p:set>
+                                    <p:animEffect transition="in" filter="fade">
+                                      <p:cBhvr>
+                                        <p:cTn id="31" dur="500"/>
+                                        <p:tgtEl>
+                                          <p:spTgt spid="20"/>
+                                        </p:tgtEl>
+                                      </p:cBhvr>
+                                    </p:animEffect>
+                                  </p:childTnLst>
+                                </p:cTn>
+                              </p:par>
+                            </p:childTnLst>
+                          </p:cTn>
+                        </p:par>
+                      </p:childTnLst>
+                    </p:cTn>
+                  </p:par>
+                </p:childTnLst>
+              </p:cTn>
+              <p:prevCondLst>
+                <p:cond evt="onPrev" delay="0">
+                  <p:tgtEl>
+                    <p:sldTgt/>
+                  </p:tgtEl>
+                </p:cond>
+              </p:prevCondLst>
+              <p:nextCondLst>
+                <p:cond evt="onNext" delay="0">
+                  <p:tgtEl>
+                    <p:sldTgt/>
+                  </p:tgtEl>
+                </p:cond>
+              </p:nextCondLst>
+            </p:seq>
+          </p:childTnLst>
+        </p:cTn>
+      </p:par>
+    </p:tnLst>
+    <p:bldLst>
+      <p:bldP spid="3" grpId="0" animBg="1"/>
+      <p:bldP spid="5" grpId="0" animBg="1"/>
+      <p:bldP spid="7" grpId="0" animBg="1"/>
+      <p:bldP spid="9" grpId="0" animBg="1"/>
+      <p:bldP spid="11" grpId="0" animBg="1"/>
+      <p:bldP spid="13" grpId="0" animBg="1"/>
+      <p:bldP spid="17" grpId="0" animBg="1"/>
+      <p:bldP spid="19" grpId="0" animBg="1"/>
+      <p:bldP spid="20" grpId="0" animBg="1"/>
+    </p:bldLst>
+  </p:timing>
 </p:sld>
 </file>
 
@@ -22818,6 +24407,95 @@
       </p:transition>
     </mc:Fallback>
   </mc:AlternateContent>
+  <p:timing>
+    <p:tnLst>
+      <p:par>
+        <p:cTn id="1" dur="indefinite" restart="never" nodeType="tmRoot">
+          <p:childTnLst>
+            <p:seq concurrent="1" nextAc="seek">
+              <p:cTn id="2" dur="indefinite" nodeType="mainSeq">
+                <p:childTnLst>
+                  <p:par>
+                    <p:cTn id="3" fill="hold">
+                      <p:stCondLst>
+                        <p:cond delay="indefinite"/>
+                        <p:cond evt="onBegin" delay="0">
+                          <p:tn val="2"/>
+                        </p:cond>
+                      </p:stCondLst>
+                      <p:childTnLst>
+                        <p:par>
+                          <p:cTn id="4" fill="hold">
+                            <p:stCondLst>
+                              <p:cond delay="0"/>
+                            </p:stCondLst>
+                            <p:childTnLst>
+                              <p:par>
+                                <p:cTn id="5" presetID="10" presetClass="entr" presetSubtype="0" fill="hold" grpId="0" nodeType="withEffect">
+                                  <p:stCondLst>
+                                    <p:cond delay="0"/>
+                                  </p:stCondLst>
+                                  <p:childTnLst>
+                                    <p:set>
+                                      <p:cBhvr>
+                                        <p:cTn id="6" dur="1" fill="hold">
+                                          <p:stCondLst>
+                                            <p:cond delay="0"/>
+                                          </p:stCondLst>
+                                        </p:cTn>
+                                        <p:tgtEl>
+                                          <p:spTgt spid="8"/>
+                                        </p:tgtEl>
+                                        <p:attrNameLst>
+                                          <p:attrName>style.visibility</p:attrName>
+                                        </p:attrNameLst>
+                                      </p:cBhvr>
+                                      <p:to>
+                                        <p:strVal val="visible"/>
+                                      </p:to>
+                                    </p:set>
+                                    <p:animEffect transition="in" filter="fade">
+                                      <p:cBhvr>
+                                        <p:cTn id="7" dur="500"/>
+                                        <p:tgtEl>
+                                          <p:spTgt spid="8"/>
+                                        </p:tgtEl>
+                                      </p:cBhvr>
+                                    </p:animEffect>
+                                  </p:childTnLst>
+                                </p:cTn>
+                              </p:par>
+                            </p:childTnLst>
+                          </p:cTn>
+                        </p:par>
+                      </p:childTnLst>
+                    </p:cTn>
+                  </p:par>
+                </p:childTnLst>
+              </p:cTn>
+              <p:prevCondLst>
+                <p:cond evt="onPrev" delay="0">
+                  <p:tgtEl>
+                    <p:sldTgt/>
+                  </p:tgtEl>
+                </p:cond>
+              </p:prevCondLst>
+              <p:nextCondLst>
+                <p:cond evt="onNext" delay="0">
+                  <p:tgtEl>
+                    <p:sldTgt/>
+                  </p:tgtEl>
+                </p:cond>
+              </p:nextCondLst>
+            </p:seq>
+          </p:childTnLst>
+        </p:cTn>
+      </p:par>
+    </p:tnLst>
+    <p:bldLst>
+      <p:bldP spid="8" grpId="0" animBg="1"/>
+    </p:bldLst>
+  </p:timing>
 </p:sld>
 </file>
 
@@ -23415,6 +25093,419 @@
       </p:transition>
     </mc:Fallback>
   </mc:AlternateContent>
+  <p:timing>
+    <p:tnLst>
+      <p:par>
+        <p:cTn id="1" dur="indefinite" restart="never" nodeType="tmRoot">
+          <p:childTnLst>
+            <p:seq concurrent="1" nextAc="seek">
+              <p:cTn id="2" dur="indefinite" nodeType="mainSeq">
+                <p:childTnLst>
+                  <p:par>
+                    <p:cTn id="3" fill="hold">
+                      <p:stCondLst>
+                        <p:cond delay="indefinite"/>
+                        <p:cond evt="onBegin" delay="0">
+                          <p:tn val="2"/>
+                        </p:cond>
+                      </p:stCondLst>
+                      <p:childTnLst>
+                        <p:par>
+                          <p:cTn id="4" fill="hold">
+                            <p:stCondLst>
+                              <p:cond delay="0"/>
+                            </p:stCondLst>
+                            <p:childTnLst>
+                              <p:par>
+                                <p:cTn id="5" presetID="10" presetClass="entr" presetSubtype="0" fill="hold" grpId="0" nodeType="withEffect">
+                                  <p:stCondLst>
+                                    <p:cond delay="0"/>
+                                  </p:stCondLst>
+                                  <p:childTnLst>
+                                    <p:set>
+                                      <p:cBhvr>
+                                        <p:cTn id="6" dur="1" fill="hold">
+                                          <p:stCondLst>
+                                            <p:cond delay="0"/>
+                                          </p:stCondLst>
+                                        </p:cTn>
+                                        <p:tgtEl>
+                                          <p:spTgt spid="6"/>
+                                        </p:tgtEl>
+                                        <p:attrNameLst>
+                                          <p:attrName>style.visibility</p:attrName>
+                                        </p:attrNameLst>
+                                      </p:cBhvr>
+                                      <p:to>
+                                        <p:strVal val="visible"/>
+                                      </p:to>
+                                    </p:set>
+                                    <p:animEffect transition="in" filter="fade">
+                                      <p:cBhvr>
+                                        <p:cTn id="7" dur="500"/>
+                                        <p:tgtEl>
+                                          <p:spTgt spid="6"/>
+                                        </p:tgtEl>
+                                      </p:cBhvr>
+                                    </p:animEffect>
+                                  </p:childTnLst>
+                                </p:cTn>
+                              </p:par>
+                              <p:par>
+                                <p:cTn id="8" presetID="10" presetClass="entr" presetSubtype="0" fill="hold" grpId="0" nodeType="withEffect">
+                                  <p:stCondLst>
+                                    <p:cond delay="0"/>
+                                  </p:stCondLst>
+                                  <p:childTnLst>
+                                    <p:set>
+                                      <p:cBhvr>
+                                        <p:cTn id="9" dur="1" fill="hold">
+                                          <p:stCondLst>
+                                            <p:cond delay="0"/>
+                                          </p:stCondLst>
+                                        </p:cTn>
+                                        <p:tgtEl>
+                                          <p:spTgt spid="5"/>
+                                        </p:tgtEl>
+                                        <p:attrNameLst>
+                                          <p:attrName>style.visibility</p:attrName>
+                                        </p:attrNameLst>
+                                      </p:cBhvr>
+                                      <p:to>
+                                        <p:strVal val="visible"/>
+                                      </p:to>
+                                    </p:set>
+                                    <p:animEffect transition="in" filter="fade">
+                                      <p:cBhvr>
+                                        <p:cTn id="10" dur="500"/>
+                                        <p:tgtEl>
+                                          <p:spTgt spid="5"/>
+                                        </p:tgtEl>
+                                      </p:cBhvr>
+                                    </p:animEffect>
+                                  </p:childTnLst>
+                                </p:cTn>
+                              </p:par>
+                              <p:par>
+                                <p:cTn id="11" presetID="10" presetClass="entr" presetSubtype="0" fill="hold" grpId="0" nodeType="withEffect">
+                                  <p:stCondLst>
+                                    <p:cond delay="200"/>
+                                  </p:stCondLst>
+                                  <p:childTnLst>
+                                    <p:set>
+                                      <p:cBhvr>
+                                        <p:cTn id="12" dur="1" fill="hold">
+                                          <p:stCondLst>
+                                            <p:cond delay="0"/>
+                                          </p:stCondLst>
+                                        </p:cTn>
+                                        <p:tgtEl>
+                                          <p:spTgt spid="7"/>
+                                        </p:tgtEl>
+                                        <p:attrNameLst>
+                                          <p:attrName>style.visibility</p:attrName>
+                                        </p:attrNameLst>
+                                      </p:cBhvr>
+                                      <p:to>
+                                        <p:strVal val="visible"/>
+                                      </p:to>
+                                    </p:set>
+                                    <p:animEffect transition="in" filter="fade">
+                                      <p:cBhvr>
+                                        <p:cTn id="13" dur="500"/>
+                                        <p:tgtEl>
+                                          <p:spTgt spid="7"/>
+                                        </p:tgtEl>
+                                      </p:cBhvr>
+                                    </p:animEffect>
+                                  </p:childTnLst>
+                                </p:cTn>
+                              </p:par>
+                              <p:par>
+                                <p:cTn id="14" presetID="10" presetClass="entr" presetSubtype="0" fill="hold" grpId="0" nodeType="withEffect">
+                                  <p:stCondLst>
+                                    <p:cond delay="200"/>
+                                  </p:stCondLst>
+                                  <p:childTnLst>
+                                    <p:set>
+                                      <p:cBhvr>
+                                        <p:cTn id="15" dur="1" fill="hold">
+                                          <p:stCondLst>
+                                            <p:cond delay="0"/>
+                                          </p:stCondLst>
+                                        </p:cTn>
+                                        <p:tgtEl>
+                                          <p:spTgt spid="8"/>
+                                        </p:tgtEl>
+                                        <p:attrNameLst>
+                                          <p:attrName>style.visibility</p:attrName>
+                                        </p:attrNameLst>
+                                      </p:cBhvr>
+                                      <p:to>
+                                        <p:strVal val="visible"/>
+                                      </p:to>
+                                    </p:set>
+                                    <p:animEffect transition="in" filter="fade">
+                                      <p:cBhvr>
+                                        <p:cTn id="16" dur="500"/>
+                                        <p:tgtEl>
+                                          <p:spTgt spid="8"/>
+                                        </p:tgtEl>
+                                      </p:cBhvr>
+                                    </p:animEffect>
+                                  </p:childTnLst>
+                                </p:cTn>
+                              </p:par>
+                              <p:par>
+                                <p:cTn id="17" presetID="10" presetClass="entr" presetSubtype="0" fill="hold" grpId="0" nodeType="withEffect">
+                                  <p:stCondLst>
+                                    <p:cond delay="400"/>
+                                  </p:stCondLst>
+                                  <p:childTnLst>
+                                    <p:set>
+                                      <p:cBhvr>
+                                        <p:cTn id="18" dur="1" fill="hold">
+                                          <p:stCondLst>
+                                            <p:cond delay="0"/>
+                                          </p:stCondLst>
+                                        </p:cTn>
+                                        <p:tgtEl>
+                                          <p:spTgt spid="10"/>
+                                        </p:tgtEl>
+                                        <p:attrNameLst>
+                                          <p:attrName>style.visibility</p:attrName>
+                                        </p:attrNameLst>
+                                      </p:cBhvr>
+                                      <p:to>
+                                        <p:strVal val="visible"/>
+                                      </p:to>
+                                    </p:set>
+                                    <p:animEffect transition="in" filter="fade">
+                                      <p:cBhvr>
+                                        <p:cTn id="19" dur="500"/>
+                                        <p:tgtEl>
+                                          <p:spTgt spid="10"/>
+                                        </p:tgtEl>
+                                      </p:cBhvr>
+                                    </p:animEffect>
+                                  </p:childTnLst>
+                                </p:cTn>
+                              </p:par>
+                              <p:par>
+                                <p:cTn id="20" presetID="10" presetClass="entr" presetSubtype="0" fill="hold" grpId="0" nodeType="withEffect">
+                                  <p:stCondLst>
+                                    <p:cond delay="400"/>
+                                  </p:stCondLst>
+                                  <p:childTnLst>
+                                    <p:set>
+                                      <p:cBhvr>
+                                        <p:cTn id="21" dur="1" fill="hold">
+                                          <p:stCondLst>
+                                            <p:cond delay="0"/>
+                                          </p:stCondLst>
+                                        </p:cTn>
+                                        <p:tgtEl>
+                                          <p:spTgt spid="9"/>
+                                        </p:tgtEl>
+                                        <p:attrNameLst>
+                                          <p:attrName>style.visibility</p:attrName>
+                                        </p:attrNameLst>
+                                      </p:cBhvr>
+                                      <p:to>
+                                        <p:strVal val="visible"/>
+                                      </p:to>
+                                    </p:set>
+                                    <p:animEffect transition="in" filter="fade">
+                                      <p:cBhvr>
+                                        <p:cTn id="22" dur="500"/>
+                                        <p:tgtEl>
+                                          <p:spTgt spid="9"/>
+                                        </p:tgtEl>
+                                      </p:cBhvr>
+                                    </p:animEffect>
+                                  </p:childTnLst>
+                                </p:cTn>
+                              </p:par>
+                              <p:par>
+                                <p:cTn id="23" presetID="10" presetClass="entr" presetSubtype="0" fill="hold" grpId="0" nodeType="withEffect">
+                                  <p:stCondLst>
+                                    <p:cond delay="600"/>
+                                  </p:stCondLst>
+                                  <p:childTnLst>
+                                    <p:set>
+                                      <p:cBhvr>
+                                        <p:cTn id="24" dur="1" fill="hold">
+                                          <p:stCondLst>
+                                            <p:cond delay="0"/>
+                                          </p:stCondLst>
+                                        </p:cTn>
+                                        <p:tgtEl>
+                                          <p:spTgt spid="12"/>
+                                        </p:tgtEl>
+                                        <p:attrNameLst>
+                                          <p:attrName>style.visibility</p:attrName>
+                                        </p:attrNameLst>
+                                      </p:cBhvr>
+                                      <p:to>
+                                        <p:strVal val="visible"/>
+                                      </p:to>
+                                    </p:set>
+                                    <p:animEffect transition="in" filter="fade">
+                                      <p:cBhvr>
+                                        <p:cTn id="25" dur="500"/>
+                                        <p:tgtEl>
+                                          <p:spTgt spid="12"/>
+                                        </p:tgtEl>
+                                      </p:cBhvr>
+                                    </p:animEffect>
+                                  </p:childTnLst>
+                                </p:cTn>
+                              </p:par>
+                              <p:par>
+                                <p:cTn id="26" presetID="10" presetClass="entr" presetSubtype="0" fill="hold" grpId="0" nodeType="withEffect">
+                                  <p:stCondLst>
+                                    <p:cond delay="600"/>
+                                  </p:stCondLst>
+                                  <p:childTnLst>
+                                    <p:set>
+                                      <p:cBhvr>
+                                        <p:cTn id="27" dur="1" fill="hold">
+                                          <p:stCondLst>
+                                            <p:cond delay="0"/>
+                                          </p:stCondLst>
+                                        </p:cTn>
+                                        <p:tgtEl>
+                                          <p:spTgt spid="11"/>
+                                        </p:tgtEl>
+                                        <p:attrNameLst>
+                                          <p:attrName>style.visibility</p:attrName>
+                                        </p:attrNameLst>
+                                      </p:cBhvr>
+                                      <p:to>
+                                        <p:strVal val="visible"/>
+                                      </p:to>
+                                    </p:set>
+                                    <p:animEffect transition="in" filter="fade">
+                                      <p:cBhvr>
+                                        <p:cTn id="28" dur="500"/>
+                                        <p:tgtEl>
+                                          <p:spTgt spid="11"/>
+                                        </p:tgtEl>
+                                      </p:cBhvr>
+                                    </p:animEffect>
+                                  </p:childTnLst>
+                                </p:cTn>
+                              </p:par>
+                              <p:par>
+                                <p:cTn id="29" presetID="10" presetClass="entr" presetSubtype="0" fill="hold" grpId="0" nodeType="withEffect">
+                                  <p:stCondLst>
+                                    <p:cond delay="800"/>
+                                  </p:stCondLst>
+                                  <p:childTnLst>
+                                    <p:set>
+                                      <p:cBhvr>
+                                        <p:cTn id="30" dur="1" fill="hold">
+                                          <p:stCondLst>
+                                            <p:cond delay="0"/>
+                                          </p:stCondLst>
+                                        </p:cTn>
+                                        <p:tgtEl>
+                                          <p:spTgt spid="13"/>
+                                        </p:tgtEl>
+                                        <p:attrNameLst>
+                                          <p:attrName>style.visibility</p:attrName>
+                                        </p:attrNameLst>
+                                      </p:cBhvr>
+                                      <p:to>
+                                        <p:strVal val="visible"/>
+                                      </p:to>
+                                    </p:set>
+                                    <p:animEffect transition="in" filter="fade">
+                                      <p:cBhvr>
+                                        <p:cTn id="31" dur="500"/>
+                                        <p:tgtEl>
+                                          <p:spTgt spid="13"/>
+                                        </p:tgtEl>
+                                      </p:cBhvr>
+                                    </p:animEffect>
+                                  </p:childTnLst>
+                                </p:cTn>
+                              </p:par>
+                              <p:par>
+                                <p:cTn id="32" presetID="10" presetClass="entr" presetSubtype="0" fill="hold" grpId="0" nodeType="withEffect">
+                                  <p:stCondLst>
+                                    <p:cond delay="800"/>
+                                  </p:stCondLst>
+                                  <p:childTnLst>
+                                    <p:set>
+                                      <p:cBhvr>
+                                        <p:cTn id="33" dur="1" fill="hold">
+                                          <p:stCondLst>
+                                            <p:cond delay="0"/>
+                                          </p:stCondLst>
+                                        </p:cTn>
+                                        <p:tgtEl>
+                                          <p:spTgt spid="14"/>
+                                        </p:tgtEl>
+                                        <p:attrNameLst>
+                                          <p:attrName>style.visibility</p:attrName>
+                                        </p:attrNameLst>
+                                      </p:cBhvr>
+                                      <p:to>
+                                        <p:strVal val="visible"/>
+                                      </p:to>
+                                    </p:set>
+                                    <p:animEffect transition="in" filter="fade">
+                                      <p:cBhvr>
+                                        <p:cTn id="34" dur="500"/>
+                                        <p:tgtEl>
+                                          <p:spTgt spid="14"/>
+                                        </p:tgtEl>
+                                      </p:cBhvr>
+                                    </p:animEffect>
+                                  </p:childTnLst>
+                                </p:cTn>
+                              </p:par>
+                            </p:childTnLst>
+                          </p:cTn>
+                        </p:par>
+                      </p:childTnLst>
+                    </p:cTn>
+                  </p:par>
+                </p:childTnLst>
+              </p:cTn>
+              <p:prevCondLst>
+                <p:cond evt="onPrev" delay="0">
+                  <p:tgtEl>
+                    <p:sldTgt/>
+                  </p:tgtEl>
+                </p:cond>
+              </p:prevCondLst>
+              <p:nextCondLst>
+                <p:cond evt="onNext" delay="0">
+                  <p:tgtEl>
+                    <p:sldTgt/>
+                  </p:tgtEl>
+                </p:cond>
+              </p:nextCondLst>
+            </p:seq>
+          </p:childTnLst>
+        </p:cTn>
+      </p:par>
+    </p:tnLst>
+    <p:bldLst>
+      <p:bldP spid="5" grpId="0" animBg="1"/>
+      <p:bldP spid="6" grpId="0" animBg="1"/>
+      <p:bldP spid="7" grpId="0" animBg="1"/>
+      <p:bldP spid="8" grpId="0" animBg="1"/>
+      <p:bldP spid="9" grpId="0" animBg="1"/>
+      <p:bldP spid="10" grpId="0" animBg="1"/>
+      <p:bldP spid="11" grpId="0" animBg="1"/>
+      <p:bldP spid="12" grpId="0" animBg="1"/>
+      <p:bldP spid="13" grpId="0" animBg="1"/>
+      <p:bldP spid="14" grpId="0" animBg="1"/>
+    </p:bldLst>
+  </p:timing>
 </p:sld>
 </file>
 
@@ -24093,6 +26184,419 @@
       </p:transition>
     </mc:Fallback>
   </mc:AlternateContent>
+  <p:timing>
+    <p:tnLst>
+      <p:par>
+        <p:cTn id="1" dur="indefinite" restart="never" nodeType="tmRoot">
+          <p:childTnLst>
+            <p:seq concurrent="1" nextAc="seek">
+              <p:cTn id="2" dur="indefinite" nodeType="mainSeq">
+                <p:childTnLst>
+                  <p:par>
+                    <p:cTn id="3" fill="hold">
+                      <p:stCondLst>
+                        <p:cond delay="indefinite"/>
+                        <p:cond evt="onBegin" delay="0">
+                          <p:tn val="2"/>
+                        </p:cond>
+                      </p:stCondLst>
+                      <p:childTnLst>
+                        <p:par>
+                          <p:cTn id="4" fill="hold">
+                            <p:stCondLst>
+                              <p:cond delay="0"/>
+                            </p:stCondLst>
+                            <p:childTnLst>
+                              <p:par>
+                                <p:cTn id="5" presetID="10" presetClass="entr" presetSubtype="0" fill="hold" grpId="0" nodeType="withEffect">
+                                  <p:stCondLst>
+                                    <p:cond delay="0"/>
+                                  </p:stCondLst>
+                                  <p:childTnLst>
+                                    <p:set>
+                                      <p:cBhvr>
+                                        <p:cTn id="6" dur="1" fill="hold">
+                                          <p:stCondLst>
+                                            <p:cond delay="0"/>
+                                          </p:stCondLst>
+                                        </p:cTn>
+                                        <p:tgtEl>
+                                          <p:spTgt spid="21"/>
+                                        </p:tgtEl>
+                                        <p:attrNameLst>
+                                          <p:attrName>style.visibility</p:attrName>
+                                        </p:attrNameLst>
+                                      </p:cBhvr>
+                                      <p:to>
+                                        <p:strVal val="visible"/>
+                                      </p:to>
+                                    </p:set>
+                                    <p:animEffect transition="in" filter="fade">
+                                      <p:cBhvr>
+                                        <p:cTn id="7" dur="500"/>
+                                        <p:tgtEl>
+                                          <p:spTgt spid="21"/>
+                                        </p:tgtEl>
+                                      </p:cBhvr>
+                                    </p:animEffect>
+                                  </p:childTnLst>
+                                </p:cTn>
+                              </p:par>
+                              <p:par>
+                                <p:cTn id="8" presetID="10" presetClass="entr" presetSubtype="0" fill="hold" grpId="0" nodeType="withEffect">
+                                  <p:stCondLst>
+                                    <p:cond delay="0"/>
+                                  </p:stCondLst>
+                                  <p:childTnLst>
+                                    <p:set>
+                                      <p:cBhvr>
+                                        <p:cTn id="9" dur="1" fill="hold">
+                                          <p:stCondLst>
+                                            <p:cond delay="0"/>
+                                          </p:stCondLst>
+                                        </p:cTn>
+                                        <p:tgtEl>
+                                          <p:spTgt spid="22"/>
+                                        </p:tgtEl>
+                                        <p:attrNameLst>
+                                          <p:attrName>style.visibility</p:attrName>
+                                        </p:attrNameLst>
+                                      </p:cBhvr>
+                                      <p:to>
+                                        <p:strVal val="visible"/>
+                                      </p:to>
+                                    </p:set>
+                                    <p:animEffect transition="in" filter="fade">
+                                      <p:cBhvr>
+                                        <p:cTn id="10" dur="500"/>
+                                        <p:tgtEl>
+                                          <p:spTgt spid="22"/>
+                                        </p:tgtEl>
+                                      </p:cBhvr>
+                                    </p:animEffect>
+                                  </p:childTnLst>
+                                </p:cTn>
+                              </p:par>
+                              <p:par>
+                                <p:cTn id="11" presetID="10" presetClass="entr" presetSubtype="0" fill="hold" grpId="0" nodeType="withEffect">
+                                  <p:stCondLst>
+                                    <p:cond delay="200"/>
+                                  </p:stCondLst>
+                                  <p:childTnLst>
+                                    <p:set>
+                                      <p:cBhvr>
+                                        <p:cTn id="12" dur="1" fill="hold">
+                                          <p:stCondLst>
+                                            <p:cond delay="0"/>
+                                          </p:stCondLst>
+                                        </p:cTn>
+                                        <p:tgtEl>
+                                          <p:spTgt spid="23"/>
+                                        </p:tgtEl>
+                                        <p:attrNameLst>
+                                          <p:attrName>style.visibility</p:attrName>
+                                        </p:attrNameLst>
+                                      </p:cBhvr>
+                                      <p:to>
+                                        <p:strVal val="visible"/>
+                                      </p:to>
+                                    </p:set>
+                                    <p:animEffect transition="in" filter="fade">
+                                      <p:cBhvr>
+                                        <p:cTn id="13" dur="500"/>
+                                        <p:tgtEl>
+                                          <p:spTgt spid="23"/>
+                                        </p:tgtEl>
+                                      </p:cBhvr>
+                                    </p:animEffect>
+                                  </p:childTnLst>
+                                </p:cTn>
+                              </p:par>
+                              <p:par>
+                                <p:cTn id="14" presetID="10" presetClass="entr" presetSubtype="0" fill="hold" grpId="0" nodeType="withEffect">
+                                  <p:stCondLst>
+                                    <p:cond delay="200"/>
+                                  </p:stCondLst>
+                                  <p:childTnLst>
+                                    <p:set>
+                                      <p:cBhvr>
+                                        <p:cTn id="15" dur="1" fill="hold">
+                                          <p:stCondLst>
+                                            <p:cond delay="0"/>
+                                          </p:stCondLst>
+                                        </p:cTn>
+                                        <p:tgtEl>
+                                          <p:spTgt spid="24"/>
+                                        </p:tgtEl>
+                                        <p:attrNameLst>
+                                          <p:attrName>style.visibility</p:attrName>
+                                        </p:attrNameLst>
+                                      </p:cBhvr>
+                                      <p:to>
+                                        <p:strVal val="visible"/>
+                                      </p:to>
+                                    </p:set>
+                                    <p:animEffect transition="in" filter="fade">
+                                      <p:cBhvr>
+                                        <p:cTn id="16" dur="500"/>
+                                        <p:tgtEl>
+                                          <p:spTgt spid="24"/>
+                                        </p:tgtEl>
+                                      </p:cBhvr>
+                                    </p:animEffect>
+                                  </p:childTnLst>
+                                </p:cTn>
+                              </p:par>
+                              <p:par>
+                                <p:cTn id="17" presetID="10" presetClass="entr" presetSubtype="0" fill="hold" grpId="0" nodeType="withEffect">
+                                  <p:stCondLst>
+                                    <p:cond delay="400"/>
+                                  </p:stCondLst>
+                                  <p:childTnLst>
+                                    <p:set>
+                                      <p:cBhvr>
+                                        <p:cTn id="18" dur="1" fill="hold">
+                                          <p:stCondLst>
+                                            <p:cond delay="0"/>
+                                          </p:stCondLst>
+                                        </p:cTn>
+                                        <p:tgtEl>
+                                          <p:spTgt spid="25"/>
+                                        </p:tgtEl>
+                                        <p:attrNameLst>
+                                          <p:attrName>style.visibility</p:attrName>
+                                        </p:attrNameLst>
+                                      </p:cBhvr>
+                                      <p:to>
+                                        <p:strVal val="visible"/>
+                                      </p:to>
+                                    </p:set>
+                                    <p:animEffect transition="in" filter="fade">
+                                      <p:cBhvr>
+                                        <p:cTn id="19" dur="500"/>
+                                        <p:tgtEl>
+                                          <p:spTgt spid="25"/>
+                                        </p:tgtEl>
+                                      </p:cBhvr>
+                                    </p:animEffect>
+                                  </p:childTnLst>
+                                </p:cTn>
+                              </p:par>
+                              <p:par>
+                                <p:cTn id="20" presetID="10" presetClass="entr" presetSubtype="0" fill="hold" grpId="0" nodeType="withEffect">
+                                  <p:stCondLst>
+                                    <p:cond delay="400"/>
+                                  </p:stCondLst>
+                                  <p:childTnLst>
+                                    <p:set>
+                                      <p:cBhvr>
+                                        <p:cTn id="21" dur="1" fill="hold">
+                                          <p:stCondLst>
+                                            <p:cond delay="0"/>
+                                          </p:stCondLst>
+                                        </p:cTn>
+                                        <p:tgtEl>
+                                          <p:spTgt spid="26"/>
+                                        </p:tgtEl>
+                                        <p:attrNameLst>
+                                          <p:attrName>style.visibility</p:attrName>
+                                        </p:attrNameLst>
+                                      </p:cBhvr>
+                                      <p:to>
+                                        <p:strVal val="visible"/>
+                                      </p:to>
+                                    </p:set>
+                                    <p:animEffect transition="in" filter="fade">
+                                      <p:cBhvr>
+                                        <p:cTn id="22" dur="500"/>
+                                        <p:tgtEl>
+                                          <p:spTgt spid="26"/>
+                                        </p:tgtEl>
+                                      </p:cBhvr>
+                                    </p:animEffect>
+                                  </p:childTnLst>
+                                </p:cTn>
+                              </p:par>
+                              <p:par>
+                                <p:cTn id="23" presetID="10" presetClass="entr" presetSubtype="0" fill="hold" grpId="0" nodeType="withEffect">
+                                  <p:stCondLst>
+                                    <p:cond delay="600"/>
+                                  </p:stCondLst>
+                                  <p:childTnLst>
+                                    <p:set>
+                                      <p:cBhvr>
+                                        <p:cTn id="24" dur="1" fill="hold">
+                                          <p:stCondLst>
+                                            <p:cond delay="0"/>
+                                          </p:stCondLst>
+                                        </p:cTn>
+                                        <p:tgtEl>
+                                          <p:spTgt spid="27"/>
+                                        </p:tgtEl>
+                                        <p:attrNameLst>
+                                          <p:attrName>style.visibility</p:attrName>
+                                        </p:attrNameLst>
+                                      </p:cBhvr>
+                                      <p:to>
+                                        <p:strVal val="visible"/>
+                                      </p:to>
+                                    </p:set>
+                                    <p:animEffect transition="in" filter="fade">
+                                      <p:cBhvr>
+                                        <p:cTn id="25" dur="500"/>
+                                        <p:tgtEl>
+                                          <p:spTgt spid="27"/>
+                                        </p:tgtEl>
+                                      </p:cBhvr>
+                                    </p:animEffect>
+                                  </p:childTnLst>
+                                </p:cTn>
+                              </p:par>
+                              <p:par>
+                                <p:cTn id="26" presetID="10" presetClass="entr" presetSubtype="0" fill="hold" grpId="0" nodeType="withEffect">
+                                  <p:stCondLst>
+                                    <p:cond delay="600"/>
+                                  </p:stCondLst>
+                                  <p:childTnLst>
+                                    <p:set>
+                                      <p:cBhvr>
+                                        <p:cTn id="27" dur="1" fill="hold">
+                                          <p:stCondLst>
+                                            <p:cond delay="0"/>
+                                          </p:stCondLst>
+                                        </p:cTn>
+                                        <p:tgtEl>
+                                          <p:spTgt spid="28"/>
+                                        </p:tgtEl>
+                                        <p:attrNameLst>
+                                          <p:attrName>style.visibility</p:attrName>
+                                        </p:attrNameLst>
+                                      </p:cBhvr>
+                                      <p:to>
+                                        <p:strVal val="visible"/>
+                                      </p:to>
+                                    </p:set>
+                                    <p:animEffect transition="in" filter="fade">
+                                      <p:cBhvr>
+                                        <p:cTn id="28" dur="500"/>
+                                        <p:tgtEl>
+                                          <p:spTgt spid="28"/>
+                                        </p:tgtEl>
+                                      </p:cBhvr>
+                                    </p:animEffect>
+                                  </p:childTnLst>
+                                </p:cTn>
+                              </p:par>
+                              <p:par>
+                                <p:cTn id="29" presetID="10" presetClass="entr" presetSubtype="0" fill="hold" grpId="0" nodeType="withEffect">
+                                  <p:stCondLst>
+                                    <p:cond delay="800"/>
+                                  </p:stCondLst>
+                                  <p:childTnLst>
+                                    <p:set>
+                                      <p:cBhvr>
+                                        <p:cTn id="30" dur="1" fill="hold">
+                                          <p:stCondLst>
+                                            <p:cond delay="0"/>
+                                          </p:stCondLst>
+                                        </p:cTn>
+                                        <p:tgtEl>
+                                          <p:spTgt spid="29"/>
+                                        </p:tgtEl>
+                                        <p:attrNameLst>
+                                          <p:attrName>style.visibility</p:attrName>
+                                        </p:attrNameLst>
+                                      </p:cBhvr>
+                                      <p:to>
+                                        <p:strVal val="visible"/>
+                                      </p:to>
+                                    </p:set>
+                                    <p:animEffect transition="in" filter="fade">
+                                      <p:cBhvr>
+                                        <p:cTn id="31" dur="500"/>
+                                        <p:tgtEl>
+                                          <p:spTgt spid="29"/>
+                                        </p:tgtEl>
+                                      </p:cBhvr>
+                                    </p:animEffect>
+                                  </p:childTnLst>
+                                </p:cTn>
+                              </p:par>
+                              <p:par>
+                                <p:cTn id="32" presetID="10" presetClass="entr" presetSubtype="0" fill="hold" grpId="0" nodeType="withEffect">
+                                  <p:stCondLst>
+                                    <p:cond delay="800"/>
+                                  </p:stCondLst>
+                                  <p:childTnLst>
+                                    <p:set>
+                                      <p:cBhvr>
+                                        <p:cTn id="33" dur="1" fill="hold">
+                                          <p:stCondLst>
+                                            <p:cond delay="0"/>
+                                          </p:stCondLst>
+                                        </p:cTn>
+                                        <p:tgtEl>
+                                          <p:spTgt spid="30"/>
+                                        </p:tgtEl>
+                                        <p:attrNameLst>
+                                          <p:attrName>style.visibility</p:attrName>
+                                        </p:attrNameLst>
+                                      </p:cBhvr>
+                                      <p:to>
+                                        <p:strVal val="visible"/>
+                                      </p:to>
+                                    </p:set>
+                                    <p:animEffect transition="in" filter="fade">
+                                      <p:cBhvr>
+                                        <p:cTn id="34" dur="500"/>
+                                        <p:tgtEl>
+                                          <p:spTgt spid="30"/>
+                                        </p:tgtEl>
+                                      </p:cBhvr>
+                                    </p:animEffect>
+                                  </p:childTnLst>
+                                </p:cTn>
+                              </p:par>
+                            </p:childTnLst>
+                          </p:cTn>
+                        </p:par>
+                      </p:childTnLst>
+                    </p:cTn>
+                  </p:par>
+                </p:childTnLst>
+              </p:cTn>
+              <p:prevCondLst>
+                <p:cond evt="onPrev" delay="0">
+                  <p:tgtEl>
+                    <p:sldTgt/>
+                  </p:tgtEl>
+                </p:cond>
+              </p:prevCondLst>
+              <p:nextCondLst>
+                <p:cond evt="onNext" delay="0">
+                  <p:tgtEl>
+                    <p:sldTgt/>
+                  </p:tgtEl>
+                </p:cond>
+              </p:nextCondLst>
+            </p:seq>
+          </p:childTnLst>
+        </p:cTn>
+      </p:par>
+    </p:tnLst>
+    <p:bldLst>
+      <p:bldP spid="21" grpId="0" animBg="1"/>
+      <p:bldP spid="22" grpId="0" animBg="1"/>
+      <p:bldP spid="23" grpId="0" animBg="1"/>
+      <p:bldP spid="24" grpId="0" animBg="1"/>
+      <p:bldP spid="25" grpId="0" animBg="1"/>
+      <p:bldP spid="26" grpId="0" animBg="1"/>
+      <p:bldP spid="27" grpId="0" animBg="1"/>
+      <p:bldP spid="28" grpId="0" animBg="1"/>
+      <p:bldP spid="29" grpId="0" animBg="1"/>
+      <p:bldP spid="30" grpId="0" animBg="1"/>
+    </p:bldLst>
+  </p:timing>
 </p:sld>
 </file>
 
@@ -24249,6 +26753,95 @@
       </p:transition>
     </mc:Fallback>
   </mc:AlternateContent>
+  <p:timing>
+    <p:tnLst>
+      <p:par>
+        <p:cTn id="1" dur="indefinite" restart="never" nodeType="tmRoot">
+          <p:childTnLst>
+            <p:seq concurrent="1" nextAc="seek">
+              <p:cTn id="2" dur="indefinite" nodeType="mainSeq">
+                <p:childTnLst>
+                  <p:par>
+                    <p:cTn id="3" fill="hold">
+                      <p:stCondLst>
+                        <p:cond delay="indefinite"/>
+                        <p:cond evt="onBegin" delay="0">
+                          <p:tn val="2"/>
+                        </p:cond>
+                      </p:stCondLst>
+                      <p:childTnLst>
+                        <p:par>
+                          <p:cTn id="4" fill="hold">
+                            <p:stCondLst>
+                              <p:cond delay="0"/>
+                            </p:stCondLst>
+                            <p:childTnLst>
+                              <p:par>
+                                <p:cTn id="5" presetID="10" presetClass="entr" presetSubtype="0" fill="hold" grpId="0" nodeType="withEffect">
+                                  <p:stCondLst>
+                                    <p:cond delay="0"/>
+                                  </p:stCondLst>
+                                  <p:childTnLst>
+                                    <p:set>
+                                      <p:cBhvr>
+                                        <p:cTn id="6" dur="1" fill="hold">
+                                          <p:stCondLst>
+                                            <p:cond delay="0"/>
+                                          </p:stCondLst>
+                                        </p:cTn>
+                                        <p:tgtEl>
+                                          <p:spTgt spid="4"/>
+                                        </p:tgtEl>
+                                        <p:attrNameLst>
+                                          <p:attrName>style.visibility</p:attrName>
+                                        </p:attrNameLst>
+                                      </p:cBhvr>
+                                      <p:to>
+                                        <p:strVal val="visible"/>
+                                      </p:to>
+                                    </p:set>
+                                    <p:animEffect transition="in" filter="fade">
+                                      <p:cBhvr>
+                                        <p:cTn id="7" dur="500"/>
+                                        <p:tgtEl>
+                                          <p:spTgt spid="4"/>
+                                        </p:tgtEl>
+                                      </p:cBhvr>
+                                    </p:animEffect>
+                                  </p:childTnLst>
+                                </p:cTn>
+                              </p:par>
+                            </p:childTnLst>
+                          </p:cTn>
+                        </p:par>
+                      </p:childTnLst>
+                    </p:cTn>
+                  </p:par>
+                </p:childTnLst>
+              </p:cTn>
+              <p:prevCondLst>
+                <p:cond evt="onPrev" delay="0">
+                  <p:tgtEl>
+                    <p:sldTgt/>
+                  </p:tgtEl>
+                </p:cond>
+              </p:prevCondLst>
+              <p:nextCondLst>
+                <p:cond evt="onNext" delay="0">
+                  <p:tgtEl>
+                    <p:sldTgt/>
+                  </p:tgtEl>
+                </p:cond>
+              </p:nextCondLst>
+            </p:seq>
+          </p:childTnLst>
+        </p:cTn>
+      </p:par>
+    </p:tnLst>
+    <p:bldLst>
+      <p:bldP spid="4" grpId="0" animBg="1"/>
+    </p:bldLst>
+  </p:timing>
 </p:sld>
 </file>
 
@@ -24277,50 +26870,6 @@
           <a:chExt cx="0" cy="0"/>
         </a:xfrm>
       </p:grpSpPr>
-      <p:sp>
-        <p:nvSpPr>
-          <p:cNvPr id="2" name="Text 0"/>
-          <p:cNvSpPr/>
-          <p:nvPr/>
-        </p:nvSpPr>
-        <p:spPr>
-          <a:xfrm>
-            <a:off x="4572000" y="1295400"/>
-            <a:ext cx="0" cy="228600"/>
-          </a:xfrm>
-          <a:prstGeom prst="rect">
-            <a:avLst/>
-          </a:prstGeom>
-          <a:noFill/>
-          <a:ln/>
-        </p:spPr>
-        <p:txBody>
-          <a:bodyPr wrap="square" lIns="0" tIns="0" rIns="0" bIns="0" rtlCol="0" anchor="ctr"/>
-          <a:lstStyle/>
-          <a:p>
-            <a:pPr marL="0" indent="0" algn="l">
-              <a:lnSpc>
-                <a:spcPts val="1693"/>
-              </a:lnSpc>
-              <a:buNone/>
-            </a:pPr>
-            <a:r>
-              <a:rPr lang="en-US" sz="1283" b="1" kern="0" spc="-26" dirty="0">
-                <a:solidFill>
-                  <a:srgbClr val="000000">
-                    <a:alpha val="99000"/>
-                  </a:srgbClr>
-                </a:solidFill>
-                <a:latin typeface="Inter" pitchFamily="34" charset="0"/>
-                <a:ea typeface="Inter" pitchFamily="34" charset="-122"/>
-                <a:cs typeface="Inter" pitchFamily="34" charset="-120"/>
-              </a:rPr>
-              <a:t> </a:t>
-            </a:r>
-            <a:endParaRPr lang="en-US" sz="1283" dirty="0"/>
-          </a:p>
-        </p:txBody>
-      </p:sp>
       <p:sp>
         <p:nvSpPr>
           <p:cNvPr id="3" name="Text 1"/>
@@ -25117,6 +27666,635 @@
       </p:transition>
     </mc:Fallback>
   </mc:AlternateContent>
+  <p:timing>
+    <p:tnLst>
+      <p:par>
+        <p:cTn id="1" dur="indefinite" restart="never" nodeType="tmRoot">
+          <p:childTnLst>
+            <p:seq concurrent="1" nextAc="seek">
+              <p:cTn id="2" dur="indefinite" nodeType="mainSeq">
+                <p:childTnLst>
+                  <p:par>
+                    <p:cTn id="3" fill="hold">
+                      <p:stCondLst>
+                        <p:cond delay="indefinite"/>
+                        <p:cond evt="onBegin" delay="0">
+                          <p:tn val="2"/>
+                        </p:cond>
+                      </p:stCondLst>
+                      <p:childTnLst>
+                        <p:par>
+                          <p:cTn id="4" fill="hold">
+                            <p:stCondLst>
+                              <p:cond delay="0"/>
+                            </p:stCondLst>
+                            <p:childTnLst>
+                              <p:par>
+                                <p:cTn id="5" presetID="10" presetClass="entr" presetSubtype="0" fill="hold" grpId="0" nodeType="withEffect">
+                                  <p:stCondLst>
+                                    <p:cond delay="0"/>
+                                  </p:stCondLst>
+                                  <p:childTnLst>
+                                    <p:set>
+                                      <p:cBhvr>
+                                        <p:cTn id="6" dur="1" fill="hold">
+                                          <p:stCondLst>
+                                            <p:cond delay="0"/>
+                                          </p:stCondLst>
+                                        </p:cTn>
+                                        <p:tgtEl>
+                                          <p:spTgt spid="60"/>
+                                        </p:tgtEl>
+                                        <p:attrNameLst>
+                                          <p:attrName>style.visibility</p:attrName>
+                                        </p:attrNameLst>
+                                      </p:cBhvr>
+                                      <p:to>
+                                        <p:strVal val="visible"/>
+                                      </p:to>
+                                    </p:set>
+                                    <p:animEffect transition="in" filter="fade">
+                                      <p:cBhvr>
+                                        <p:cTn id="7" dur="500"/>
+                                        <p:tgtEl>
+                                          <p:spTgt spid="60"/>
+                                        </p:tgtEl>
+                                      </p:cBhvr>
+                                    </p:animEffect>
+                                  </p:childTnLst>
+                                </p:cTn>
+                              </p:par>
+                              <p:par>
+                                <p:cTn id="8" presetID="10" presetClass="entr" presetSubtype="0" fill="hold" grpId="0" nodeType="withEffect">
+                                  <p:stCondLst>
+                                    <p:cond delay="0"/>
+                                  </p:stCondLst>
+                                  <p:childTnLst>
+                                    <p:set>
+                                      <p:cBhvr>
+                                        <p:cTn id="9" dur="1" fill="hold">
+                                          <p:stCondLst>
+                                            <p:cond delay="0"/>
+                                          </p:stCondLst>
+                                        </p:cTn>
+                                        <p:tgtEl>
+                                          <p:spTgt spid="61"/>
+                                        </p:tgtEl>
+                                        <p:attrNameLst>
+                                          <p:attrName>style.visibility</p:attrName>
+                                        </p:attrNameLst>
+                                      </p:cBhvr>
+                                      <p:to>
+                                        <p:strVal val="visible"/>
+                                      </p:to>
+                                    </p:set>
+                                    <p:animEffect transition="in" filter="fade">
+                                      <p:cBhvr>
+                                        <p:cTn id="10" dur="500"/>
+                                        <p:tgtEl>
+                                          <p:spTgt spid="61"/>
+                                        </p:tgtEl>
+                                      </p:cBhvr>
+                                    </p:animEffect>
+                                  </p:childTnLst>
+                                </p:cTn>
+                              </p:par>
+                              <p:par>
+                                <p:cTn id="11" presetID="10" presetClass="entr" presetSubtype="0" fill="hold" grpId="0" nodeType="withEffect">
+                                  <p:stCondLst>
+                                    <p:cond delay="0"/>
+                                  </p:stCondLst>
+                                  <p:childTnLst>
+                                    <p:set>
+                                      <p:cBhvr>
+                                        <p:cTn id="12" dur="1" fill="hold">
+                                          <p:stCondLst>
+                                            <p:cond delay="0"/>
+                                          </p:stCondLst>
+                                        </p:cTn>
+                                        <p:tgtEl>
+                                          <p:spTgt spid="62"/>
+                                        </p:tgtEl>
+                                        <p:attrNameLst>
+                                          <p:attrName>style.visibility</p:attrName>
+                                        </p:attrNameLst>
+                                      </p:cBhvr>
+                                      <p:to>
+                                        <p:strVal val="visible"/>
+                                      </p:to>
+                                    </p:set>
+                                    <p:animEffect transition="in" filter="fade">
+                                      <p:cBhvr>
+                                        <p:cTn id="13" dur="500"/>
+                                        <p:tgtEl>
+                                          <p:spTgt spid="62"/>
+                                        </p:tgtEl>
+                                      </p:cBhvr>
+                                    </p:animEffect>
+                                  </p:childTnLst>
+                                </p:cTn>
+                              </p:par>
+                              <p:par>
+                                <p:cTn id="14" presetID="10" presetClass="entr" presetSubtype="0" fill="hold" grpId="0" nodeType="withEffect">
+                                  <p:stCondLst>
+                                    <p:cond delay="0"/>
+                                  </p:stCondLst>
+                                  <p:childTnLst>
+                                    <p:set>
+                                      <p:cBhvr>
+                                        <p:cTn id="15" dur="1" fill="hold">
+                                          <p:stCondLst>
+                                            <p:cond delay="0"/>
+                                          </p:stCondLst>
+                                        </p:cTn>
+                                        <p:tgtEl>
+                                          <p:spTgt spid="63"/>
+                                        </p:tgtEl>
+                                        <p:attrNameLst>
+                                          <p:attrName>style.visibility</p:attrName>
+                                        </p:attrNameLst>
+                                      </p:cBhvr>
+                                      <p:to>
+                                        <p:strVal val="visible"/>
+                                      </p:to>
+                                    </p:set>
+                                    <p:animEffect transition="in" filter="fade">
+                                      <p:cBhvr>
+                                        <p:cTn id="16" dur="500"/>
+                                        <p:tgtEl>
+                                          <p:spTgt spid="63"/>
+                                        </p:tgtEl>
+                                      </p:cBhvr>
+                                    </p:animEffect>
+                                  </p:childTnLst>
+                                </p:cTn>
+                              </p:par>
+                              <p:par>
+                                <p:cTn id="17" presetID="10" presetClass="entr" presetSubtype="0" fill="hold" grpId="0" nodeType="withEffect">
+                                  <p:stCondLst>
+                                    <p:cond delay="200"/>
+                                  </p:stCondLst>
+                                  <p:childTnLst>
+                                    <p:set>
+                                      <p:cBhvr>
+                                        <p:cTn id="18" dur="1" fill="hold">
+                                          <p:stCondLst>
+                                            <p:cond delay="0"/>
+                                          </p:stCondLst>
+                                        </p:cTn>
+                                        <p:tgtEl>
+                                          <p:spTgt spid="64"/>
+                                        </p:tgtEl>
+                                        <p:attrNameLst>
+                                          <p:attrName>style.visibility</p:attrName>
+                                        </p:attrNameLst>
+                                      </p:cBhvr>
+                                      <p:to>
+                                        <p:strVal val="visible"/>
+                                      </p:to>
+                                    </p:set>
+                                    <p:animEffect transition="in" filter="fade">
+                                      <p:cBhvr>
+                                        <p:cTn id="19" dur="500"/>
+                                        <p:tgtEl>
+                                          <p:spTgt spid="64"/>
+                                        </p:tgtEl>
+                                      </p:cBhvr>
+                                    </p:animEffect>
+                                  </p:childTnLst>
+                                </p:cTn>
+                              </p:par>
+                              <p:par>
+                                <p:cTn id="20" presetID="10" presetClass="entr" presetSubtype="0" fill="hold" grpId="0" nodeType="withEffect">
+                                  <p:stCondLst>
+                                    <p:cond delay="200"/>
+                                  </p:stCondLst>
+                                  <p:childTnLst>
+                                    <p:set>
+                                      <p:cBhvr>
+                                        <p:cTn id="21" dur="1" fill="hold">
+                                          <p:stCondLst>
+                                            <p:cond delay="0"/>
+                                          </p:stCondLst>
+                                        </p:cTn>
+                                        <p:tgtEl>
+                                          <p:spTgt spid="65"/>
+                                        </p:tgtEl>
+                                        <p:attrNameLst>
+                                          <p:attrName>style.visibility</p:attrName>
+                                        </p:attrNameLst>
+                                      </p:cBhvr>
+                                      <p:to>
+                                        <p:strVal val="visible"/>
+                                      </p:to>
+                                    </p:set>
+                                    <p:animEffect transition="in" filter="fade">
+                                      <p:cBhvr>
+                                        <p:cTn id="22" dur="500"/>
+                                        <p:tgtEl>
+                                          <p:spTgt spid="65"/>
+                                        </p:tgtEl>
+                                      </p:cBhvr>
+                                    </p:animEffect>
+                                  </p:childTnLst>
+                                </p:cTn>
+                              </p:par>
+                              <p:par>
+                                <p:cTn id="23" presetID="10" presetClass="entr" presetSubtype="0" fill="hold" grpId="0" nodeType="withEffect">
+                                  <p:stCondLst>
+                                    <p:cond delay="200"/>
+                                  </p:stCondLst>
+                                  <p:childTnLst>
+                                    <p:set>
+                                      <p:cBhvr>
+                                        <p:cTn id="24" dur="1" fill="hold">
+                                          <p:stCondLst>
+                                            <p:cond delay="0"/>
+                                          </p:stCondLst>
+                                        </p:cTn>
+                                        <p:tgtEl>
+                                          <p:spTgt spid="66"/>
+                                        </p:tgtEl>
+                                        <p:attrNameLst>
+                                          <p:attrName>style.visibility</p:attrName>
+                                        </p:attrNameLst>
+                                      </p:cBhvr>
+                                      <p:to>
+                                        <p:strVal val="visible"/>
+                                      </p:to>
+                                    </p:set>
+                                    <p:animEffect transition="in" filter="fade">
+                                      <p:cBhvr>
+                                        <p:cTn id="25" dur="500"/>
+                                        <p:tgtEl>
+                                          <p:spTgt spid="66"/>
+                                        </p:tgtEl>
+                                      </p:cBhvr>
+                                    </p:animEffect>
+                                  </p:childTnLst>
+                                </p:cTn>
+                              </p:par>
+                              <p:par>
+                                <p:cTn id="26" presetID="10" presetClass="entr" presetSubtype="0" fill="hold" grpId="0" nodeType="withEffect">
+                                  <p:stCondLst>
+                                    <p:cond delay="200"/>
+                                  </p:stCondLst>
+                                  <p:childTnLst>
+                                    <p:set>
+                                      <p:cBhvr>
+                                        <p:cTn id="27" dur="1" fill="hold">
+                                          <p:stCondLst>
+                                            <p:cond delay="0"/>
+                                          </p:stCondLst>
+                                        </p:cTn>
+                                        <p:tgtEl>
+                                          <p:spTgt spid="67"/>
+                                        </p:tgtEl>
+                                        <p:attrNameLst>
+                                          <p:attrName>style.visibility</p:attrName>
+                                        </p:attrNameLst>
+                                      </p:cBhvr>
+                                      <p:to>
+                                        <p:strVal val="visible"/>
+                                      </p:to>
+                                    </p:set>
+                                    <p:animEffect transition="in" filter="fade">
+                                      <p:cBhvr>
+                                        <p:cTn id="28" dur="500"/>
+                                        <p:tgtEl>
+                                          <p:spTgt spid="67"/>
+                                        </p:tgtEl>
+                                      </p:cBhvr>
+                                    </p:animEffect>
+                                  </p:childTnLst>
+                                </p:cTn>
+                              </p:par>
+                              <p:par>
+                                <p:cTn id="29" presetID="10" presetClass="entr" presetSubtype="0" fill="hold" grpId="0" nodeType="withEffect">
+                                  <p:stCondLst>
+                                    <p:cond delay="400"/>
+                                  </p:stCondLst>
+                                  <p:childTnLst>
+                                    <p:set>
+                                      <p:cBhvr>
+                                        <p:cTn id="30" dur="1" fill="hold">
+                                          <p:stCondLst>
+                                            <p:cond delay="0"/>
+                                          </p:stCondLst>
+                                        </p:cTn>
+                                        <p:tgtEl>
+                                          <p:spTgt spid="68"/>
+                                        </p:tgtEl>
+                                        <p:attrNameLst>
+                                          <p:attrName>style.visibility</p:attrName>
+                                        </p:attrNameLst>
+                                      </p:cBhvr>
+                                      <p:to>
+                                        <p:strVal val="visible"/>
+                                      </p:to>
+                                    </p:set>
+                                    <p:animEffect transition="in" filter="fade">
+                                      <p:cBhvr>
+                                        <p:cTn id="31" dur="500"/>
+                                        <p:tgtEl>
+                                          <p:spTgt spid="68"/>
+                                        </p:tgtEl>
+                                      </p:cBhvr>
+                                    </p:animEffect>
+                                  </p:childTnLst>
+                                </p:cTn>
+                              </p:par>
+                              <p:par>
+                                <p:cTn id="32" presetID="10" presetClass="entr" presetSubtype="0" fill="hold" grpId="0" nodeType="withEffect">
+                                  <p:stCondLst>
+                                    <p:cond delay="400"/>
+                                  </p:stCondLst>
+                                  <p:childTnLst>
+                                    <p:set>
+                                      <p:cBhvr>
+                                        <p:cTn id="33" dur="1" fill="hold">
+                                          <p:stCondLst>
+                                            <p:cond delay="0"/>
+                                          </p:stCondLst>
+                                        </p:cTn>
+                                        <p:tgtEl>
+                                          <p:spTgt spid="69"/>
+                                        </p:tgtEl>
+                                        <p:attrNameLst>
+                                          <p:attrName>style.visibility</p:attrName>
+                                        </p:attrNameLst>
+                                      </p:cBhvr>
+                                      <p:to>
+                                        <p:strVal val="visible"/>
+                                      </p:to>
+                                    </p:set>
+                                    <p:animEffect transition="in" filter="fade">
+                                      <p:cBhvr>
+                                        <p:cTn id="34" dur="500"/>
+                                        <p:tgtEl>
+                                          <p:spTgt spid="69"/>
+                                        </p:tgtEl>
+                                      </p:cBhvr>
+                                    </p:animEffect>
+                                  </p:childTnLst>
+                                </p:cTn>
+                              </p:par>
+                              <p:par>
+                                <p:cTn id="35" presetID="10" presetClass="entr" presetSubtype="0" fill="hold" grpId="0" nodeType="withEffect">
+                                  <p:stCondLst>
+                                    <p:cond delay="400"/>
+                                  </p:stCondLst>
+                                  <p:childTnLst>
+                                    <p:set>
+                                      <p:cBhvr>
+                                        <p:cTn id="36" dur="1" fill="hold">
+                                          <p:stCondLst>
+                                            <p:cond delay="0"/>
+                                          </p:stCondLst>
+                                        </p:cTn>
+                                        <p:tgtEl>
+                                          <p:spTgt spid="70"/>
+                                        </p:tgtEl>
+                                        <p:attrNameLst>
+                                          <p:attrName>style.visibility</p:attrName>
+                                        </p:attrNameLst>
+                                      </p:cBhvr>
+                                      <p:to>
+                                        <p:strVal val="visible"/>
+                                      </p:to>
+                                    </p:set>
+                                    <p:animEffect transition="in" filter="fade">
+                                      <p:cBhvr>
+                                        <p:cTn id="37" dur="500"/>
+                                        <p:tgtEl>
+                                          <p:spTgt spid="70"/>
+                                        </p:tgtEl>
+                                      </p:cBhvr>
+                                    </p:animEffect>
+                                  </p:childTnLst>
+                                </p:cTn>
+                              </p:par>
+                              <p:par>
+                                <p:cTn id="38" presetID="10" presetClass="entr" presetSubtype="0" fill="hold" grpId="0" nodeType="withEffect">
+                                  <p:stCondLst>
+                                    <p:cond delay="400"/>
+                                  </p:stCondLst>
+                                  <p:childTnLst>
+                                    <p:set>
+                                      <p:cBhvr>
+                                        <p:cTn id="39" dur="1" fill="hold">
+                                          <p:stCondLst>
+                                            <p:cond delay="0"/>
+                                          </p:stCondLst>
+                                        </p:cTn>
+                                        <p:tgtEl>
+                                          <p:spTgt spid="71"/>
+                                        </p:tgtEl>
+                                        <p:attrNameLst>
+                                          <p:attrName>style.visibility</p:attrName>
+                                        </p:attrNameLst>
+                                      </p:cBhvr>
+                                      <p:to>
+                                        <p:strVal val="visible"/>
+                                      </p:to>
+                                    </p:set>
+                                    <p:animEffect transition="in" filter="fade">
+                                      <p:cBhvr>
+                                        <p:cTn id="40" dur="500"/>
+                                        <p:tgtEl>
+                                          <p:spTgt spid="71"/>
+                                        </p:tgtEl>
+                                      </p:cBhvr>
+                                    </p:animEffect>
+                                  </p:childTnLst>
+                                </p:cTn>
+                              </p:par>
+                              <p:par>
+                                <p:cTn id="41" presetID="10" presetClass="entr" presetSubtype="0" fill="hold" grpId="0" nodeType="withEffect">
+                                  <p:stCondLst>
+                                    <p:cond delay="800"/>
+                                  </p:stCondLst>
+                                  <p:childTnLst>
+                                    <p:set>
+                                      <p:cBhvr>
+                                        <p:cTn id="42" dur="1" fill="hold">
+                                          <p:stCondLst>
+                                            <p:cond delay="0"/>
+                                          </p:stCondLst>
+                                        </p:cTn>
+                                        <p:tgtEl>
+                                          <p:spTgt spid="72"/>
+                                        </p:tgtEl>
+                                        <p:attrNameLst>
+                                          <p:attrName>style.visibility</p:attrName>
+                                        </p:attrNameLst>
+                                      </p:cBhvr>
+                                      <p:to>
+                                        <p:strVal val="visible"/>
+                                      </p:to>
+                                    </p:set>
+                                    <p:animEffect transition="in" filter="fade">
+                                      <p:cBhvr>
+                                        <p:cTn id="43" dur="500"/>
+                                        <p:tgtEl>
+                                          <p:spTgt spid="72"/>
+                                        </p:tgtEl>
+                                      </p:cBhvr>
+                                    </p:animEffect>
+                                  </p:childTnLst>
+                                </p:cTn>
+                              </p:par>
+                              <p:par>
+                                <p:cTn id="44" presetID="10" presetClass="entr" presetSubtype="0" fill="hold" grpId="0" nodeType="withEffect">
+                                  <p:stCondLst>
+                                    <p:cond delay="800"/>
+                                  </p:stCondLst>
+                                  <p:childTnLst>
+                                    <p:set>
+                                      <p:cBhvr>
+                                        <p:cTn id="45" dur="1" fill="hold">
+                                          <p:stCondLst>
+                                            <p:cond delay="0"/>
+                                          </p:stCondLst>
+                                        </p:cTn>
+                                        <p:tgtEl>
+                                          <p:spTgt spid="73"/>
+                                        </p:tgtEl>
+                                        <p:attrNameLst>
+                                          <p:attrName>style.visibility</p:attrName>
+                                        </p:attrNameLst>
+                                      </p:cBhvr>
+                                      <p:to>
+                                        <p:strVal val="visible"/>
+                                      </p:to>
+                                    </p:set>
+                                    <p:animEffect transition="in" filter="fade">
+                                      <p:cBhvr>
+                                        <p:cTn id="46" dur="500"/>
+                                        <p:tgtEl>
+                                          <p:spTgt spid="73"/>
+                                        </p:tgtEl>
+                                      </p:cBhvr>
+                                    </p:animEffect>
+                                  </p:childTnLst>
+                                </p:cTn>
+                              </p:par>
+                              <p:par>
+                                <p:cTn id="47" presetID="10" presetClass="entr" presetSubtype="0" fill="hold" grpId="0" nodeType="withEffect">
+                                  <p:stCondLst>
+                                    <p:cond delay="800"/>
+                                  </p:stCondLst>
+                                  <p:childTnLst>
+                                    <p:set>
+                                      <p:cBhvr>
+                                        <p:cTn id="48" dur="1" fill="hold">
+                                          <p:stCondLst>
+                                            <p:cond delay="0"/>
+                                          </p:stCondLst>
+                                        </p:cTn>
+                                        <p:tgtEl>
+                                          <p:spTgt spid="74"/>
+                                        </p:tgtEl>
+                                        <p:attrNameLst>
+                                          <p:attrName>style.visibility</p:attrName>
+                                        </p:attrNameLst>
+                                      </p:cBhvr>
+                                      <p:to>
+                                        <p:strVal val="visible"/>
+                                      </p:to>
+                                    </p:set>
+                                    <p:animEffect transition="in" filter="fade">
+                                      <p:cBhvr>
+                                        <p:cTn id="49" dur="500"/>
+                                        <p:tgtEl>
+                                          <p:spTgt spid="74"/>
+                                        </p:tgtEl>
+                                      </p:cBhvr>
+                                    </p:animEffect>
+                                  </p:childTnLst>
+                                </p:cTn>
+                              </p:par>
+                              <p:par>
+                                <p:cTn id="50" presetID="10" presetClass="entr" presetSubtype="0" fill="hold" grpId="0" nodeType="withEffect">
+                                  <p:stCondLst>
+                                    <p:cond delay="800"/>
+                                  </p:stCondLst>
+                                  <p:childTnLst>
+                                    <p:set>
+                                      <p:cBhvr>
+                                        <p:cTn id="51" dur="1" fill="hold">
+                                          <p:stCondLst>
+                                            <p:cond delay="0"/>
+                                          </p:stCondLst>
+                                        </p:cTn>
+                                        <p:tgtEl>
+                                          <p:spTgt spid="75"/>
+                                        </p:tgtEl>
+                                        <p:attrNameLst>
+                                          <p:attrName>style.visibility</p:attrName>
+                                        </p:attrNameLst>
+                                      </p:cBhvr>
+                                      <p:to>
+                                        <p:strVal val="visible"/>
+                                      </p:to>
+                                    </p:set>
+                                    <p:animEffect transition="in" filter="fade">
+                                      <p:cBhvr>
+                                        <p:cTn id="52" dur="500"/>
+                                        <p:tgtEl>
+                                          <p:spTgt spid="75"/>
+                                        </p:tgtEl>
+                                      </p:cBhvr>
+                                    </p:animEffect>
+                                  </p:childTnLst>
+                                </p:cTn>
+                              </p:par>
+                            </p:childTnLst>
+                          </p:cTn>
+                        </p:par>
+                      </p:childTnLst>
+                    </p:cTn>
+                  </p:par>
+                </p:childTnLst>
+              </p:cTn>
+              <p:prevCondLst>
+                <p:cond evt="onPrev" delay="0">
+                  <p:tgtEl>
+                    <p:sldTgt/>
+                  </p:tgtEl>
+                </p:cond>
+              </p:prevCondLst>
+              <p:nextCondLst>
+                <p:cond evt="onNext" delay="0">
+                  <p:tgtEl>
+                    <p:sldTgt/>
+                  </p:tgtEl>
+                </p:cond>
+              </p:nextCondLst>
+            </p:seq>
+          </p:childTnLst>
+        </p:cTn>
+      </p:par>
+    </p:tnLst>
+    <p:bldLst>
+      <p:bldP spid="60" grpId="0" animBg="1"/>
+      <p:bldP spid="61" grpId="0" animBg="1"/>
+      <p:bldP spid="62" grpId="0" animBg="1"/>
+      <p:bldP spid="63" grpId="0" animBg="1"/>
+      <p:bldP spid="64" grpId="0" animBg="1"/>
+      <p:bldP spid="65" grpId="0" animBg="1"/>
+      <p:bldP spid="66" grpId="0" animBg="1"/>
+      <p:bldP spid="67" grpId="0" animBg="1"/>
+      <p:bldP spid="68" grpId="0" animBg="1"/>
+      <p:bldP spid="69" grpId="0" animBg="1"/>
+      <p:bldP spid="70" grpId="0" animBg="1"/>
+      <p:bldP spid="71" grpId="0" animBg="1"/>
+      <p:bldP spid="72" grpId="0" animBg="1"/>
+      <p:bldP spid="73" grpId="0" animBg="1"/>
+      <p:bldP spid="74" grpId="0" animBg="1"/>
+      <p:bldP spid="75" grpId="0" animBg="1"/>
+    </p:bldLst>
+  </p:timing>
 </p:sld>
 </file>
 
@@ -26298,6 +29476,631 @@
       </p:transition>
     </mc:Fallback>
   </mc:AlternateContent>
+  <p:timing>
+    <p:tnLst>
+      <p:par>
+        <p:cTn id="1" dur="indefinite" restart="never" nodeType="tmRoot">
+          <p:childTnLst>
+            <p:seq concurrent="1" nextAc="seek">
+              <p:cTn id="2" dur="indefinite" nodeType="mainSeq">
+                <p:childTnLst>
+                  <p:par>
+                    <p:cTn id="3" fill="hold">
+                      <p:stCondLst>
+                        <p:cond delay="indefinite"/>
+                        <p:cond evt="onBegin" delay="0">
+                          <p:tn val="2"/>
+                        </p:cond>
+                      </p:stCondLst>
+                      <p:childTnLst>
+                        <p:par>
+                          <p:cTn id="4" fill="hold">
+                            <p:stCondLst>
+                              <p:cond delay="0"/>
+                            </p:stCondLst>
+                            <p:childTnLst>
+                              <p:par>
+                                <p:cTn id="5" presetID="10" presetClass="entr" presetSubtype="0" fill="hold" nodeType="withEffect">
+                                  <p:stCondLst>
+                                    <p:cond delay="0"/>
+                                  </p:stCondLst>
+                                  <p:childTnLst>
+                                    <p:set>
+                                      <p:cBhvr>
+                                        <p:cTn id="6" dur="1" fill="hold">
+                                          <p:stCondLst>
+                                            <p:cond delay="0"/>
+                                          </p:stCondLst>
+                                        </p:cTn>
+                                        <p:tgtEl>
+                                          <p:spTgt spid="37"/>
+                                        </p:tgtEl>
+                                        <p:attrNameLst>
+                                          <p:attrName>style.visibility</p:attrName>
+                                        </p:attrNameLst>
+                                      </p:cBhvr>
+                                      <p:to>
+                                        <p:strVal val="visible"/>
+                                      </p:to>
+                                    </p:set>
+                                    <p:animEffect transition="in" filter="fade">
+                                      <p:cBhvr>
+                                        <p:cTn id="7" dur="500"/>
+                                        <p:tgtEl>
+                                          <p:spTgt spid="37"/>
+                                        </p:tgtEl>
+                                      </p:cBhvr>
+                                    </p:animEffect>
+                                  </p:childTnLst>
+                                </p:cTn>
+                              </p:par>
+                              <p:par>
+                                <p:cTn id="8" presetID="10" presetClass="entr" presetSubtype="0" fill="hold" grpId="0" nodeType="withEffect">
+                                  <p:stCondLst>
+                                    <p:cond delay="0"/>
+                                  </p:stCondLst>
+                                  <p:childTnLst>
+                                    <p:set>
+                                      <p:cBhvr>
+                                        <p:cTn id="9" dur="1" fill="hold">
+                                          <p:stCondLst>
+                                            <p:cond delay="0"/>
+                                          </p:stCondLst>
+                                        </p:cTn>
+                                        <p:tgtEl>
+                                          <p:spTgt spid="48"/>
+                                        </p:tgtEl>
+                                        <p:attrNameLst>
+                                          <p:attrName>style.visibility</p:attrName>
+                                        </p:attrNameLst>
+                                      </p:cBhvr>
+                                      <p:to>
+                                        <p:strVal val="visible"/>
+                                      </p:to>
+                                    </p:set>
+                                    <p:animEffect transition="in" filter="fade">
+                                      <p:cBhvr>
+                                        <p:cTn id="10" dur="500"/>
+                                        <p:tgtEl>
+                                          <p:spTgt spid="48"/>
+                                        </p:tgtEl>
+                                      </p:cBhvr>
+                                    </p:animEffect>
+                                  </p:childTnLst>
+                                </p:cTn>
+                              </p:par>
+                              <p:par>
+                                <p:cTn id="11" presetID="10" presetClass="entr" presetSubtype="0" fill="hold" grpId="0" nodeType="withEffect">
+                                  <p:stCondLst>
+                                    <p:cond delay="0"/>
+                                  </p:stCondLst>
+                                  <p:childTnLst>
+                                    <p:set>
+                                      <p:cBhvr>
+                                        <p:cTn id="12" dur="1" fill="hold">
+                                          <p:stCondLst>
+                                            <p:cond delay="0"/>
+                                          </p:stCondLst>
+                                        </p:cTn>
+                                        <p:tgtEl>
+                                          <p:spTgt spid="54"/>
+                                        </p:tgtEl>
+                                        <p:attrNameLst>
+                                          <p:attrName>style.visibility</p:attrName>
+                                        </p:attrNameLst>
+                                      </p:cBhvr>
+                                      <p:to>
+                                        <p:strVal val="visible"/>
+                                      </p:to>
+                                    </p:set>
+                                    <p:animEffect transition="in" filter="fade">
+                                      <p:cBhvr>
+                                        <p:cTn id="13" dur="500"/>
+                                        <p:tgtEl>
+                                          <p:spTgt spid="54"/>
+                                        </p:tgtEl>
+                                      </p:cBhvr>
+                                    </p:animEffect>
+                                  </p:childTnLst>
+                                </p:cTn>
+                              </p:par>
+                              <p:par>
+                                <p:cTn id="14" presetID="10" presetClass="entr" presetSubtype="0" fill="hold" grpId="0" nodeType="withEffect">
+                                  <p:stCondLst>
+                                    <p:cond delay="0"/>
+                                  </p:stCondLst>
+                                  <p:childTnLst>
+                                    <p:set>
+                                      <p:cBhvr>
+                                        <p:cTn id="15" dur="1" fill="hold">
+                                          <p:stCondLst>
+                                            <p:cond delay="0"/>
+                                          </p:stCondLst>
+                                        </p:cTn>
+                                        <p:tgtEl>
+                                          <p:spTgt spid="58"/>
+                                        </p:tgtEl>
+                                        <p:attrNameLst>
+                                          <p:attrName>style.visibility</p:attrName>
+                                        </p:attrNameLst>
+                                      </p:cBhvr>
+                                      <p:to>
+                                        <p:strVal val="visible"/>
+                                      </p:to>
+                                    </p:set>
+                                    <p:animEffect transition="in" filter="fade">
+                                      <p:cBhvr>
+                                        <p:cTn id="16" dur="500"/>
+                                        <p:tgtEl>
+                                          <p:spTgt spid="58"/>
+                                        </p:tgtEl>
+                                      </p:cBhvr>
+                                    </p:animEffect>
+                                  </p:childTnLst>
+                                </p:cTn>
+                              </p:par>
+                              <p:par>
+                                <p:cTn id="17" presetID="10" presetClass="entr" presetSubtype="0" fill="hold" nodeType="withEffect">
+                                  <p:stCondLst>
+                                    <p:cond delay="200"/>
+                                  </p:stCondLst>
+                                  <p:childTnLst>
+                                    <p:set>
+                                      <p:cBhvr>
+                                        <p:cTn id="18" dur="1" fill="hold">
+                                          <p:stCondLst>
+                                            <p:cond delay="0"/>
+                                          </p:stCondLst>
+                                        </p:cTn>
+                                        <p:tgtEl>
+                                          <p:spTgt spid="36"/>
+                                        </p:tgtEl>
+                                        <p:attrNameLst>
+                                          <p:attrName>style.visibility</p:attrName>
+                                        </p:attrNameLst>
+                                      </p:cBhvr>
+                                      <p:to>
+                                        <p:strVal val="visible"/>
+                                      </p:to>
+                                    </p:set>
+                                    <p:animEffect transition="in" filter="fade">
+                                      <p:cBhvr>
+                                        <p:cTn id="19" dur="500"/>
+                                        <p:tgtEl>
+                                          <p:spTgt spid="36"/>
+                                        </p:tgtEl>
+                                      </p:cBhvr>
+                                    </p:animEffect>
+                                  </p:childTnLst>
+                                </p:cTn>
+                              </p:par>
+                              <p:par>
+                                <p:cTn id="20" presetID="10" presetClass="entr" presetSubtype="0" fill="hold" grpId="0" nodeType="withEffect">
+                                  <p:stCondLst>
+                                    <p:cond delay="200"/>
+                                  </p:stCondLst>
+                                  <p:childTnLst>
+                                    <p:set>
+                                      <p:cBhvr>
+                                        <p:cTn id="21" dur="1" fill="hold">
+                                          <p:stCondLst>
+                                            <p:cond delay="0"/>
+                                          </p:stCondLst>
+                                        </p:cTn>
+                                        <p:tgtEl>
+                                          <p:spTgt spid="49"/>
+                                        </p:tgtEl>
+                                        <p:attrNameLst>
+                                          <p:attrName>style.visibility</p:attrName>
+                                        </p:attrNameLst>
+                                      </p:cBhvr>
+                                      <p:to>
+                                        <p:strVal val="visible"/>
+                                      </p:to>
+                                    </p:set>
+                                    <p:animEffect transition="in" filter="fade">
+                                      <p:cBhvr>
+                                        <p:cTn id="22" dur="500"/>
+                                        <p:tgtEl>
+                                          <p:spTgt spid="49"/>
+                                        </p:tgtEl>
+                                      </p:cBhvr>
+                                    </p:animEffect>
+                                  </p:childTnLst>
+                                </p:cTn>
+                              </p:par>
+                              <p:par>
+                                <p:cTn id="23" presetID="10" presetClass="entr" presetSubtype="0" fill="hold" grpId="0" nodeType="withEffect">
+                                  <p:stCondLst>
+                                    <p:cond delay="200"/>
+                                  </p:stCondLst>
+                                  <p:childTnLst>
+                                    <p:set>
+                                      <p:cBhvr>
+                                        <p:cTn id="24" dur="1" fill="hold">
+                                          <p:stCondLst>
+                                            <p:cond delay="0"/>
+                                          </p:stCondLst>
+                                        </p:cTn>
+                                        <p:tgtEl>
+                                          <p:spTgt spid="55"/>
+                                        </p:tgtEl>
+                                        <p:attrNameLst>
+                                          <p:attrName>style.visibility</p:attrName>
+                                        </p:attrNameLst>
+                                      </p:cBhvr>
+                                      <p:to>
+                                        <p:strVal val="visible"/>
+                                      </p:to>
+                                    </p:set>
+                                    <p:animEffect transition="in" filter="fade">
+                                      <p:cBhvr>
+                                        <p:cTn id="25" dur="500"/>
+                                        <p:tgtEl>
+                                          <p:spTgt spid="55"/>
+                                        </p:tgtEl>
+                                      </p:cBhvr>
+                                    </p:animEffect>
+                                  </p:childTnLst>
+                                </p:cTn>
+                              </p:par>
+                              <p:par>
+                                <p:cTn id="26" presetID="10" presetClass="entr" presetSubtype="0" fill="hold" grpId="0" nodeType="withEffect">
+                                  <p:stCondLst>
+                                    <p:cond delay="200"/>
+                                  </p:stCondLst>
+                                  <p:childTnLst>
+                                    <p:set>
+                                      <p:cBhvr>
+                                        <p:cTn id="27" dur="1" fill="hold">
+                                          <p:stCondLst>
+                                            <p:cond delay="0"/>
+                                          </p:stCondLst>
+                                        </p:cTn>
+                                        <p:tgtEl>
+                                          <p:spTgt spid="62"/>
+                                        </p:tgtEl>
+                                        <p:attrNameLst>
+                                          <p:attrName>style.visibility</p:attrName>
+                                        </p:attrNameLst>
+                                      </p:cBhvr>
+                                      <p:to>
+                                        <p:strVal val="visible"/>
+                                      </p:to>
+                                    </p:set>
+                                    <p:animEffect transition="in" filter="fade">
+                                      <p:cBhvr>
+                                        <p:cTn id="28" dur="500"/>
+                                        <p:tgtEl>
+                                          <p:spTgt spid="62"/>
+                                        </p:tgtEl>
+                                      </p:cBhvr>
+                                    </p:animEffect>
+                                  </p:childTnLst>
+                                </p:cTn>
+                              </p:par>
+                              <p:par>
+                                <p:cTn id="29" presetID="10" presetClass="entr" presetSubtype="0" fill="hold" nodeType="withEffect">
+                                  <p:stCondLst>
+                                    <p:cond delay="400"/>
+                                  </p:stCondLst>
+                                  <p:childTnLst>
+                                    <p:set>
+                                      <p:cBhvr>
+                                        <p:cTn id="30" dur="1" fill="hold">
+                                          <p:stCondLst>
+                                            <p:cond delay="0"/>
+                                          </p:stCondLst>
+                                        </p:cTn>
+                                        <p:tgtEl>
+                                          <p:spTgt spid="40"/>
+                                        </p:tgtEl>
+                                        <p:attrNameLst>
+                                          <p:attrName>style.visibility</p:attrName>
+                                        </p:attrNameLst>
+                                      </p:cBhvr>
+                                      <p:to>
+                                        <p:strVal val="visible"/>
+                                      </p:to>
+                                    </p:set>
+                                    <p:animEffect transition="in" filter="fade">
+                                      <p:cBhvr>
+                                        <p:cTn id="31" dur="500"/>
+                                        <p:tgtEl>
+                                          <p:spTgt spid="40"/>
+                                        </p:tgtEl>
+                                      </p:cBhvr>
+                                    </p:animEffect>
+                                  </p:childTnLst>
+                                </p:cTn>
+                              </p:par>
+                              <p:par>
+                                <p:cTn id="32" presetID="10" presetClass="entr" presetSubtype="0" fill="hold" grpId="0" nodeType="withEffect">
+                                  <p:stCondLst>
+                                    <p:cond delay="400"/>
+                                  </p:stCondLst>
+                                  <p:childTnLst>
+                                    <p:set>
+                                      <p:cBhvr>
+                                        <p:cTn id="33" dur="1" fill="hold">
+                                          <p:stCondLst>
+                                            <p:cond delay="0"/>
+                                          </p:stCondLst>
+                                        </p:cTn>
+                                        <p:tgtEl>
+                                          <p:spTgt spid="50"/>
+                                        </p:tgtEl>
+                                        <p:attrNameLst>
+                                          <p:attrName>style.visibility</p:attrName>
+                                        </p:attrNameLst>
+                                      </p:cBhvr>
+                                      <p:to>
+                                        <p:strVal val="visible"/>
+                                      </p:to>
+                                    </p:set>
+                                    <p:animEffect transition="in" filter="fade">
+                                      <p:cBhvr>
+                                        <p:cTn id="34" dur="500"/>
+                                        <p:tgtEl>
+                                          <p:spTgt spid="50"/>
+                                        </p:tgtEl>
+                                      </p:cBhvr>
+                                    </p:animEffect>
+                                  </p:childTnLst>
+                                </p:cTn>
+                              </p:par>
+                              <p:par>
+                                <p:cTn id="35" presetID="10" presetClass="entr" presetSubtype="0" fill="hold" grpId="0" nodeType="withEffect">
+                                  <p:stCondLst>
+                                    <p:cond delay="400"/>
+                                  </p:stCondLst>
+                                  <p:childTnLst>
+                                    <p:set>
+                                      <p:cBhvr>
+                                        <p:cTn id="36" dur="1" fill="hold">
+                                          <p:stCondLst>
+                                            <p:cond delay="0"/>
+                                          </p:stCondLst>
+                                        </p:cTn>
+                                        <p:tgtEl>
+                                          <p:spTgt spid="56"/>
+                                        </p:tgtEl>
+                                        <p:attrNameLst>
+                                          <p:attrName>style.visibility</p:attrName>
+                                        </p:attrNameLst>
+                                      </p:cBhvr>
+                                      <p:to>
+                                        <p:strVal val="visible"/>
+                                      </p:to>
+                                    </p:set>
+                                    <p:animEffect transition="in" filter="fade">
+                                      <p:cBhvr>
+                                        <p:cTn id="37" dur="500"/>
+                                        <p:tgtEl>
+                                          <p:spTgt spid="56"/>
+                                        </p:tgtEl>
+                                      </p:cBhvr>
+                                    </p:animEffect>
+                                  </p:childTnLst>
+                                </p:cTn>
+                              </p:par>
+                              <p:par>
+                                <p:cTn id="38" presetID="10" presetClass="entr" presetSubtype="0" fill="hold" grpId="0" nodeType="withEffect">
+                                  <p:stCondLst>
+                                    <p:cond delay="400"/>
+                                  </p:stCondLst>
+                                  <p:childTnLst>
+                                    <p:set>
+                                      <p:cBhvr>
+                                        <p:cTn id="39" dur="1" fill="hold">
+                                          <p:stCondLst>
+                                            <p:cond delay="0"/>
+                                          </p:stCondLst>
+                                        </p:cTn>
+                                        <p:tgtEl>
+                                          <p:spTgt spid="63"/>
+                                        </p:tgtEl>
+                                        <p:attrNameLst>
+                                          <p:attrName>style.visibility</p:attrName>
+                                        </p:attrNameLst>
+                                      </p:cBhvr>
+                                      <p:to>
+                                        <p:strVal val="visible"/>
+                                      </p:to>
+                                    </p:set>
+                                    <p:animEffect transition="in" filter="fade">
+                                      <p:cBhvr>
+                                        <p:cTn id="40" dur="500"/>
+                                        <p:tgtEl>
+                                          <p:spTgt spid="63"/>
+                                        </p:tgtEl>
+                                      </p:cBhvr>
+                                    </p:animEffect>
+                                  </p:childTnLst>
+                                </p:cTn>
+                              </p:par>
+                              <p:par>
+                                <p:cTn id="41" presetID="10" presetClass="entr" presetSubtype="0" fill="hold" nodeType="withEffect">
+                                  <p:stCondLst>
+                                    <p:cond delay="600"/>
+                                  </p:stCondLst>
+                                  <p:childTnLst>
+                                    <p:set>
+                                      <p:cBhvr>
+                                        <p:cTn id="42" dur="1" fill="hold">
+                                          <p:stCondLst>
+                                            <p:cond delay="0"/>
+                                          </p:stCondLst>
+                                        </p:cTn>
+                                        <p:tgtEl>
+                                          <p:spTgt spid="43"/>
+                                        </p:tgtEl>
+                                        <p:attrNameLst>
+                                          <p:attrName>style.visibility</p:attrName>
+                                        </p:attrNameLst>
+                                      </p:cBhvr>
+                                      <p:to>
+                                        <p:strVal val="visible"/>
+                                      </p:to>
+                                    </p:set>
+                                    <p:animEffect transition="in" filter="fade">
+                                      <p:cBhvr>
+                                        <p:cTn id="43" dur="500"/>
+                                        <p:tgtEl>
+                                          <p:spTgt spid="43"/>
+                                        </p:tgtEl>
+                                      </p:cBhvr>
+                                    </p:animEffect>
+                                  </p:childTnLst>
+                                </p:cTn>
+                              </p:par>
+                              <p:par>
+                                <p:cTn id="44" presetID="10" presetClass="entr" presetSubtype="0" fill="hold" grpId="0" nodeType="withEffect">
+                                  <p:stCondLst>
+                                    <p:cond delay="600"/>
+                                  </p:stCondLst>
+                                  <p:childTnLst>
+                                    <p:set>
+                                      <p:cBhvr>
+                                        <p:cTn id="45" dur="1" fill="hold">
+                                          <p:stCondLst>
+                                            <p:cond delay="0"/>
+                                          </p:stCondLst>
+                                        </p:cTn>
+                                        <p:tgtEl>
+                                          <p:spTgt spid="51"/>
+                                        </p:tgtEl>
+                                        <p:attrNameLst>
+                                          <p:attrName>style.visibility</p:attrName>
+                                        </p:attrNameLst>
+                                      </p:cBhvr>
+                                      <p:to>
+                                        <p:strVal val="visible"/>
+                                      </p:to>
+                                    </p:set>
+                                    <p:animEffect transition="in" filter="fade">
+                                      <p:cBhvr>
+                                        <p:cTn id="46" dur="500"/>
+                                        <p:tgtEl>
+                                          <p:spTgt spid="51"/>
+                                        </p:tgtEl>
+                                      </p:cBhvr>
+                                    </p:animEffect>
+                                  </p:childTnLst>
+                                </p:cTn>
+                              </p:par>
+                              <p:par>
+                                <p:cTn id="47" presetID="10" presetClass="entr" presetSubtype="0" fill="hold" grpId="0" nodeType="withEffect">
+                                  <p:stCondLst>
+                                    <p:cond delay="600"/>
+                                  </p:stCondLst>
+                                  <p:childTnLst>
+                                    <p:set>
+                                      <p:cBhvr>
+                                        <p:cTn id="48" dur="1" fill="hold">
+                                          <p:stCondLst>
+                                            <p:cond delay="0"/>
+                                          </p:stCondLst>
+                                        </p:cTn>
+                                        <p:tgtEl>
+                                          <p:spTgt spid="57"/>
+                                        </p:tgtEl>
+                                        <p:attrNameLst>
+                                          <p:attrName>style.visibility</p:attrName>
+                                        </p:attrNameLst>
+                                      </p:cBhvr>
+                                      <p:to>
+                                        <p:strVal val="visible"/>
+                                      </p:to>
+                                    </p:set>
+                                    <p:animEffect transition="in" filter="fade">
+                                      <p:cBhvr>
+                                        <p:cTn id="49" dur="500"/>
+                                        <p:tgtEl>
+                                          <p:spTgt spid="57"/>
+                                        </p:tgtEl>
+                                      </p:cBhvr>
+                                    </p:animEffect>
+                                  </p:childTnLst>
+                                </p:cTn>
+                              </p:par>
+                              <p:par>
+                                <p:cTn id="50" presetID="10" presetClass="entr" presetSubtype="0" fill="hold" grpId="0" nodeType="withEffect">
+                                  <p:stCondLst>
+                                    <p:cond delay="600"/>
+                                  </p:stCondLst>
+                                  <p:childTnLst>
+                                    <p:set>
+                                      <p:cBhvr>
+                                        <p:cTn id="51" dur="1" fill="hold">
+                                          <p:stCondLst>
+                                            <p:cond delay="0"/>
+                                          </p:stCondLst>
+                                        </p:cTn>
+                                        <p:tgtEl>
+                                          <p:spTgt spid="64"/>
+                                        </p:tgtEl>
+                                        <p:attrNameLst>
+                                          <p:attrName>style.visibility</p:attrName>
+                                        </p:attrNameLst>
+                                      </p:cBhvr>
+                                      <p:to>
+                                        <p:strVal val="visible"/>
+                                      </p:to>
+                                    </p:set>
+                                    <p:animEffect transition="in" filter="fade">
+                                      <p:cBhvr>
+                                        <p:cTn id="52" dur="500"/>
+                                        <p:tgtEl>
+                                          <p:spTgt spid="64"/>
+                                        </p:tgtEl>
+                                      </p:cBhvr>
+                                    </p:animEffect>
+                                  </p:childTnLst>
+                                </p:cTn>
+                              </p:par>
+                            </p:childTnLst>
+                          </p:cTn>
+                        </p:par>
+                      </p:childTnLst>
+                    </p:cTn>
+                  </p:par>
+                </p:childTnLst>
+              </p:cTn>
+              <p:prevCondLst>
+                <p:cond evt="onPrev" delay="0">
+                  <p:tgtEl>
+                    <p:sldTgt/>
+                  </p:tgtEl>
+                </p:cond>
+              </p:prevCondLst>
+              <p:nextCondLst>
+                <p:cond evt="onNext" delay="0">
+                  <p:tgtEl>
+                    <p:sldTgt/>
+                  </p:tgtEl>
+                </p:cond>
+              </p:nextCondLst>
+            </p:seq>
+          </p:childTnLst>
+        </p:cTn>
+      </p:par>
+    </p:tnLst>
+    <p:bldLst>
+      <p:bldP spid="48" grpId="0" animBg="1"/>
+      <p:bldP spid="49" grpId="0" animBg="1"/>
+      <p:bldP spid="50" grpId="0" animBg="1"/>
+      <p:bldP spid="51" grpId="0" animBg="1"/>
+      <p:bldP spid="54" grpId="0" animBg="1"/>
+      <p:bldP spid="55" grpId="0" animBg="1"/>
+      <p:bldP spid="56" grpId="0" animBg="1"/>
+      <p:bldP spid="57" grpId="0" animBg="1"/>
+      <p:bldP spid="58" grpId="0" animBg="1"/>
+      <p:bldP spid="62" grpId="0" animBg="1"/>
+      <p:bldP spid="63" grpId="0" animBg="1"/>
+      <p:bldP spid="64" grpId="0" animBg="1"/>
+    </p:bldLst>
+  </p:timing>
 </p:sld>
 </file>
 
@@ -27236,6 +31039,524 @@
       </p:transition>
     </mc:Fallback>
   </mc:AlternateContent>
+  <p:timing>
+    <p:tnLst>
+      <p:par>
+        <p:cTn id="1" dur="indefinite" restart="never" nodeType="tmRoot">
+          <p:childTnLst>
+            <p:seq concurrent="1" nextAc="seek">
+              <p:cTn id="2" dur="indefinite" nodeType="mainSeq">
+                <p:childTnLst>
+                  <p:par>
+                    <p:cTn id="3" fill="hold">
+                      <p:stCondLst>
+                        <p:cond delay="indefinite"/>
+                        <p:cond evt="onBegin" delay="0">
+                          <p:tn val="2"/>
+                        </p:cond>
+                      </p:stCondLst>
+                      <p:childTnLst>
+                        <p:par>
+                          <p:cTn id="4" fill="hold">
+                            <p:stCondLst>
+                              <p:cond delay="0"/>
+                            </p:stCondLst>
+                            <p:childTnLst>
+                              <p:par>
+                                <p:cTn id="5" presetID="10" presetClass="entr" presetSubtype="0" fill="hold" grpId="0" nodeType="withEffect">
+                                  <p:stCondLst>
+                                    <p:cond delay="0"/>
+                                  </p:stCondLst>
+                                  <p:childTnLst>
+                                    <p:set>
+                                      <p:cBhvr>
+                                        <p:cTn id="6" dur="1" fill="hold">
+                                          <p:stCondLst>
+                                            <p:cond delay="0"/>
+                                          </p:stCondLst>
+                                        </p:cTn>
+                                        <p:tgtEl>
+                                          <p:spTgt spid="3"/>
+                                        </p:tgtEl>
+                                        <p:attrNameLst>
+                                          <p:attrName>style.visibility</p:attrName>
+                                        </p:attrNameLst>
+                                      </p:cBhvr>
+                                      <p:to>
+                                        <p:strVal val="visible"/>
+                                      </p:to>
+                                    </p:set>
+                                    <p:animEffect transition="in" filter="fade">
+                                      <p:cBhvr>
+                                        <p:cTn id="7" dur="500"/>
+                                        <p:tgtEl>
+                                          <p:spTgt spid="3"/>
+                                        </p:tgtEl>
+                                      </p:cBhvr>
+                                    </p:animEffect>
+                                  </p:childTnLst>
+                                </p:cTn>
+                              </p:par>
+                              <p:par>
+                                <p:cTn id="8" presetID="10" presetClass="entr" presetSubtype="0" fill="hold" nodeType="withEffect">
+                                  <p:stCondLst>
+                                    <p:cond delay="0"/>
+                                  </p:stCondLst>
+                                  <p:childTnLst>
+                                    <p:set>
+                                      <p:cBhvr>
+                                        <p:cTn id="9" dur="1" fill="hold">
+                                          <p:stCondLst>
+                                            <p:cond delay="0"/>
+                                          </p:stCondLst>
+                                        </p:cTn>
+                                        <p:tgtEl>
+                                          <p:spTgt spid="18"/>
+                                        </p:tgtEl>
+                                        <p:attrNameLst>
+                                          <p:attrName>style.visibility</p:attrName>
+                                        </p:attrNameLst>
+                                      </p:cBhvr>
+                                      <p:to>
+                                        <p:strVal val="visible"/>
+                                      </p:to>
+                                    </p:set>
+                                    <p:animEffect transition="in" filter="fade">
+                                      <p:cBhvr>
+                                        <p:cTn id="10" dur="500"/>
+                                        <p:tgtEl>
+                                          <p:spTgt spid="18"/>
+                                        </p:tgtEl>
+                                      </p:cBhvr>
+                                    </p:animEffect>
+                                  </p:childTnLst>
+                                </p:cTn>
+                              </p:par>
+                              <p:par>
+                                <p:cTn id="11" presetID="10" presetClass="entr" presetSubtype="0" fill="hold" grpId="0" nodeType="withEffect">
+                                  <p:stCondLst>
+                                    <p:cond delay="0"/>
+                                  </p:stCondLst>
+                                  <p:childTnLst>
+                                    <p:set>
+                                      <p:cBhvr>
+                                        <p:cTn id="12" dur="1" fill="hold">
+                                          <p:stCondLst>
+                                            <p:cond delay="0"/>
+                                          </p:stCondLst>
+                                        </p:cTn>
+                                        <p:tgtEl>
+                                          <p:spTgt spid="21"/>
+                                        </p:tgtEl>
+                                        <p:attrNameLst>
+                                          <p:attrName>style.visibility</p:attrName>
+                                        </p:attrNameLst>
+                                      </p:cBhvr>
+                                      <p:to>
+                                        <p:strVal val="visible"/>
+                                      </p:to>
+                                    </p:set>
+                                    <p:animEffect transition="in" filter="fade">
+                                      <p:cBhvr>
+                                        <p:cTn id="13" dur="500"/>
+                                        <p:tgtEl>
+                                          <p:spTgt spid="21"/>
+                                        </p:tgtEl>
+                                      </p:cBhvr>
+                                    </p:animEffect>
+                                  </p:childTnLst>
+                                </p:cTn>
+                              </p:par>
+                              <p:par>
+                                <p:cTn id="14" presetID="10" presetClass="entr" presetSubtype="0" fill="hold" grpId="0" nodeType="withEffect">
+                                  <p:stCondLst>
+                                    <p:cond delay="0"/>
+                                  </p:stCondLst>
+                                  <p:childTnLst>
+                                    <p:set>
+                                      <p:cBhvr>
+                                        <p:cTn id="15" dur="1" fill="hold">
+                                          <p:stCondLst>
+                                            <p:cond delay="0"/>
+                                          </p:stCondLst>
+                                        </p:cTn>
+                                        <p:tgtEl>
+                                          <p:spTgt spid="22"/>
+                                        </p:tgtEl>
+                                        <p:attrNameLst>
+                                          <p:attrName>style.visibility</p:attrName>
+                                        </p:attrNameLst>
+                                      </p:cBhvr>
+                                      <p:to>
+                                        <p:strVal val="visible"/>
+                                      </p:to>
+                                    </p:set>
+                                    <p:animEffect transition="in" filter="fade">
+                                      <p:cBhvr>
+                                        <p:cTn id="16" dur="500"/>
+                                        <p:tgtEl>
+                                          <p:spTgt spid="22"/>
+                                        </p:tgtEl>
+                                      </p:cBhvr>
+                                    </p:animEffect>
+                                  </p:childTnLst>
+                                </p:cTn>
+                              </p:par>
+                              <p:par>
+                                <p:cTn id="17" presetID="10" presetClass="entr" presetSubtype="0" fill="hold" grpId="0" nodeType="withEffect">
+                                  <p:stCondLst>
+                                    <p:cond delay="0"/>
+                                  </p:stCondLst>
+                                  <p:childTnLst>
+                                    <p:set>
+                                      <p:cBhvr>
+                                        <p:cTn id="18" dur="1" fill="hold">
+                                          <p:stCondLst>
+                                            <p:cond delay="0"/>
+                                          </p:stCondLst>
+                                        </p:cTn>
+                                        <p:tgtEl>
+                                          <p:spTgt spid="23"/>
+                                        </p:tgtEl>
+                                        <p:attrNameLst>
+                                          <p:attrName>style.visibility</p:attrName>
+                                        </p:attrNameLst>
+                                      </p:cBhvr>
+                                      <p:to>
+                                        <p:strVal val="visible"/>
+                                      </p:to>
+                                    </p:set>
+                                    <p:animEffect transition="in" filter="fade">
+                                      <p:cBhvr>
+                                        <p:cTn id="19" dur="500"/>
+                                        <p:tgtEl>
+                                          <p:spTgt spid="23"/>
+                                        </p:tgtEl>
+                                      </p:cBhvr>
+                                    </p:animEffect>
+                                  </p:childTnLst>
+                                </p:cTn>
+                              </p:par>
+                              <p:par>
+                                <p:cTn id="20" presetID="10" presetClass="entr" presetSubtype="0" fill="hold" nodeType="withEffect">
+                                  <p:stCondLst>
+                                    <p:cond delay="200"/>
+                                  </p:stCondLst>
+                                  <p:childTnLst>
+                                    <p:set>
+                                      <p:cBhvr>
+                                        <p:cTn id="21" dur="1" fill="hold">
+                                          <p:stCondLst>
+                                            <p:cond delay="0"/>
+                                          </p:stCondLst>
+                                        </p:cTn>
+                                        <p:tgtEl>
+                                          <p:spTgt spid="30"/>
+                                        </p:tgtEl>
+                                        <p:attrNameLst>
+                                          <p:attrName>style.visibility</p:attrName>
+                                        </p:attrNameLst>
+                                      </p:cBhvr>
+                                      <p:to>
+                                        <p:strVal val="visible"/>
+                                      </p:to>
+                                    </p:set>
+                                    <p:animEffect transition="in" filter="fade">
+                                      <p:cBhvr>
+                                        <p:cTn id="22" dur="500"/>
+                                        <p:tgtEl>
+                                          <p:spTgt spid="30"/>
+                                        </p:tgtEl>
+                                      </p:cBhvr>
+                                    </p:animEffect>
+                                  </p:childTnLst>
+                                </p:cTn>
+                              </p:par>
+                              <p:par>
+                                <p:cTn id="23" presetID="10" presetClass="entr" presetSubtype="0" fill="hold" grpId="0" nodeType="withEffect">
+                                  <p:stCondLst>
+                                    <p:cond delay="200"/>
+                                  </p:stCondLst>
+                                  <p:childTnLst>
+                                    <p:set>
+                                      <p:cBhvr>
+                                        <p:cTn id="24" dur="1" fill="hold">
+                                          <p:stCondLst>
+                                            <p:cond delay="0"/>
+                                          </p:stCondLst>
+                                        </p:cTn>
+                                        <p:tgtEl>
+                                          <p:spTgt spid="33"/>
+                                        </p:tgtEl>
+                                        <p:attrNameLst>
+                                          <p:attrName>style.visibility</p:attrName>
+                                        </p:attrNameLst>
+                                      </p:cBhvr>
+                                      <p:to>
+                                        <p:strVal val="visible"/>
+                                      </p:to>
+                                    </p:set>
+                                    <p:animEffect transition="in" filter="fade">
+                                      <p:cBhvr>
+                                        <p:cTn id="25" dur="500"/>
+                                        <p:tgtEl>
+                                          <p:spTgt spid="33"/>
+                                        </p:tgtEl>
+                                      </p:cBhvr>
+                                    </p:animEffect>
+                                  </p:childTnLst>
+                                </p:cTn>
+                              </p:par>
+                              <p:par>
+                                <p:cTn id="26" presetID="10" presetClass="entr" presetSubtype="0" fill="hold" grpId="0" nodeType="withEffect">
+                                  <p:stCondLst>
+                                    <p:cond delay="200"/>
+                                  </p:stCondLst>
+                                  <p:childTnLst>
+                                    <p:set>
+                                      <p:cBhvr>
+                                        <p:cTn id="27" dur="1" fill="hold">
+                                          <p:stCondLst>
+                                            <p:cond delay="0"/>
+                                          </p:stCondLst>
+                                        </p:cTn>
+                                        <p:tgtEl>
+                                          <p:spTgt spid="34"/>
+                                        </p:tgtEl>
+                                        <p:attrNameLst>
+                                          <p:attrName>style.visibility</p:attrName>
+                                        </p:attrNameLst>
+                                      </p:cBhvr>
+                                      <p:to>
+                                        <p:strVal val="visible"/>
+                                      </p:to>
+                                    </p:set>
+                                    <p:animEffect transition="in" filter="fade">
+                                      <p:cBhvr>
+                                        <p:cTn id="28" dur="500"/>
+                                        <p:tgtEl>
+                                          <p:spTgt spid="34"/>
+                                        </p:tgtEl>
+                                      </p:cBhvr>
+                                    </p:animEffect>
+                                  </p:childTnLst>
+                                </p:cTn>
+                              </p:par>
+                              <p:par>
+                                <p:cTn id="29" presetID="10" presetClass="entr" presetSubtype="0" fill="hold" grpId="0" nodeType="withEffect">
+                                  <p:stCondLst>
+                                    <p:cond delay="0"/>
+                                  </p:stCondLst>
+                                  <p:childTnLst>
+                                    <p:set>
+                                      <p:cBhvr>
+                                        <p:cTn id="30" dur="1" fill="hold">
+                                          <p:stCondLst>
+                                            <p:cond delay="0"/>
+                                          </p:stCondLst>
+                                        </p:cTn>
+                                        <p:tgtEl>
+                                          <p:spTgt spid="35"/>
+                                        </p:tgtEl>
+                                        <p:attrNameLst>
+                                          <p:attrName>style.visibility</p:attrName>
+                                        </p:attrNameLst>
+                                      </p:cBhvr>
+                                      <p:to>
+                                        <p:strVal val="visible"/>
+                                      </p:to>
+                                    </p:set>
+                                    <p:animEffect transition="in" filter="fade">
+                                      <p:cBhvr>
+                                        <p:cTn id="31" dur="500"/>
+                                        <p:tgtEl>
+                                          <p:spTgt spid="35"/>
+                                        </p:tgtEl>
+                                      </p:cBhvr>
+                                    </p:animEffect>
+                                  </p:childTnLst>
+                                </p:cTn>
+                              </p:par>
+                              <p:par>
+                                <p:cTn id="32" presetID="10" presetClass="entr" presetSubtype="0" fill="hold" nodeType="withEffect">
+                                  <p:stCondLst>
+                                    <p:cond delay="400"/>
+                                  </p:stCondLst>
+                                  <p:childTnLst>
+                                    <p:set>
+                                      <p:cBhvr>
+                                        <p:cTn id="33" dur="1" fill="hold">
+                                          <p:stCondLst>
+                                            <p:cond delay="0"/>
+                                          </p:stCondLst>
+                                        </p:cTn>
+                                        <p:tgtEl>
+                                          <p:spTgt spid="36"/>
+                                        </p:tgtEl>
+                                        <p:attrNameLst>
+                                          <p:attrName>style.visibility</p:attrName>
+                                        </p:attrNameLst>
+                                      </p:cBhvr>
+                                      <p:to>
+                                        <p:strVal val="visible"/>
+                                      </p:to>
+                                    </p:set>
+                                    <p:animEffect transition="in" filter="fade">
+                                      <p:cBhvr>
+                                        <p:cTn id="34" dur="500"/>
+                                        <p:tgtEl>
+                                          <p:spTgt spid="36"/>
+                                        </p:tgtEl>
+                                      </p:cBhvr>
+                                    </p:animEffect>
+                                  </p:childTnLst>
+                                </p:cTn>
+                              </p:par>
+                              <p:par>
+                                <p:cTn id="35" presetID="10" presetClass="entr" presetSubtype="0" fill="hold" grpId="0" nodeType="withEffect">
+                                  <p:stCondLst>
+                                    <p:cond delay="400"/>
+                                  </p:stCondLst>
+                                  <p:childTnLst>
+                                    <p:set>
+                                      <p:cBhvr>
+                                        <p:cTn id="36" dur="1" fill="hold">
+                                          <p:stCondLst>
+                                            <p:cond delay="0"/>
+                                          </p:stCondLst>
+                                        </p:cTn>
+                                        <p:tgtEl>
+                                          <p:spTgt spid="39"/>
+                                        </p:tgtEl>
+                                        <p:attrNameLst>
+                                          <p:attrName>style.visibility</p:attrName>
+                                        </p:attrNameLst>
+                                      </p:cBhvr>
+                                      <p:to>
+                                        <p:strVal val="visible"/>
+                                      </p:to>
+                                    </p:set>
+                                    <p:animEffect transition="in" filter="fade">
+                                      <p:cBhvr>
+                                        <p:cTn id="37" dur="500"/>
+                                        <p:tgtEl>
+                                          <p:spTgt spid="39"/>
+                                        </p:tgtEl>
+                                      </p:cBhvr>
+                                    </p:animEffect>
+                                  </p:childTnLst>
+                                </p:cTn>
+                              </p:par>
+                              <p:par>
+                                <p:cTn id="38" presetID="10" presetClass="entr" presetSubtype="0" fill="hold" grpId="0" nodeType="withEffect">
+                                  <p:stCondLst>
+                                    <p:cond delay="400"/>
+                                  </p:stCondLst>
+                                  <p:childTnLst>
+                                    <p:set>
+                                      <p:cBhvr>
+                                        <p:cTn id="39" dur="1" fill="hold">
+                                          <p:stCondLst>
+                                            <p:cond delay="0"/>
+                                          </p:stCondLst>
+                                        </p:cTn>
+                                        <p:tgtEl>
+                                          <p:spTgt spid="40"/>
+                                        </p:tgtEl>
+                                        <p:attrNameLst>
+                                          <p:attrName>style.visibility</p:attrName>
+                                        </p:attrNameLst>
+                                      </p:cBhvr>
+                                      <p:to>
+                                        <p:strVal val="visible"/>
+                                      </p:to>
+                                    </p:set>
+                                    <p:animEffect transition="in" filter="fade">
+                                      <p:cBhvr>
+                                        <p:cTn id="40" dur="500"/>
+                                        <p:tgtEl>
+                                          <p:spTgt spid="40"/>
+                                        </p:tgtEl>
+                                      </p:cBhvr>
+                                    </p:animEffect>
+                                  </p:childTnLst>
+                                </p:cTn>
+                              </p:par>
+                              <p:par>
+                                <p:cTn id="41" presetID="10" presetClass="entr" presetSubtype="0" fill="hold" grpId="0" nodeType="withEffect">
+                                  <p:stCondLst>
+                                    <p:cond delay="400"/>
+                                  </p:stCondLst>
+                                  <p:childTnLst>
+                                    <p:set>
+                                      <p:cBhvr>
+                                        <p:cTn id="42" dur="1" fill="hold">
+                                          <p:stCondLst>
+                                            <p:cond delay="0"/>
+                                          </p:stCondLst>
+                                        </p:cTn>
+                                        <p:tgtEl>
+                                          <p:spTgt spid="41"/>
+                                        </p:tgtEl>
+                                        <p:attrNameLst>
+                                          <p:attrName>style.visibility</p:attrName>
+                                        </p:attrNameLst>
+                                      </p:cBhvr>
+                                      <p:to>
+                                        <p:strVal val="visible"/>
+                                      </p:to>
+                                    </p:set>
+                                    <p:animEffect transition="in" filter="fade">
+                                      <p:cBhvr>
+                                        <p:cTn id="43" dur="500"/>
+                                        <p:tgtEl>
+                                          <p:spTgt spid="41"/>
+                                        </p:tgtEl>
+                                      </p:cBhvr>
+                                    </p:animEffect>
+                                  </p:childTnLst>
+                                </p:cTn>
+                              </p:par>
+                            </p:childTnLst>
+                          </p:cTn>
+                        </p:par>
+                      </p:childTnLst>
+                    </p:cTn>
+                  </p:par>
+                </p:childTnLst>
+              </p:cTn>
+              <p:prevCondLst>
+                <p:cond evt="onPrev" delay="0">
+                  <p:tgtEl>
+                    <p:sldTgt/>
+                  </p:tgtEl>
+                </p:cond>
+              </p:prevCondLst>
+              <p:nextCondLst>
+                <p:cond evt="onNext" delay="0">
+                  <p:tgtEl>
+                    <p:sldTgt/>
+                  </p:tgtEl>
+                </p:cond>
+              </p:nextCondLst>
+            </p:seq>
+          </p:childTnLst>
+        </p:cTn>
+      </p:par>
+    </p:tnLst>
+    <p:bldLst>
+      <p:bldP spid="3" grpId="0" animBg="1"/>
+      <p:bldP spid="21" grpId="0" animBg="1"/>
+      <p:bldP spid="22" grpId="0" animBg="1"/>
+      <p:bldP spid="23" grpId="0" animBg="1"/>
+      <p:bldP spid="33" grpId="0" animBg="1"/>
+      <p:bldP spid="34" grpId="0" animBg="1"/>
+      <p:bldP spid="35" grpId="0" animBg="1"/>
+      <p:bldP spid="39" grpId="0" animBg="1"/>
+      <p:bldP spid="40" grpId="0" animBg="1"/>
+      <p:bldP spid="41" grpId="0" animBg="1"/>
+    </p:bldLst>
+  </p:timing>
 </p:sld>
 </file>
 
@@ -27416,7 +31737,7 @@
           <a:ln/>
         </p:spPr>
         <p:txBody>
-          <a:bodyPr wrap="square" lIns="0" tIns="0" rIns="0" bIns="0" rtlCol="0" anchor="ctr"/>
+          <a:bodyPr wrap="square" lIns="0" tIns="0" rIns="0" bIns="0" rtlCol="0" anchor="t"/>
           <a:lstStyle/>
           <a:p>
             <a:pPr marL="0" indent="0" algn="l">

--- a/PPT giga.pptx
+++ b/PPT giga.pptx
@@ -3995,7 +3995,7 @@
           <a:p>
             <a:pPr marL="0" indent="0" algn="l">
               <a:lnSpc>
-                <a:spcPts val="1881"/>
+                <a:spcPts val="2481"/>
               </a:lnSpc>
               <a:buNone/>
             </a:pPr>
@@ -4010,9 +4010,8 @@
                 <a:ea typeface="Manrope" pitchFamily="34" charset="-122"/>
                 <a:cs typeface="Manrope" pitchFamily="34" charset="-120"/>
               </a:rPr>
-              <a:t>Simple, Actionable, One-Slide Format​.</a:t>
+              <a:t>Simple, Actionable, One-Slide Format​</a:t>
             </a:r>
-            <a:endParaRPr lang="en-US" sz="1710" dirty="0"/>
           </a:p>
         </p:txBody>
       </p:sp>
@@ -6818,7 +6817,7 @@
         </p:nvSpPr>
         <p:spPr>
           <a:xfrm>
-            <a:off x="4904013" y="476250"/>
+            <a:off x="4904013" y="415015"/>
             <a:ext cx="3787549" cy="2013858"/>
           </a:xfrm>
           <a:prstGeom prst="rect">
@@ -6848,7 +6847,7 @@
                 <a:ea typeface="Manrope" pitchFamily="34" charset="-122"/>
                 <a:cs typeface="Manrope" pitchFamily="34" charset="-120"/>
               </a:rPr>
-              <a:t>56%</a:t>
+              <a:t>100%</a:t>
             </a:r>
             <a:endParaRPr lang="en-US" sz="8000" dirty="0"/>
           </a:p>

--- a/PPT giga.pptx
+++ b/PPT giga.pptx
@@ -5330,7 +5330,7 @@
           <a:ln/>
         </p:spPr>
         <p:txBody>
-          <a:bodyPr wrap="square" lIns="0" tIns="0" rIns="0" bIns="0" rtlCol="0" anchor="t">
+          <a:bodyPr wrap="square" lIns="0" tIns="0" rIns="0" bIns="0" rtlCol="0" anchor="b">
             <a:normAutofit/>
           </a:bodyPr>
           <a:lstStyle/>
@@ -5366,7 +5366,7 @@
         </p:nvSpPr>
         <p:spPr>
           <a:xfrm>
-            <a:off x="4476750" y="1200150"/>
+            <a:off x="4476750" y="1143002"/>
             <a:ext cx="1838325" cy="442913"/>
           </a:xfrm>
           <a:prstGeom prst="rect">
@@ -5447,7 +5447,7 @@
           <a:ln/>
         </p:spPr>
         <p:txBody>
-          <a:bodyPr wrap="square" lIns="0" tIns="0" rIns="0" bIns="0" rtlCol="0" anchor="t">
+          <a:bodyPr wrap="square" lIns="0" tIns="0" rIns="0" bIns="0" rtlCol="0" anchor="b">
             <a:normAutofit/>
           </a:bodyPr>
           <a:lstStyle/>
@@ -5483,7 +5483,7 @@
         </p:nvSpPr>
         <p:spPr>
           <a:xfrm>
-            <a:off x="4476750" y="2495550"/>
+            <a:off x="4476750" y="2438402"/>
             <a:ext cx="1838325" cy="442913"/>
           </a:xfrm>
           <a:prstGeom prst="rect">
@@ -5564,7 +5564,7 @@
           <a:ln/>
         </p:spPr>
         <p:txBody>
-          <a:bodyPr wrap="square" lIns="0" tIns="0" rIns="0" bIns="0" rtlCol="0" anchor="t">
+          <a:bodyPr wrap="square" lIns="0" tIns="0" rIns="0" bIns="0" rtlCol="0" anchor="b">
             <a:normAutofit/>
           </a:bodyPr>
           <a:lstStyle/>
@@ -5600,7 +5600,7 @@
         </p:nvSpPr>
         <p:spPr>
           <a:xfrm>
-            <a:off x="4476750" y="3790950"/>
+            <a:off x="4476750" y="3733802"/>
             <a:ext cx="1838325" cy="442913"/>
           </a:xfrm>
           <a:prstGeom prst="rect">
@@ -5681,7 +5681,7 @@
           <a:ln/>
         </p:spPr>
         <p:txBody>
-          <a:bodyPr wrap="square" lIns="0" tIns="0" rIns="0" bIns="0" rtlCol="0" anchor="t">
+          <a:bodyPr wrap="square" lIns="0" tIns="0" rIns="0" bIns="0" rtlCol="0" anchor="b">
             <a:normAutofit/>
           </a:bodyPr>
           <a:lstStyle/>
@@ -5717,7 +5717,7 @@
         </p:nvSpPr>
         <p:spPr>
           <a:xfrm>
-            <a:off x="6853238" y="1200150"/>
+            <a:off x="6853238" y="1143002"/>
             <a:ext cx="1838325" cy="442913"/>
           </a:xfrm>
           <a:prstGeom prst="rect">
@@ -5798,7 +5798,7 @@
           <a:ln/>
         </p:spPr>
         <p:txBody>
-          <a:bodyPr wrap="square" lIns="0" tIns="0" rIns="0" bIns="0" rtlCol="0" anchor="t">
+          <a:bodyPr wrap="square" lIns="0" tIns="0" rIns="0" bIns="0" rtlCol="0" anchor="b">
             <a:normAutofit/>
           </a:bodyPr>
           <a:lstStyle/>
@@ -5834,7 +5834,7 @@
         </p:nvSpPr>
         <p:spPr>
           <a:xfrm>
-            <a:off x="6853238" y="2495550"/>
+            <a:off x="6853238" y="2438402"/>
             <a:ext cx="1838325" cy="442913"/>
           </a:xfrm>
           <a:prstGeom prst="rect">
@@ -5915,7 +5915,7 @@
           <a:ln/>
         </p:spPr>
         <p:txBody>
-          <a:bodyPr wrap="square" lIns="0" tIns="0" rIns="0" bIns="0" rtlCol="0" anchor="t">
+          <a:bodyPr wrap="square" lIns="0" tIns="0" rIns="0" bIns="0" rtlCol="0" anchor="b">
             <a:normAutofit/>
           </a:bodyPr>
           <a:lstStyle/>
@@ -5951,7 +5951,7 @@
         </p:nvSpPr>
         <p:spPr>
           <a:xfrm>
-            <a:off x="6853238" y="3790950"/>
+            <a:off x="6853238" y="3733802"/>
             <a:ext cx="1838325" cy="442913"/>
           </a:xfrm>
           <a:prstGeom prst="rect">
@@ -9611,29 +9611,6 @@
           <a:chExt cx="0" cy="0"/>
         </a:xfrm>
       </p:grpSpPr>
-      <p:pic>
-        <p:nvPicPr>
-          <p:cNvPr id="2" name="Image 0" descr="preencoded.png"/>
-          <p:cNvPicPr>
-            <a:picLocks noChangeAspect="1"/>
-          </p:cNvPicPr>
-          <p:nvPr/>
-        </p:nvPicPr>
-        <p:blipFill>
-          <a:blip r:embed="rId3"/>
-          <a:srcRect/>
-          <a:stretch/>
-        </p:blipFill>
-        <p:spPr>
-          <a:xfrm>
-            <a:off x="0" y="0"/>
-            <a:ext cx="4000500" cy="5143500"/>
-          </a:xfrm>
-          <a:prstGeom prst="rect">
-            <a:avLst/>
-          </a:prstGeom>
-        </p:spPr>
-      </p:pic>
       <p:sp>
         <p:nvSpPr>
           <p:cNvPr id="3" name="Text 0"/>
@@ -9929,7 +9906,7 @@
           <p:nvPr/>
         </p:nvPicPr>
         <p:blipFill>
-          <a:blip r:embed="rId4"/>
+          <a:blip r:embed="rId3"/>
           <a:srcRect/>
           <a:stretch/>
         </p:blipFill>
@@ -9937,6 +9914,37 @@
           <a:xfrm>
             <a:off x="7324725" y="4524375"/>
             <a:ext cx="1366838" cy="285750"/>
+          </a:xfrm>
+          <a:prstGeom prst="rect">
+            <a:avLst/>
+          </a:prstGeom>
+        </p:spPr>
+      </p:pic>
+      <p:pic>
+        <p:nvPicPr>
+          <p:cNvPr id="11" name="Image 0">
+            <a:extLst>
+              <a:ext uri="{FF2B5EF4-FFF2-40B4-BE49-F238E27FC236}">
+                <a16:creationId xmlns:a16="http://schemas.microsoft.com/office/drawing/2014/main" id="{41871F62-771E-5927-BF59-E464338A6D71}"/>
+              </a:ext>
+            </a:extLst>
+          </p:cNvPr>
+          <p:cNvPicPr>
+            <a:picLocks noChangeAspect="1"/>
+          </p:cNvPicPr>
+          <p:nvPr/>
+        </p:nvPicPr>
+        <p:blipFill>
+          <a:blip r:embed="rId4"/>
+          <a:srcRect l="27561" t="158" r="28758" b="1"/>
+          <a:stretch>
+            <a:fillRect/>
+          </a:stretch>
+        </p:blipFill>
+        <p:spPr>
+          <a:xfrm>
+            <a:off x="-9525" y="1"/>
+            <a:ext cx="4000500" cy="5143499"/>
           </a:xfrm>
           <a:prstGeom prst="rect">
             <a:avLst/>
@@ -10231,7 +10239,13 @@
       </p:grpSpPr>
       <p:pic>
         <p:nvPicPr>
-          <p:cNvPr id="2" name="Image 0" descr="preencoded.png"/>
+          <p:cNvPr id="11" name="Image 0">
+            <a:extLst>
+              <a:ext uri="{FF2B5EF4-FFF2-40B4-BE49-F238E27FC236}">
+                <a16:creationId xmlns:a16="http://schemas.microsoft.com/office/drawing/2014/main" id="{346F3E1C-24A1-E0F1-E8DE-C443E5CE5E7A}"/>
+              </a:ext>
+            </a:extLst>
+          </p:cNvPr>
           <p:cNvPicPr>
             <a:picLocks noChangeAspect="1"/>
           </p:cNvPicPr>
@@ -10239,13 +10253,15 @@
         </p:nvPicPr>
         <p:blipFill>
           <a:blip r:embed="rId3"/>
-          <a:srcRect/>
-          <a:stretch/>
-        </p:blipFill>
-        <p:spPr>
-          <a:xfrm>
-            <a:off x="5143500" y="0"/>
-            <a:ext cx="4000500" cy="5143500"/>
+          <a:srcRect l="27561" t="158" r="28758" b="1"/>
+          <a:stretch>
+            <a:fillRect/>
+          </a:stretch>
+        </p:blipFill>
+        <p:spPr>
+          <a:xfrm>
+            <a:off x="5143500" y="1"/>
+            <a:ext cx="4000500" cy="5143499"/>
           </a:xfrm>
           <a:prstGeom prst="rect">
             <a:avLst/>

--- a/PPT giga.pptx
+++ b/PPT giga.pptx
@@ -5330,7 +5330,7 @@
           <a:ln/>
         </p:spPr>
         <p:txBody>
-          <a:bodyPr wrap="square" lIns="0" tIns="0" rIns="0" bIns="0" rtlCol="0" anchor="b">
+          <a:bodyPr wrap="square" lIns="0" tIns="0" rIns="0" bIns="0" rtlCol="0" anchor="ctr">
             <a:normAutofit/>
           </a:bodyPr>
           <a:lstStyle/>
@@ -5447,7 +5447,7 @@
           <a:ln/>
         </p:spPr>
         <p:txBody>
-          <a:bodyPr wrap="square" lIns="0" tIns="0" rIns="0" bIns="0" rtlCol="0" anchor="b">
+          <a:bodyPr wrap="square" lIns="0" tIns="0" rIns="0" bIns="0" rtlCol="0" anchor="ctr">
             <a:normAutofit/>
           </a:bodyPr>
           <a:lstStyle/>
@@ -5564,7 +5564,7 @@
           <a:ln/>
         </p:spPr>
         <p:txBody>
-          <a:bodyPr wrap="square" lIns="0" tIns="0" rIns="0" bIns="0" rtlCol="0" anchor="b">
+          <a:bodyPr wrap="square" lIns="0" tIns="0" rIns="0" bIns="0" rtlCol="0" anchor="ctr">
             <a:normAutofit/>
           </a:bodyPr>
           <a:lstStyle/>
@@ -5681,7 +5681,7 @@
           <a:ln/>
         </p:spPr>
         <p:txBody>
-          <a:bodyPr wrap="square" lIns="0" tIns="0" rIns="0" bIns="0" rtlCol="0" anchor="b">
+          <a:bodyPr wrap="square" lIns="0" tIns="0" rIns="0" bIns="0" rtlCol="0" anchor="ctr">
             <a:normAutofit/>
           </a:bodyPr>
           <a:lstStyle/>
@@ -5798,7 +5798,7 @@
           <a:ln/>
         </p:spPr>
         <p:txBody>
-          <a:bodyPr wrap="square" lIns="0" tIns="0" rIns="0" bIns="0" rtlCol="0" anchor="b">
+          <a:bodyPr wrap="square" lIns="0" tIns="0" rIns="0" bIns="0" rtlCol="0" anchor="ctr">
             <a:normAutofit/>
           </a:bodyPr>
           <a:lstStyle/>
@@ -5915,7 +5915,7 @@
           <a:ln/>
         </p:spPr>
         <p:txBody>
-          <a:bodyPr wrap="square" lIns="0" tIns="0" rIns="0" bIns="0" rtlCol="0" anchor="b">
+          <a:bodyPr wrap="square" lIns="0" tIns="0" rIns="0" bIns="0" rtlCol="0" anchor="ctr">
             <a:normAutofit/>
           </a:bodyPr>
           <a:lstStyle/>
